--- a/model-origin/model-origin.pptx
+++ b/model-origin/model-origin.pptx
@@ -1470,7 +1470,7 @@
     <p:bg>
       <p:bgPr>
         <a:solidFill>
-          <a:srgbClr val="FBFAF7"/>
+          <a:srgbClr val="FAF8F4"/>
         </a:solidFill>
       </p:bgPr>
     </p:bg>
@@ -1800,27 +1800,7 @@
       </p:grpSpPr>
       <p:sp>
         <p:nvSpPr>
-          <p:cNvPr id="2" name="Shape 0"/>
-          <p:cNvSpPr/>
-          <p:nvPr/>
-        </p:nvSpPr>
-        <p:spPr>
-          <a:xfrm>
-            <a:off x="0" y="0"/>
-            <a:ext cx="12188952" cy="6858000"/>
-          </a:xfrm>
-          <a:prstGeom prst="rect">
-            <a:avLst/>
-          </a:prstGeom>
-          <a:solidFill>
-            <a:srgbClr val="2C4D44"/>
-          </a:solidFill>
-          <a:ln/>
-        </p:spPr>
-      </p:sp>
-      <p:sp>
-        <p:nvSpPr>
-          <p:cNvPr id="3" name="Text 1"/>
+          <p:cNvPr id="2" name="Text 0"/>
           <p:cNvSpPr/>
           <p:nvPr/>
         </p:nvSpPr>
@@ -1859,14 +1839,53 @@
       </p:sp>
       <p:sp>
         <p:nvSpPr>
+          <p:cNvPr id="3" name="Text 1"/>
+          <p:cNvSpPr/>
+          <p:nvPr/>
+        </p:nvSpPr>
+        <p:spPr>
+          <a:xfrm>
+            <a:off x="731520" y="2651760"/>
+            <a:ext cx="10698480" cy="1554480"/>
+          </a:xfrm>
+          <a:prstGeom prst="rect">
+            <a:avLst/>
+          </a:prstGeom>
+          <a:noFill/>
+          <a:ln/>
+        </p:spPr>
+        <p:txBody>
+          <a:bodyPr wrap="square" rtlCol="0" anchor="ctr"/>
+          <a:lstStyle/>
+          <a:p>
+            <a:pPr algn="ctr" indent="0" marL="0">
+              <a:buNone/>
+            </a:pPr>
+            <a:r>
+              <a:rPr lang="en-US" sz="4000" b="1" dirty="0">
+                <a:solidFill>
+                  <a:srgbClr val="FFFFFF"/>
+                </a:solidFill>
+                <a:latin typeface="Malgun Gothic" pitchFamily="34" charset="0"/>
+                <a:ea typeface="Malgun Gothic" pitchFamily="34" charset="-122"/>
+                <a:cs typeface="Malgun Gothic" pitchFamily="34" charset="-120"/>
+              </a:rPr>
+              <a:t>지금 이 모델은 어디서 왔을까</a:t>
+            </a:r>
+            <a:endParaRPr lang="en-US" sz="4000" dirty="0"/>
+          </a:p>
+        </p:txBody>
+      </p:sp>
+      <p:sp>
+        <p:nvSpPr>
           <p:cNvPr id="4" name="Text 2"/>
           <p:cNvSpPr/>
           <p:nvPr/>
         </p:nvSpPr>
         <p:spPr>
           <a:xfrm>
-            <a:off x="731520" y="2651760"/>
-            <a:ext cx="10698480" cy="1463040"/>
+            <a:off x="731520" y="4389120"/>
+            <a:ext cx="10698480" cy="731520"/>
           </a:xfrm>
           <a:prstGeom prst="rect">
             <a:avLst/>
@@ -1875,24 +1894,24 @@
           <a:ln/>
         </p:spPr>
         <p:txBody>
-          <a:bodyPr wrap="square" rtlCol="0" anchor="ctr"/>
+          <a:bodyPr wrap="square" rtlCol="0" anchor="t"/>
           <a:lstStyle/>
           <a:p>
             <a:pPr algn="ctr" indent="0" marL="0">
               <a:buNone/>
             </a:pPr>
             <a:r>
-              <a:rPr lang="en-US" sz="4000" b="1" dirty="0">
-                <a:solidFill>
-                  <a:srgbClr val="FFFFFF"/>
-                </a:solidFill>
-                <a:latin typeface="Malgun Gothic" pitchFamily="34" charset="0"/>
-                <a:ea typeface="Malgun Gothic" pitchFamily="34" charset="-122"/>
-                <a:cs typeface="Malgun Gothic" pitchFamily="34" charset="-120"/>
-              </a:rPr>
-              <a:t>지금 이 모델은 어디서 왔을까</a:t>
-            </a:r>
-            <a:endParaRPr lang="en-US" sz="4000" dirty="0"/>
+              <a:rPr lang="en-US" sz="1800" dirty="0">
+                <a:solidFill>
+                  <a:srgbClr val="E4EDE8"/>
+                </a:solidFill>
+                <a:latin typeface="Malgun Gothic" pitchFamily="34" charset="0"/>
+                <a:ea typeface="Malgun Gothic" pitchFamily="34" charset="-122"/>
+                <a:cs typeface="Malgun Gothic" pitchFamily="34" charset="-120"/>
+              </a:rPr>
+              <a:t>두 골목이 같은 벽에 부딪혔다가, 한 열쇠로 합류한 이야기</a:t>
+            </a:r>
+            <a:endParaRPr lang="en-US" sz="1800" dirty="0"/>
           </a:p>
         </p:txBody>
       </p:sp>
@@ -1904,46 +1923,7 @@
         </p:nvSpPr>
         <p:spPr>
           <a:xfrm>
-            <a:off x="731520" y="4297680"/>
-            <a:ext cx="10698480" cy="640080"/>
-          </a:xfrm>
-          <a:prstGeom prst="rect">
-            <a:avLst/>
-          </a:prstGeom>
-          <a:noFill/>
-          <a:ln/>
-        </p:spPr>
-        <p:txBody>
-          <a:bodyPr wrap="square" rtlCol="0" anchor="ctr"/>
-          <a:lstStyle/>
-          <a:p>
-            <a:pPr algn="ctr" indent="0" marL="0">
-              <a:buNone/>
-            </a:pPr>
-            <a:r>
-              <a:rPr lang="en-US" sz="1800" dirty="0">
-                <a:solidFill>
-                  <a:srgbClr val="E4EDE8"/>
-                </a:solidFill>
-                <a:latin typeface="Malgun Gothic" pitchFamily="34" charset="0"/>
-                <a:ea typeface="Malgun Gothic" pitchFamily="34" charset="-122"/>
-                <a:cs typeface="Malgun Gothic" pitchFamily="34" charset="-120"/>
-              </a:rPr>
-              <a:t>두 골목이 같은 벽에 부딪혔다가, 한 열쇠로 합류한 이야기</a:t>
-            </a:r>
-            <a:endParaRPr lang="en-US" sz="1800" dirty="0"/>
-          </a:p>
-        </p:txBody>
-      </p:sp>
-      <p:sp>
-        <p:nvSpPr>
-          <p:cNvPr id="6" name="Text 4"/>
-          <p:cNvSpPr/>
-          <p:nvPr/>
-        </p:nvSpPr>
-        <p:spPr>
-          <a:xfrm>
-            <a:off x="731520" y="5943600"/>
+            <a:off x="731520" y="6035040"/>
             <a:ext cx="10698480" cy="365760"/>
           </a:xfrm>
           <a:prstGeom prst="rect">
@@ -1985,6 +1965,13 @@
 <file path=ppt/slides/slide10.xml><?xml version="1.0" encoding="utf-8"?>
 <p:sld xmlns:a="http://schemas.openxmlformats.org/drawingml/2006/main" xmlns:r="http://schemas.openxmlformats.org/officeDocument/2006/relationships" xmlns:p="http://schemas.openxmlformats.org/presentationml/2006/main">
   <p:cSld name="Slide 10">
+    <p:bg>
+      <p:bgPr>
+        <a:solidFill>
+          <a:srgbClr val="FAF8F4"/>
+        </a:solidFill>
+      </p:bgPr>
+    </p:bg>
     <p:spTree>
       <p:nvGrpSpPr>
         <p:cNvPr id="1" name=""/>
@@ -2007,8 +1994,8 @@
         </p:nvSpPr>
         <p:spPr>
           <a:xfrm>
-            <a:off x="548640" y="365760"/>
-            <a:ext cx="11091672" cy="822960"/>
+            <a:off x="548640" y="384048"/>
+            <a:ext cx="11091672" cy="731520"/>
           </a:xfrm>
           <a:prstGeom prst="rect">
             <a:avLst/>
@@ -2017,132 +2004,699 @@
           <a:ln/>
         </p:spPr>
         <p:txBody>
-          <a:bodyPr wrap="square" lIns="0" tIns="0" rIns="0" bIns="0" rtlCol="0" anchor="ctr"/>
-          <a:lstStyle/>
-          <a:p>
-            <a:pPr indent="0" marL="0">
-              <a:buNone/>
-            </a:pPr>
-            <a:r>
-              <a:rPr lang="en-US" sz="2600" b="1" dirty="0">
-                <a:solidFill>
-                  <a:srgbClr val="2A2723"/>
-                </a:solidFill>
-                <a:latin typeface="Malgun Gothic" pitchFamily="34" charset="0"/>
-                <a:ea typeface="Malgun Gothic" pitchFamily="34" charset="-122"/>
-                <a:cs typeface="Malgun Gothic" pitchFamily="34" charset="-120"/>
-              </a:rPr>
-              <a:t>✅ 정답 &amp; 해설</a:t>
-            </a:r>
-            <a:endParaRPr lang="en-US" sz="2600" dirty="0"/>
-          </a:p>
-        </p:txBody>
-      </p:sp>
-      <p:sp>
-        <p:nvSpPr>
-          <p:cNvPr id="3" name="Text 1"/>
-          <p:cNvSpPr/>
-          <p:nvPr/>
-        </p:nvSpPr>
-        <p:spPr>
-          <a:xfrm>
-            <a:off x="548640" y="1325880"/>
-            <a:ext cx="11091672" cy="5074920"/>
-          </a:xfrm>
-          <a:prstGeom prst="rect">
-            <a:avLst/>
-          </a:prstGeom>
-          <a:noFill/>
-          <a:ln/>
-        </p:spPr>
-        <p:txBody>
-          <a:bodyPr wrap="square" lIns="0" tIns="0" rIns="0" bIns="0" rtlCol="0" anchor="t">
+          <a:bodyPr wrap="square" rtlCol="0" anchor="ctr">
             <a:normAutofit/>
           </a:bodyPr>
           <a:lstStyle/>
           <a:p>
-            <a:pPr marL="177800" indent="-177800">
-              <a:spcAft>
-                <a:spcPts val="600"/>
-              </a:spcAft>
-              <a:buSzPct val="100000"/>
-              <a:buChar char="•"/>
-            </a:pPr>
-            <a:r>
-              <a:rPr lang="en-US" sz="1400" dirty="0">
-                <a:solidFill>
-                  <a:srgbClr val="2A2723"/>
-                </a:solidFill>
-                <a:latin typeface="Malgun Gothic" pitchFamily="34" charset="0"/>
-                <a:ea typeface="Malgun Gothic" pitchFamily="34" charset="-122"/>
-                <a:cs typeface="Malgun Gothic" pitchFamily="34" charset="-120"/>
-              </a:rPr>
-              <a:t>A1. 아니다. 모델이 토큰으로 쪼개 한 번에 보는 창(컨텍스트)의 크기가 정해져 있고, 그 안에서 어디에 주의를 배분하느냐의 문제.</a:t>
-            </a:r>
-            <a:endParaRPr lang="en-US" sz="1400" dirty="0"/>
-          </a:p>
-          <a:p>
-            <a:pPr marL="177800" indent="-177800">
-              <a:spcAft>
-                <a:spcPts val="600"/>
-              </a:spcAft>
-              <a:buSzPct val="100000"/>
-              <a:buChar char="•"/>
-            </a:pPr>
-            <a:r>
-              <a:rPr lang="en-US" sz="1400" dirty="0">
-                <a:solidFill>
-                  <a:srgbClr val="2A2723"/>
-                </a:solidFill>
-                <a:latin typeface="Malgun Gothic" pitchFamily="34" charset="0"/>
-                <a:ea typeface="Malgun Gothic" pitchFamily="34" charset="-122"/>
-                <a:cs typeface="Malgun Gothic" pitchFamily="34" charset="-120"/>
-              </a:rPr>
-              <a:t>A2. "얼마나 넣느냐"가 아니라 "어떻게 배치하고 무엇에 집중시키느냐"의 문제.</a:t>
-            </a:r>
-            <a:endParaRPr lang="en-US" sz="1400" dirty="0"/>
-          </a:p>
-          <a:p>
-            <a:pPr marL="177800" indent="-177800">
-              <a:spcAft>
-                <a:spcPts val="600"/>
-              </a:spcAft>
-              <a:buSzPct val="100000"/>
-              <a:buChar char="•"/>
-            </a:pPr>
-            <a:r>
-              <a:rPr lang="en-US" sz="1400" dirty="0">
-                <a:solidFill>
-                  <a:srgbClr val="2A2723"/>
-                </a:solidFill>
-                <a:latin typeface="Malgun Gothic" pitchFamily="34" charset="0"/>
-                <a:ea typeface="Malgun Gothic" pitchFamily="34" charset="-122"/>
-                <a:cs typeface="Malgun Gothic" pitchFamily="34" charset="-120"/>
-              </a:rPr>
-              <a:t>A3. 발명품이 아니라, 이미지와 언어 두 분야가 각자의 벽에 부딪혔다가 같은 열쇠 하나로 동시에 뚫으며 합류한 결과.</a:t>
-            </a:r>
-            <a:endParaRPr lang="en-US" sz="1400" dirty="0"/>
-          </a:p>
-          <a:p>
-            <a:pPr marL="177800" indent="-177800">
-              <a:spcAft>
-                <a:spcPts val="600"/>
-              </a:spcAft>
-              <a:buSzPct val="100000"/>
-              <a:buChar char="•"/>
-            </a:pPr>
-            <a:r>
-              <a:rPr lang="en-US" sz="1400" dirty="0">
-                <a:solidFill>
-                  <a:srgbClr val="2A2723"/>
-                </a:solidFill>
-                <a:latin typeface="Malgun Gothic" pitchFamily="34" charset="0"/>
-                <a:ea typeface="Malgun Gothic" pitchFamily="34" charset="-122"/>
-                <a:cs typeface="Malgun Gothic" pitchFamily="34" charset="-120"/>
-              </a:rPr>
-              <a:t>A4. 이미지 = 깊이의 벽(신경망을 더 깊게 쌓기), 언어 = 순차의 벽(앞 단어를 잊지 않고 긴 문장 처리). 얼핏 달라 보여도 뿌리가 닮았다.</a:t>
-            </a:r>
-            <a:endParaRPr lang="en-US" sz="1400" dirty="0"/>
+            <a:pPr indent="0" marL="0">
+              <a:buNone/>
+            </a:pPr>
+            <a:r>
+              <a:rPr lang="en-US" sz="2400" b="1" dirty="0">
+                <a:solidFill>
+                  <a:srgbClr val="2A2723"/>
+                </a:solidFill>
+                <a:latin typeface="Malgun Gothic" pitchFamily="34" charset="0"/>
+                <a:ea typeface="Malgun Gothic" pitchFamily="34" charset="-122"/>
+                <a:cs typeface="Malgun Gothic" pitchFamily="34" charset="-120"/>
+              </a:rPr>
+              <a:t>✅ 정답 &amp; 해설</a:t>
+            </a:r>
+            <a:endParaRPr lang="en-US" sz="2400" dirty="0"/>
+          </a:p>
+        </p:txBody>
+      </p:sp>
+      <p:sp>
+        <p:nvSpPr>
+          <p:cNvPr id="3" name="Shape 1"/>
+          <p:cNvSpPr/>
+          <p:nvPr/>
+        </p:nvSpPr>
+        <p:spPr>
+          <a:xfrm>
+            <a:off x="566928" y="1133856"/>
+            <a:ext cx="777240" cy="41148"/>
+          </a:xfrm>
+          <a:prstGeom prst="rect">
+            <a:avLst/>
+          </a:prstGeom>
+          <a:solidFill>
+            <a:srgbClr val="3F6B5F"/>
+          </a:solidFill>
+          <a:ln/>
+        </p:spPr>
+      </p:sp>
+      <p:sp>
+        <p:nvSpPr>
+          <p:cNvPr id="4" name="Shape 2"/>
+          <p:cNvSpPr/>
+          <p:nvPr/>
+        </p:nvSpPr>
+        <p:spPr>
+          <a:xfrm>
+            <a:off x="612648" y="1371600"/>
+            <a:ext cx="11027664" cy="441579"/>
+          </a:xfrm>
+          <a:prstGeom prst="roundRect">
+            <a:avLst>
+              <a:gd name="adj" fmla="val 18637"/>
+            </a:avLst>
+          </a:prstGeom>
+          <a:solidFill>
+            <a:srgbClr val="FFFFFF"/>
+          </a:solidFill>
+          <a:ln w="12700">
+            <a:solidFill>
+              <a:srgbClr val="E3DACB"/>
+            </a:solidFill>
+            <a:prstDash val="solid"/>
+          </a:ln>
+        </p:spPr>
+      </p:sp>
+      <p:sp>
+        <p:nvSpPr>
+          <p:cNvPr id="5" name="Shape 3"/>
+          <p:cNvSpPr/>
+          <p:nvPr/>
+        </p:nvSpPr>
+        <p:spPr>
+          <a:xfrm>
+            <a:off x="548640" y="1371600"/>
+            <a:ext cx="64008" cy="441579"/>
+          </a:xfrm>
+          <a:prstGeom prst="rect">
+            <a:avLst/>
+          </a:prstGeom>
+          <a:solidFill>
+            <a:srgbClr val="C8A15A"/>
+          </a:solidFill>
+          <a:ln/>
+        </p:spPr>
+      </p:sp>
+      <p:sp>
+        <p:nvSpPr>
+          <p:cNvPr id="6" name="Text 4"/>
+          <p:cNvSpPr/>
+          <p:nvPr/>
+        </p:nvSpPr>
+        <p:spPr>
+          <a:xfrm>
+            <a:off x="786384" y="1371600"/>
+            <a:ext cx="10707624" cy="441579"/>
+          </a:xfrm>
+          <a:prstGeom prst="rect">
+            <a:avLst/>
+          </a:prstGeom>
+          <a:noFill/>
+          <a:ln/>
+        </p:spPr>
+        <p:txBody>
+          <a:bodyPr wrap="square" rtlCol="0" anchor="ctr">
+            <a:normAutofit/>
+          </a:bodyPr>
+          <a:lstStyle/>
+          <a:p>
+            <a:pPr indent="0" marL="0">
+              <a:lnSpc>
+                <a:spcPct val="102000"/>
+              </a:lnSpc>
+              <a:buNone/>
+            </a:pPr>
+            <a:r>
+              <a:rPr lang="en-US" sz="1250" b="1" dirty="0">
+                <a:solidFill>
+                  <a:srgbClr val="2A2723"/>
+                </a:solidFill>
+                <a:latin typeface="Malgun Gothic" pitchFamily="34" charset="0"/>
+                <a:ea typeface="Malgun Gothic" pitchFamily="34" charset="-122"/>
+                <a:cs typeface="Malgun Gothic" pitchFamily="34" charset="-120"/>
+              </a:rPr>
+              <a:t>A1.</a:t>
+            </a:r>
+            <a:pPr indent="0" marL="0">
+              <a:lnSpc>
+                <a:spcPct val="102000"/>
+              </a:lnSpc>
+              <a:buNone/>
+            </a:pPr>
+            <a:r>
+              <a:rPr lang="en-US" sz="1250" dirty="0">
+                <a:solidFill>
+                  <a:srgbClr val="2A2723"/>
+                </a:solidFill>
+                <a:latin typeface="Malgun Gothic" pitchFamily="34" charset="0"/>
+                <a:ea typeface="Malgun Gothic" pitchFamily="34" charset="-122"/>
+                <a:cs typeface="Malgun Gothic" pitchFamily="34" charset="-120"/>
+              </a:rPr>
+              <a:t> 아니다. 모델이 </a:t>
+            </a:r>
+            <a:pPr indent="0" marL="0">
+              <a:lnSpc>
+                <a:spcPct val="102000"/>
+              </a:lnSpc>
+              <a:buNone/>
+            </a:pPr>
+            <a:r>
+              <a:rPr lang="en-US" sz="1250" b="1" dirty="0">
+                <a:solidFill>
+                  <a:srgbClr val="2A2723"/>
+                </a:solidFill>
+                <a:latin typeface="Malgun Gothic" pitchFamily="34" charset="0"/>
+                <a:ea typeface="Malgun Gothic" pitchFamily="34" charset="-122"/>
+                <a:cs typeface="Malgun Gothic" pitchFamily="34" charset="-120"/>
+              </a:rPr>
+              <a:t>토큰으로 쪼개 한 번에 보는 창(컨텍스트)의 크기</a:t>
+            </a:r>
+            <a:pPr indent="0" marL="0">
+              <a:lnSpc>
+                <a:spcPct val="102000"/>
+              </a:lnSpc>
+              <a:buNone/>
+            </a:pPr>
+            <a:r>
+              <a:rPr lang="en-US" sz="1250" dirty="0">
+                <a:solidFill>
+                  <a:srgbClr val="2A2723"/>
+                </a:solidFill>
+                <a:latin typeface="Malgun Gothic" pitchFamily="34" charset="0"/>
+                <a:ea typeface="Malgun Gothic" pitchFamily="34" charset="-122"/>
+                <a:cs typeface="Malgun Gothic" pitchFamily="34" charset="-120"/>
+              </a:rPr>
+              <a:t>가 정해져 있고, 그 안에서 </a:t>
+            </a:r>
+            <a:pPr indent="0" marL="0">
+              <a:lnSpc>
+                <a:spcPct val="102000"/>
+              </a:lnSpc>
+              <a:buNone/>
+            </a:pPr>
+            <a:r>
+              <a:rPr lang="en-US" sz="1250" b="1" dirty="0">
+                <a:solidFill>
+                  <a:srgbClr val="2A2723"/>
+                </a:solidFill>
+                <a:latin typeface="Malgun Gothic" pitchFamily="34" charset="0"/>
+                <a:ea typeface="Malgun Gothic" pitchFamily="34" charset="-122"/>
+                <a:cs typeface="Malgun Gothic" pitchFamily="34" charset="-120"/>
+              </a:rPr>
+              <a:t>어디에 주의를 배분하느냐</a:t>
+            </a:r>
+            <a:pPr indent="0" marL="0">
+              <a:lnSpc>
+                <a:spcPct val="102000"/>
+              </a:lnSpc>
+              <a:buNone/>
+            </a:pPr>
+            <a:r>
+              <a:rPr lang="en-US" sz="1250" dirty="0">
+                <a:solidFill>
+                  <a:srgbClr val="2A2723"/>
+                </a:solidFill>
+                <a:latin typeface="Malgun Gothic" pitchFamily="34" charset="0"/>
+                <a:ea typeface="Malgun Gothic" pitchFamily="34" charset="-122"/>
+                <a:cs typeface="Malgun Gothic" pitchFamily="34" charset="-120"/>
+              </a:rPr>
+              <a:t>의 문제.</a:t>
+            </a:r>
+            <a:endParaRPr lang="en-US" sz="1250" dirty="0"/>
+          </a:p>
+        </p:txBody>
+      </p:sp>
+      <p:sp>
+        <p:nvSpPr>
+          <p:cNvPr id="7" name="Shape 5"/>
+          <p:cNvSpPr/>
+          <p:nvPr/>
+        </p:nvSpPr>
+        <p:spPr>
+          <a:xfrm>
+            <a:off x="612648" y="1895475"/>
+            <a:ext cx="11027664" cy="441579"/>
+          </a:xfrm>
+          <a:prstGeom prst="roundRect">
+            <a:avLst>
+              <a:gd name="adj" fmla="val 18637"/>
+            </a:avLst>
+          </a:prstGeom>
+          <a:solidFill>
+            <a:srgbClr val="FFFFFF"/>
+          </a:solidFill>
+          <a:ln w="12700">
+            <a:solidFill>
+              <a:srgbClr val="E3DACB"/>
+            </a:solidFill>
+            <a:prstDash val="solid"/>
+          </a:ln>
+        </p:spPr>
+      </p:sp>
+      <p:sp>
+        <p:nvSpPr>
+          <p:cNvPr id="8" name="Shape 6"/>
+          <p:cNvSpPr/>
+          <p:nvPr/>
+        </p:nvSpPr>
+        <p:spPr>
+          <a:xfrm>
+            <a:off x="548640" y="1895475"/>
+            <a:ext cx="64008" cy="441579"/>
+          </a:xfrm>
+          <a:prstGeom prst="rect">
+            <a:avLst/>
+          </a:prstGeom>
+          <a:solidFill>
+            <a:srgbClr val="C8A15A"/>
+          </a:solidFill>
+          <a:ln/>
+        </p:spPr>
+      </p:sp>
+      <p:sp>
+        <p:nvSpPr>
+          <p:cNvPr id="9" name="Text 7"/>
+          <p:cNvSpPr/>
+          <p:nvPr/>
+        </p:nvSpPr>
+        <p:spPr>
+          <a:xfrm>
+            <a:off x="786384" y="1895475"/>
+            <a:ext cx="10707624" cy="441579"/>
+          </a:xfrm>
+          <a:prstGeom prst="rect">
+            <a:avLst/>
+          </a:prstGeom>
+          <a:noFill/>
+          <a:ln/>
+        </p:spPr>
+        <p:txBody>
+          <a:bodyPr wrap="square" rtlCol="0" anchor="ctr">
+            <a:normAutofit/>
+          </a:bodyPr>
+          <a:lstStyle/>
+          <a:p>
+            <a:pPr indent="0" marL="0">
+              <a:lnSpc>
+                <a:spcPct val="102000"/>
+              </a:lnSpc>
+              <a:buNone/>
+            </a:pPr>
+            <a:r>
+              <a:rPr lang="en-US" sz="1250" b="1" dirty="0">
+                <a:solidFill>
+                  <a:srgbClr val="2A2723"/>
+                </a:solidFill>
+                <a:latin typeface="Malgun Gothic" pitchFamily="34" charset="0"/>
+                <a:ea typeface="Malgun Gothic" pitchFamily="34" charset="-122"/>
+                <a:cs typeface="Malgun Gothic" pitchFamily="34" charset="-120"/>
+              </a:rPr>
+              <a:t>A2.</a:t>
+            </a:r>
+            <a:pPr indent="0" marL="0">
+              <a:lnSpc>
+                <a:spcPct val="102000"/>
+              </a:lnSpc>
+              <a:buNone/>
+            </a:pPr>
+            <a:r>
+              <a:rPr lang="en-US" sz="1250" dirty="0">
+                <a:solidFill>
+                  <a:srgbClr val="2A2723"/>
+                </a:solidFill>
+                <a:latin typeface="Malgun Gothic" pitchFamily="34" charset="0"/>
+                <a:ea typeface="Malgun Gothic" pitchFamily="34" charset="-122"/>
+                <a:cs typeface="Malgun Gothic" pitchFamily="34" charset="-120"/>
+              </a:rPr>
+              <a:t> "얼마나 넣느냐"가 아니라 </a:t>
+            </a:r>
+            <a:pPr indent="0" marL="0">
+              <a:lnSpc>
+                <a:spcPct val="102000"/>
+              </a:lnSpc>
+              <a:buNone/>
+            </a:pPr>
+            <a:r>
+              <a:rPr lang="en-US" sz="1250" b="1" dirty="0">
+                <a:solidFill>
+                  <a:srgbClr val="2A2723"/>
+                </a:solidFill>
+                <a:latin typeface="Malgun Gothic" pitchFamily="34" charset="0"/>
+                <a:ea typeface="Malgun Gothic" pitchFamily="34" charset="-122"/>
+                <a:cs typeface="Malgun Gothic" pitchFamily="34" charset="-120"/>
+              </a:rPr>
+              <a:t>"어떻게 배치하고 무엇에 집중시키느냐"</a:t>
+            </a:r>
+            <a:pPr indent="0" marL="0">
+              <a:lnSpc>
+                <a:spcPct val="102000"/>
+              </a:lnSpc>
+              <a:buNone/>
+            </a:pPr>
+            <a:r>
+              <a:rPr lang="en-US" sz="1250" dirty="0">
+                <a:solidFill>
+                  <a:srgbClr val="2A2723"/>
+                </a:solidFill>
+                <a:latin typeface="Malgun Gothic" pitchFamily="34" charset="0"/>
+                <a:ea typeface="Malgun Gothic" pitchFamily="34" charset="-122"/>
+                <a:cs typeface="Malgun Gothic" pitchFamily="34" charset="-120"/>
+              </a:rPr>
+              <a:t>의 문제.</a:t>
+            </a:r>
+            <a:endParaRPr lang="en-US" sz="1250" dirty="0"/>
+          </a:p>
+        </p:txBody>
+      </p:sp>
+      <p:sp>
+        <p:nvSpPr>
+          <p:cNvPr id="10" name="Shape 8"/>
+          <p:cNvSpPr/>
+          <p:nvPr/>
+        </p:nvSpPr>
+        <p:spPr>
+          <a:xfrm>
+            <a:off x="612648" y="2419350"/>
+            <a:ext cx="11027664" cy="441579"/>
+          </a:xfrm>
+          <a:prstGeom prst="roundRect">
+            <a:avLst>
+              <a:gd name="adj" fmla="val 18637"/>
+            </a:avLst>
+          </a:prstGeom>
+          <a:solidFill>
+            <a:srgbClr val="FFFFFF"/>
+          </a:solidFill>
+          <a:ln w="12700">
+            <a:solidFill>
+              <a:srgbClr val="E3DACB"/>
+            </a:solidFill>
+            <a:prstDash val="solid"/>
+          </a:ln>
+        </p:spPr>
+      </p:sp>
+      <p:sp>
+        <p:nvSpPr>
+          <p:cNvPr id="11" name="Shape 9"/>
+          <p:cNvSpPr/>
+          <p:nvPr/>
+        </p:nvSpPr>
+        <p:spPr>
+          <a:xfrm>
+            <a:off x="548640" y="2419350"/>
+            <a:ext cx="64008" cy="441579"/>
+          </a:xfrm>
+          <a:prstGeom prst="rect">
+            <a:avLst/>
+          </a:prstGeom>
+          <a:solidFill>
+            <a:srgbClr val="C8A15A"/>
+          </a:solidFill>
+          <a:ln/>
+        </p:spPr>
+      </p:sp>
+      <p:sp>
+        <p:nvSpPr>
+          <p:cNvPr id="12" name="Text 10"/>
+          <p:cNvSpPr/>
+          <p:nvPr/>
+        </p:nvSpPr>
+        <p:spPr>
+          <a:xfrm>
+            <a:off x="786384" y="2419350"/>
+            <a:ext cx="10707624" cy="441579"/>
+          </a:xfrm>
+          <a:prstGeom prst="rect">
+            <a:avLst/>
+          </a:prstGeom>
+          <a:noFill/>
+          <a:ln/>
+        </p:spPr>
+        <p:txBody>
+          <a:bodyPr wrap="square" rtlCol="0" anchor="ctr">
+            <a:normAutofit/>
+          </a:bodyPr>
+          <a:lstStyle/>
+          <a:p>
+            <a:pPr indent="0" marL="0">
+              <a:lnSpc>
+                <a:spcPct val="102000"/>
+              </a:lnSpc>
+              <a:buNone/>
+            </a:pPr>
+            <a:r>
+              <a:rPr lang="en-US" sz="1250" b="1" dirty="0">
+                <a:solidFill>
+                  <a:srgbClr val="2A2723"/>
+                </a:solidFill>
+                <a:latin typeface="Malgun Gothic" pitchFamily="34" charset="0"/>
+                <a:ea typeface="Malgun Gothic" pitchFamily="34" charset="-122"/>
+                <a:cs typeface="Malgun Gothic" pitchFamily="34" charset="-120"/>
+              </a:rPr>
+              <a:t>A3.</a:t>
+            </a:r>
+            <a:pPr indent="0" marL="0">
+              <a:lnSpc>
+                <a:spcPct val="102000"/>
+              </a:lnSpc>
+              <a:buNone/>
+            </a:pPr>
+            <a:r>
+              <a:rPr lang="en-US" sz="1250" dirty="0">
+                <a:solidFill>
+                  <a:srgbClr val="2A2723"/>
+                </a:solidFill>
+                <a:latin typeface="Malgun Gothic" pitchFamily="34" charset="0"/>
+                <a:ea typeface="Malgun Gothic" pitchFamily="34" charset="-122"/>
+                <a:cs typeface="Malgun Gothic" pitchFamily="34" charset="-120"/>
+              </a:rPr>
+              <a:t> 발명품이 아니라, </a:t>
+            </a:r>
+            <a:pPr indent="0" marL="0">
+              <a:lnSpc>
+                <a:spcPct val="102000"/>
+              </a:lnSpc>
+              <a:buNone/>
+            </a:pPr>
+            <a:r>
+              <a:rPr lang="en-US" sz="1250" b="1" dirty="0">
+                <a:solidFill>
+                  <a:srgbClr val="2A2723"/>
+                </a:solidFill>
+                <a:latin typeface="Malgun Gothic" pitchFamily="34" charset="0"/>
+                <a:ea typeface="Malgun Gothic" pitchFamily="34" charset="-122"/>
+                <a:cs typeface="Malgun Gothic" pitchFamily="34" charset="-120"/>
+              </a:rPr>
+              <a:t>이미지와 언어 두 분야가 각자의 벽에 부딪혔다가 같은 열쇠 하나로 동시에 뚫으며 합류</a:t>
+            </a:r>
+            <a:pPr indent="0" marL="0">
+              <a:lnSpc>
+                <a:spcPct val="102000"/>
+              </a:lnSpc>
+              <a:buNone/>
+            </a:pPr>
+            <a:r>
+              <a:rPr lang="en-US" sz="1250" dirty="0">
+                <a:solidFill>
+                  <a:srgbClr val="2A2723"/>
+                </a:solidFill>
+                <a:latin typeface="Malgun Gothic" pitchFamily="34" charset="0"/>
+                <a:ea typeface="Malgun Gothic" pitchFamily="34" charset="-122"/>
+                <a:cs typeface="Malgun Gothic" pitchFamily="34" charset="-120"/>
+              </a:rPr>
+              <a:t>한 결과.</a:t>
+            </a:r>
+            <a:endParaRPr lang="en-US" sz="1250" dirty="0"/>
+          </a:p>
+        </p:txBody>
+      </p:sp>
+      <p:sp>
+        <p:nvSpPr>
+          <p:cNvPr id="13" name="Shape 11"/>
+          <p:cNvSpPr/>
+          <p:nvPr/>
+        </p:nvSpPr>
+        <p:spPr>
+          <a:xfrm>
+            <a:off x="612648" y="2943225"/>
+            <a:ext cx="11027664" cy="441579"/>
+          </a:xfrm>
+          <a:prstGeom prst="roundRect">
+            <a:avLst>
+              <a:gd name="adj" fmla="val 18637"/>
+            </a:avLst>
+          </a:prstGeom>
+          <a:solidFill>
+            <a:srgbClr val="FFFFFF"/>
+          </a:solidFill>
+          <a:ln w="12700">
+            <a:solidFill>
+              <a:srgbClr val="E3DACB"/>
+            </a:solidFill>
+            <a:prstDash val="solid"/>
+          </a:ln>
+        </p:spPr>
+      </p:sp>
+      <p:sp>
+        <p:nvSpPr>
+          <p:cNvPr id="14" name="Shape 12"/>
+          <p:cNvSpPr/>
+          <p:nvPr/>
+        </p:nvSpPr>
+        <p:spPr>
+          <a:xfrm>
+            <a:off x="548640" y="2943225"/>
+            <a:ext cx="64008" cy="441579"/>
+          </a:xfrm>
+          <a:prstGeom prst="rect">
+            <a:avLst/>
+          </a:prstGeom>
+          <a:solidFill>
+            <a:srgbClr val="C8A15A"/>
+          </a:solidFill>
+          <a:ln/>
+        </p:spPr>
+      </p:sp>
+      <p:sp>
+        <p:nvSpPr>
+          <p:cNvPr id="15" name="Text 13"/>
+          <p:cNvSpPr/>
+          <p:nvPr/>
+        </p:nvSpPr>
+        <p:spPr>
+          <a:xfrm>
+            <a:off x="786384" y="2943225"/>
+            <a:ext cx="10707624" cy="441579"/>
+          </a:xfrm>
+          <a:prstGeom prst="rect">
+            <a:avLst/>
+          </a:prstGeom>
+          <a:noFill/>
+          <a:ln/>
+        </p:spPr>
+        <p:txBody>
+          <a:bodyPr wrap="square" rtlCol="0" anchor="ctr">
+            <a:normAutofit/>
+          </a:bodyPr>
+          <a:lstStyle/>
+          <a:p>
+            <a:pPr indent="0" marL="0">
+              <a:lnSpc>
+                <a:spcPct val="102000"/>
+              </a:lnSpc>
+              <a:buNone/>
+            </a:pPr>
+            <a:r>
+              <a:rPr lang="en-US" sz="1250" b="1" dirty="0">
+                <a:solidFill>
+                  <a:srgbClr val="2A2723"/>
+                </a:solidFill>
+                <a:latin typeface="Malgun Gothic" pitchFamily="34" charset="0"/>
+                <a:ea typeface="Malgun Gothic" pitchFamily="34" charset="-122"/>
+                <a:cs typeface="Malgun Gothic" pitchFamily="34" charset="-120"/>
+              </a:rPr>
+              <a:t>A4.</a:t>
+            </a:r>
+            <a:pPr indent="0" marL="0">
+              <a:lnSpc>
+                <a:spcPct val="102000"/>
+              </a:lnSpc>
+              <a:buNone/>
+            </a:pPr>
+            <a:r>
+              <a:rPr lang="en-US" sz="1250" dirty="0">
+                <a:solidFill>
+                  <a:srgbClr val="2A2723"/>
+                </a:solidFill>
+                <a:latin typeface="Malgun Gothic" pitchFamily="34" charset="0"/>
+                <a:ea typeface="Malgun Gothic" pitchFamily="34" charset="-122"/>
+                <a:cs typeface="Malgun Gothic" pitchFamily="34" charset="-120"/>
+              </a:rPr>
+              <a:t> 이미지 = </a:t>
+            </a:r>
+            <a:pPr indent="0" marL="0">
+              <a:lnSpc>
+                <a:spcPct val="102000"/>
+              </a:lnSpc>
+              <a:buNone/>
+            </a:pPr>
+            <a:r>
+              <a:rPr lang="en-US" sz="1250" b="1" dirty="0">
+                <a:solidFill>
+                  <a:srgbClr val="2A2723"/>
+                </a:solidFill>
+                <a:latin typeface="Malgun Gothic" pitchFamily="34" charset="0"/>
+                <a:ea typeface="Malgun Gothic" pitchFamily="34" charset="-122"/>
+                <a:cs typeface="Malgun Gothic" pitchFamily="34" charset="-120"/>
+              </a:rPr>
+              <a:t>깊이의 벽</a:t>
+            </a:r>
+            <a:pPr indent="0" marL="0">
+              <a:lnSpc>
+                <a:spcPct val="102000"/>
+              </a:lnSpc>
+              <a:buNone/>
+            </a:pPr>
+            <a:r>
+              <a:rPr lang="en-US" sz="1250" dirty="0">
+                <a:solidFill>
+                  <a:srgbClr val="2A2723"/>
+                </a:solidFill>
+                <a:latin typeface="Malgun Gothic" pitchFamily="34" charset="0"/>
+                <a:ea typeface="Malgun Gothic" pitchFamily="34" charset="-122"/>
+                <a:cs typeface="Malgun Gothic" pitchFamily="34" charset="-120"/>
+              </a:rPr>
+              <a:t>(신경망을 더 깊게 쌓기), 언어 = </a:t>
+            </a:r>
+            <a:pPr indent="0" marL="0">
+              <a:lnSpc>
+                <a:spcPct val="102000"/>
+              </a:lnSpc>
+              <a:buNone/>
+            </a:pPr>
+            <a:r>
+              <a:rPr lang="en-US" sz="1250" b="1" dirty="0">
+                <a:solidFill>
+                  <a:srgbClr val="2A2723"/>
+                </a:solidFill>
+                <a:latin typeface="Malgun Gothic" pitchFamily="34" charset="0"/>
+                <a:ea typeface="Malgun Gothic" pitchFamily="34" charset="-122"/>
+                <a:cs typeface="Malgun Gothic" pitchFamily="34" charset="-120"/>
+              </a:rPr>
+              <a:t>순차의 벽</a:t>
+            </a:r>
+            <a:pPr indent="0" marL="0">
+              <a:lnSpc>
+                <a:spcPct val="102000"/>
+              </a:lnSpc>
+              <a:buNone/>
+            </a:pPr>
+            <a:r>
+              <a:rPr lang="en-US" sz="1250" dirty="0">
+                <a:solidFill>
+                  <a:srgbClr val="2A2723"/>
+                </a:solidFill>
+                <a:latin typeface="Malgun Gothic" pitchFamily="34" charset="0"/>
+                <a:ea typeface="Malgun Gothic" pitchFamily="34" charset="-122"/>
+                <a:cs typeface="Malgun Gothic" pitchFamily="34" charset="-120"/>
+              </a:rPr>
+              <a:t>(앞 단어를 잊지 않고 긴 문장 처리). 얼핏 달라 보여도 </a:t>
+            </a:r>
+            <a:pPr indent="0" marL="0">
+              <a:lnSpc>
+                <a:spcPct val="102000"/>
+              </a:lnSpc>
+              <a:buNone/>
+            </a:pPr>
+            <a:r>
+              <a:rPr lang="en-US" sz="1250" b="1" dirty="0">
+                <a:solidFill>
+                  <a:srgbClr val="2A2723"/>
+                </a:solidFill>
+                <a:latin typeface="Malgun Gothic" pitchFamily="34" charset="0"/>
+                <a:ea typeface="Malgun Gothic" pitchFamily="34" charset="-122"/>
+                <a:cs typeface="Malgun Gothic" pitchFamily="34" charset="-120"/>
+              </a:rPr>
+              <a:t>뿌리가 닮았다.</a:t>
+            </a:r>
+            <a:endParaRPr lang="en-US" sz="1250" dirty="0"/>
           </a:p>
         </p:txBody>
       </p:sp>
@@ -2180,23 +2734,42 @@
       </p:grpSpPr>
       <p:sp>
         <p:nvSpPr>
-          <p:cNvPr id="2" name="Shape 0"/>
-          <p:cNvSpPr/>
-          <p:nvPr/>
-        </p:nvSpPr>
-        <p:spPr>
-          <a:xfrm>
-            <a:off x="0" y="0"/>
-            <a:ext cx="12188952" cy="6858000"/>
-          </a:xfrm>
-          <a:prstGeom prst="rect">
-            <a:avLst/>
-          </a:prstGeom>
-          <a:solidFill>
-            <a:srgbClr val="2C4D44"/>
-          </a:solidFill>
-          <a:ln/>
-        </p:spPr>
+          <p:cNvPr id="2" name="Text 0"/>
+          <p:cNvSpPr/>
+          <p:nvPr/>
+        </p:nvSpPr>
+        <p:spPr>
+          <a:xfrm>
+            <a:off x="731520" y="2651760"/>
+            <a:ext cx="10698480" cy="1554480"/>
+          </a:xfrm>
+          <a:prstGeom prst="rect">
+            <a:avLst/>
+          </a:prstGeom>
+          <a:noFill/>
+          <a:ln/>
+        </p:spPr>
+        <p:txBody>
+          <a:bodyPr wrap="square" rtlCol="0" anchor="ctr"/>
+          <a:lstStyle/>
+          <a:p>
+            <a:pPr algn="ctr" indent="0" marL="0">
+              <a:buNone/>
+            </a:pPr>
+            <a:r>
+              <a:rPr lang="en-US" sz="4000" b="1" dirty="0">
+                <a:solidFill>
+                  <a:srgbClr val="FFFFFF"/>
+                </a:solidFill>
+                <a:latin typeface="Malgun Gothic" pitchFamily="34" charset="0"/>
+                <a:ea typeface="Malgun Gothic" pitchFamily="34" charset="-122"/>
+                <a:cs typeface="Malgun Gothic" pitchFamily="34" charset="-120"/>
+              </a:rPr>
+              <a:t>이제 출발합니다 🚶</a:t>
+            </a:r>
+            <a:endParaRPr lang="en-US" sz="4000" dirty="0"/>
+          </a:p>
+        </p:txBody>
       </p:sp>
       <p:sp>
         <p:nvSpPr>
@@ -2206,8 +2779,8 @@
         </p:nvSpPr>
         <p:spPr>
           <a:xfrm>
-            <a:off x="731520" y="2651760"/>
-            <a:ext cx="10698480" cy="1463040"/>
+            <a:off x="731520" y="4389120"/>
+            <a:ext cx="10698480" cy="731520"/>
           </a:xfrm>
           <a:prstGeom prst="rect">
             <a:avLst/>
@@ -2216,24 +2789,24 @@
           <a:ln/>
         </p:spPr>
         <p:txBody>
-          <a:bodyPr wrap="square" rtlCol="0" anchor="ctr"/>
+          <a:bodyPr wrap="square" rtlCol="0" anchor="t"/>
           <a:lstStyle/>
           <a:p>
             <a:pPr algn="ctr" indent="0" marL="0">
               <a:buNone/>
             </a:pPr>
             <a:r>
-              <a:rPr lang="en-US" sz="4000" b="1" dirty="0">
-                <a:solidFill>
-                  <a:srgbClr val="FFFFFF"/>
-                </a:solidFill>
-                <a:latin typeface="Malgun Gothic" pitchFamily="34" charset="0"/>
-                <a:ea typeface="Malgun Gothic" pitchFamily="34" charset="-122"/>
-                <a:cs typeface="Malgun Gothic" pitchFamily="34" charset="-120"/>
-              </a:rPr>
-              <a:t>이제 출발합니다 🚶</a:t>
-            </a:r>
-            <a:endParaRPr lang="en-US" sz="4000" dirty="0"/>
+              <a:rPr lang="en-US" sz="1800" dirty="0">
+                <a:solidFill>
+                  <a:srgbClr val="E4EDE8"/>
+                </a:solidFill>
+                <a:latin typeface="Malgun Gothic" pitchFamily="34" charset="0"/>
+                <a:ea typeface="Malgun Gothic" pitchFamily="34" charset="-122"/>
+                <a:cs typeface="Malgun Gothic" pitchFamily="34" charset="-120"/>
+              </a:rPr>
+              <a:t>다음 — 신경망을 더 깊게 쌓으려던 사람들</a:t>
+            </a:r>
+            <a:endParaRPr lang="en-US" sz="1800" dirty="0"/>
           </a:p>
         </p:txBody>
       </p:sp>
@@ -2245,46 +2818,7 @@
         </p:nvSpPr>
         <p:spPr>
           <a:xfrm>
-            <a:off x="731520" y="4297680"/>
-            <a:ext cx="10698480" cy="640080"/>
-          </a:xfrm>
-          <a:prstGeom prst="rect">
-            <a:avLst/>
-          </a:prstGeom>
-          <a:noFill/>
-          <a:ln/>
-        </p:spPr>
-        <p:txBody>
-          <a:bodyPr wrap="square" rtlCol="0" anchor="ctr"/>
-          <a:lstStyle/>
-          <a:p>
-            <a:pPr algn="ctr" indent="0" marL="0">
-              <a:buNone/>
-            </a:pPr>
-            <a:r>
-              <a:rPr lang="en-US" sz="1800" dirty="0">
-                <a:solidFill>
-                  <a:srgbClr val="E4EDE8"/>
-                </a:solidFill>
-                <a:latin typeface="Malgun Gothic" pitchFamily="34" charset="0"/>
-                <a:ea typeface="Malgun Gothic" pitchFamily="34" charset="-122"/>
-                <a:cs typeface="Malgun Gothic" pitchFamily="34" charset="-120"/>
-              </a:rPr>
-              <a:t>다음 — 신경망을 더 깊게 쌓으려던 사람들</a:t>
-            </a:r>
-            <a:endParaRPr lang="en-US" sz="1800" dirty="0"/>
-          </a:p>
-        </p:txBody>
-      </p:sp>
-      <p:sp>
-        <p:nvSpPr>
-          <p:cNvPr id="5" name="Text 3"/>
-          <p:cNvSpPr/>
-          <p:nvPr/>
-        </p:nvSpPr>
-        <p:spPr>
-          <a:xfrm>
-            <a:off x="731520" y="5943600"/>
+            <a:off x="731520" y="6035040"/>
             <a:ext cx="10698480" cy="365760"/>
           </a:xfrm>
           <a:prstGeom prst="rect">
@@ -2326,563 +2860,10 @@
 <file path=ppt/slides/slide2.xml><?xml version="1.0" encoding="utf-8"?>
 <p:sld xmlns:a="http://schemas.openxmlformats.org/drawingml/2006/main" xmlns:r="http://schemas.openxmlformats.org/officeDocument/2006/relationships" xmlns:p="http://schemas.openxmlformats.org/presentationml/2006/main">
   <p:cSld name="Slide 2">
-    <p:spTree>
-      <p:nvGrpSpPr>
-        <p:cNvPr id="1" name=""/>
-        <p:cNvGrpSpPr/>
-        <p:nvPr/>
-      </p:nvGrpSpPr>
-      <p:grpSpPr>
-        <a:xfrm>
-          <a:off x="0" y="0"/>
-          <a:ext cx="0" cy="0"/>
-          <a:chOff x="0" y="0"/>
-          <a:chExt cx="0" cy="0"/>
-        </a:xfrm>
-      </p:grpSpPr>
-      <p:sp>
-        <p:nvSpPr>
-          <p:cNvPr id="2" name="Text 0"/>
-          <p:cNvSpPr/>
-          <p:nvPr/>
-        </p:nvSpPr>
-        <p:spPr>
-          <a:xfrm>
-            <a:off x="548640" y="365760"/>
-            <a:ext cx="11091672" cy="822960"/>
-          </a:xfrm>
-          <a:prstGeom prst="rect">
-            <a:avLst/>
-          </a:prstGeom>
-          <a:noFill/>
-          <a:ln/>
-        </p:spPr>
-        <p:txBody>
-          <a:bodyPr wrap="square" lIns="0" tIns="0" rIns="0" bIns="0" rtlCol="0" anchor="ctr"/>
-          <a:lstStyle/>
-          <a:p>
-            <a:pPr indent="0" marL="0">
-              <a:buNone/>
-            </a:pPr>
-            <a:r>
-              <a:rPr lang="en-US" sz="2600" b="1" dirty="0">
-                <a:solidFill>
-                  <a:srgbClr val="2A2723"/>
-                </a:solidFill>
-                <a:latin typeface="Malgun Gothic" pitchFamily="34" charset="0"/>
-                <a:ea typeface="Malgun Gothic" pitchFamily="34" charset="-122"/>
-                <a:cs typeface="Malgun Gothic" pitchFamily="34" charset="-120"/>
-              </a:rPr>
-              <a:t>🗺️ 오늘의 여정</a:t>
-            </a:r>
-            <a:endParaRPr lang="en-US" sz="2600" dirty="0"/>
-          </a:p>
-        </p:txBody>
-      </p:sp>
-      <p:sp>
-        <p:nvSpPr>
-          <p:cNvPr id="3" name="Text 1"/>
-          <p:cNvSpPr/>
-          <p:nvPr/>
-        </p:nvSpPr>
-        <p:spPr>
-          <a:xfrm>
-            <a:off x="548640" y="1325880"/>
-            <a:ext cx="11091672" cy="5074920"/>
-          </a:xfrm>
-          <a:prstGeom prst="rect">
-            <a:avLst/>
-          </a:prstGeom>
-          <a:noFill/>
-          <a:ln/>
-        </p:spPr>
-        <p:txBody>
-          <a:bodyPr wrap="square" lIns="0" tIns="0" rIns="0" bIns="0" rtlCol="0" anchor="t">
-            <a:normAutofit/>
-          </a:bodyPr>
-          <a:lstStyle/>
-          <a:p>
-            <a:pPr marL="177800" indent="-177800">
-              <a:spcAft>
-                <a:spcPts val="600"/>
-              </a:spcAft>
-              <a:buSzPct val="100000"/>
-              <a:buChar char="▪"/>
-            </a:pPr>
-            <a:r>
-              <a:rPr lang="en-US" sz="1400" dirty="0">
-                <a:solidFill>
-                  <a:srgbClr val="2A2723"/>
-                </a:solidFill>
-                <a:latin typeface="Malgun Gothic" pitchFamily="34" charset="0"/>
-                <a:ea typeface="Malgun Gothic" pitchFamily="34" charset="-122"/>
-                <a:cs typeface="Malgun Gothic" pitchFamily="34" charset="-120"/>
-              </a:rPr>
-              <a:t>[그림] 이미지 골목깊이의 벽 + 언어 골목순차의 벽 → 같은 열쇠트랜스포머</a:t>
-            </a:r>
-            <a:endParaRPr lang="en-US" sz="1400" dirty="0"/>
-          </a:p>
-          <a:p>
-            <a:pPr marL="177800" indent="-177800">
-              <a:spcAft>
-                <a:spcPts val="600"/>
-              </a:spcAft>
-              <a:buSzPct val="100000"/>
-              <a:buChar char="•"/>
-            </a:pPr>
-            <a:r>
-              <a:rPr lang="en-US" sz="1400" dirty="0">
-                <a:solidFill>
-                  <a:srgbClr val="2A2723"/>
-                </a:solidFill>
-                <a:latin typeface="Malgun Gothic" pitchFamily="34" charset="0"/>
-                <a:ea typeface="Malgun Gothic" pitchFamily="34" charset="-122"/>
-                <a:cs typeface="Malgun Gothic" pitchFamily="34" charset="-120"/>
-              </a:rPr>
-              <a:t>먼저 현실적 곤란 하나에서 출발 — 왜 정보를 더 줘도 답이 안 좋아질까</a:t>
-            </a:r>
-            <a:endParaRPr lang="en-US" sz="1400" dirty="0"/>
-          </a:p>
-          <a:p>
-            <a:pPr marL="177800" indent="-177800">
-              <a:spcAft>
-                <a:spcPts val="600"/>
-              </a:spcAft>
-              <a:buSzPct val="100000"/>
-              <a:buChar char="•"/>
-            </a:pPr>
-            <a:r>
-              <a:rPr lang="en-US" sz="1400" dirty="0">
-                <a:solidFill>
-                  <a:srgbClr val="2A2723"/>
-                </a:solidFill>
-                <a:latin typeface="Malgun Gothic" pitchFamily="34" charset="0"/>
-                <a:ea typeface="Malgun Gothic" pitchFamily="34" charset="-122"/>
-                <a:cs typeface="Malgun Gothic" pitchFamily="34" charset="-120"/>
-              </a:rPr>
-              <a:t>트랜스포머는 발명품이 아니라 두 분야가 합류한 결과</a:t>
-            </a:r>
-            <a:endParaRPr lang="en-US" sz="1400" dirty="0"/>
-          </a:p>
-          <a:p>
-            <a:pPr marL="177800" indent="-177800">
-              <a:spcAft>
-                <a:spcPts val="600"/>
-              </a:spcAft>
-              <a:buSzPct val="100000"/>
-              <a:buChar char="•"/>
-            </a:pPr>
-            <a:r>
-              <a:rPr lang="en-US" sz="1400" dirty="0">
-                <a:solidFill>
-                  <a:srgbClr val="2A2723"/>
-                </a:solidFill>
-                <a:latin typeface="Malgun Gothic" pitchFamily="34" charset="0"/>
-                <a:ea typeface="Malgun Gothic" pitchFamily="34" charset="-122"/>
-                <a:cs typeface="Malgun Gothic" pitchFamily="34" charset="-120"/>
-              </a:rPr>
-              <a:t>오늘은 이미지가 연 길부터 — "깊이의 벽"을 발견하고 뚫은 과정</a:t>
-            </a:r>
-            <a:endParaRPr lang="en-US" sz="1400" dirty="0"/>
-          </a:p>
-          <a:p>
-            <a:pPr indent="0" marL="0">
-              <a:spcAft>
-                <a:spcPts val="600"/>
-              </a:spcAft>
-              <a:buNone/>
-            </a:pPr>
-            <a:r>
-              <a:rPr lang="en-US" sz="1400" dirty="0">
-                <a:solidFill>
-                  <a:srgbClr val="3F6B5F"/>
-                </a:solidFill>
-                <a:latin typeface="Malgun Gothic" pitchFamily="34" charset="0"/>
-                <a:ea typeface="Malgun Gothic" pitchFamily="34" charset="-122"/>
-                <a:cs typeface="Malgun Gothic" pitchFamily="34" charset="-120"/>
-              </a:rPr>
-              <a:t>★ 🎯 이미지의 "깊이의 벽"을 이해하고 나면, 나중에 언어의 "순차의 벽"이 놀랄 만큼 같은 모양이라는 걸 알아보게 됩니다.</a:t>
-            </a:r>
-            <a:endParaRPr lang="en-US" sz="1400" dirty="0"/>
-          </a:p>
-        </p:txBody>
-      </p:sp>
-    </p:spTree>
-  </p:cSld>
-  <p:clrMapOvr>
-    <a:masterClrMapping/>
-  </p:clrMapOvr>
-</p:sld>
-</file>
-
-<file path=ppt/slides/slide3.xml><?xml version="1.0" encoding="utf-8"?>
-<p:sld xmlns:a="http://schemas.openxmlformats.org/drawingml/2006/main" xmlns:r="http://schemas.openxmlformats.org/officeDocument/2006/relationships" xmlns:p="http://schemas.openxmlformats.org/presentationml/2006/main">
-  <p:cSld name="Slide 3">
-    <p:spTree>
-      <p:nvGrpSpPr>
-        <p:cNvPr id="1" name=""/>
-        <p:cNvGrpSpPr/>
-        <p:nvPr/>
-      </p:nvGrpSpPr>
-      <p:grpSpPr>
-        <a:xfrm>
-          <a:off x="0" y="0"/>
-          <a:ext cx="0" cy="0"/>
-          <a:chOff x="0" y="0"/>
-          <a:chExt cx="0" cy="0"/>
-        </a:xfrm>
-      </p:grpSpPr>
-      <p:sp>
-        <p:nvSpPr>
-          <p:cNvPr id="2" name="Text 0"/>
-          <p:cNvSpPr/>
-          <p:nvPr/>
-        </p:nvSpPr>
-        <p:spPr>
-          <a:xfrm>
-            <a:off x="548640" y="365760"/>
-            <a:ext cx="11091672" cy="822960"/>
-          </a:xfrm>
-          <a:prstGeom prst="rect">
-            <a:avLst/>
-          </a:prstGeom>
-          <a:noFill/>
-          <a:ln/>
-        </p:spPr>
-        <p:txBody>
-          <a:bodyPr wrap="square" lIns="0" tIns="0" rIns="0" bIns="0" rtlCol="0" anchor="ctr"/>
-          <a:lstStyle/>
-          <a:p>
-            <a:pPr indent="0" marL="0">
-              <a:buNone/>
-            </a:pPr>
-            <a:r>
-              <a:rPr lang="en-US" sz="2600" b="1" dirty="0">
-                <a:solidFill>
-                  <a:srgbClr val="2A2723"/>
-                </a:solidFill>
-                <a:latin typeface="Malgun Gothic" pitchFamily="34" charset="0"/>
-                <a:ea typeface="Malgun Gothic" pitchFamily="34" charset="-122"/>
-                <a:cs typeface="Malgun Gothic" pitchFamily="34" charset="-120"/>
-              </a:rPr>
-              <a:t>📄 아주 현실적인 곤란에서 출발</a:t>
-            </a:r>
-            <a:endParaRPr lang="en-US" sz="2600" dirty="0"/>
-          </a:p>
-        </p:txBody>
-      </p:sp>
-      <p:sp>
-        <p:nvSpPr>
-          <p:cNvPr id="3" name="Text 1"/>
-          <p:cNvSpPr/>
-          <p:nvPr/>
-        </p:nvSpPr>
-        <p:spPr>
-          <a:xfrm>
-            <a:off x="548640" y="1325880"/>
-            <a:ext cx="11091672" cy="5074920"/>
-          </a:xfrm>
-          <a:prstGeom prst="rect">
-            <a:avLst/>
-          </a:prstGeom>
-          <a:noFill/>
-          <a:ln/>
-        </p:spPr>
-        <p:txBody>
-          <a:bodyPr wrap="square" lIns="0" tIns="0" rIns="0" bIns="0" rtlCol="0" anchor="t">
-            <a:normAutofit/>
-          </a:bodyPr>
-          <a:lstStyle/>
-          <a:p>
-            <a:pPr lvl="1" indent="0" marL="0">
-              <a:spcAft>
-                <a:spcPts val="600"/>
-              </a:spcAft>
-              <a:buNone/>
-            </a:pPr>
-            <a:r>
-              <a:rPr lang="en-US" sz="1400" dirty="0">
-                <a:solidFill>
-                  <a:srgbClr val="6B6357"/>
-                </a:solidFill>
-                <a:latin typeface="Malgun Gothic" pitchFamily="34" charset="0"/>
-                <a:ea typeface="Malgun Gothic" pitchFamily="34" charset="-122"/>
-                <a:cs typeface="Malgun Gothic" pitchFamily="34" charset="-120"/>
-              </a:rPr>
-              <a:t>80쪽짜리 문서를 통째로 AI에 붙여 넣고 "이거 요약해줘"라고 시켜 본 적 있으실 겁니다. 그런데 결과가 어딘가 흐릿합니다.</a:t>
-            </a:r>
-            <a:endParaRPr lang="en-US" sz="1400" dirty="0"/>
-          </a:p>
-          <a:p>
-            <a:pPr marL="177800" indent="-177800">
-              <a:spcAft>
-                <a:spcPts val="600"/>
-              </a:spcAft>
-              <a:buSzPct val="100000"/>
-              <a:buChar char="•"/>
-            </a:pPr>
-            <a:r>
-              <a:rPr lang="en-US" sz="1400" dirty="0">
-                <a:solidFill>
-                  <a:srgbClr val="2A2723"/>
-                </a:solidFill>
-                <a:latin typeface="Malgun Gothic" pitchFamily="34" charset="0"/>
-                <a:ea typeface="Malgun Gothic" pitchFamily="34" charset="-122"/>
-                <a:cs typeface="Malgun Gothic" pitchFamily="34" charset="-120"/>
-              </a:rPr>
-              <a:t>앞부분은 잘 반영되는데 중간은 뭉개지고</a:t>
-            </a:r>
-            <a:endParaRPr lang="en-US" sz="1400" dirty="0"/>
-          </a:p>
-          <a:p>
-            <a:pPr marL="177800" indent="-177800">
-              <a:spcAft>
-                <a:spcPts val="600"/>
-              </a:spcAft>
-              <a:buSzPct val="100000"/>
-              <a:buChar char="•"/>
-            </a:pPr>
-            <a:r>
-              <a:rPr lang="en-US" sz="1400" dirty="0">
-                <a:solidFill>
-                  <a:srgbClr val="2A2723"/>
-                </a:solidFill>
-                <a:latin typeface="Malgun Gothic" pitchFamily="34" charset="0"/>
-                <a:ea typeface="Malgun Gothic" pitchFamily="34" charset="-122"/>
-                <a:cs typeface="Malgun Gothic" pitchFamily="34" charset="-120"/>
-              </a:rPr>
-              <a:t>분명 문서에 있던 핵심 조항을 슬쩍 빠뜨립니다</a:t>
-            </a:r>
-            <a:endParaRPr lang="en-US" sz="1400" dirty="0"/>
-          </a:p>
-          <a:p>
-            <a:pPr marL="177800" indent="-177800">
-              <a:spcAft>
-                <a:spcPts val="600"/>
-              </a:spcAft>
-              <a:buSzPct val="100000"/>
-              <a:buChar char="•"/>
-            </a:pPr>
-            <a:r>
-              <a:rPr lang="en-US" sz="1400" dirty="0">
-                <a:solidFill>
-                  <a:srgbClr val="2A2723"/>
-                </a:solidFill>
-                <a:latin typeface="Malgun Gothic" pitchFamily="34" charset="0"/>
-                <a:ea typeface="Malgun Gothic" pitchFamily="34" charset="-122"/>
-                <a:cs typeface="Malgun Gothic" pitchFamily="34" charset="-120"/>
-              </a:rPr>
-              <a:t>길게 넣을수록 응답은 느려지고 비용 청구서 숫자는 커집니다</a:t>
-            </a:r>
-            <a:endParaRPr lang="en-US" sz="1400" dirty="0"/>
-          </a:p>
-          <a:p>
-            <a:pPr indent="0" marL="0">
-              <a:spcAft>
-                <a:spcPts val="600"/>
-              </a:spcAft>
-              <a:buNone/>
-            </a:pPr>
-            <a:r>
-              <a:rPr lang="en-US" sz="1400" dirty="0">
-                <a:solidFill>
-                  <a:srgbClr val="3F6B5F"/>
-                </a:solidFill>
-                <a:latin typeface="Malgun Gothic" pitchFamily="34" charset="0"/>
-                <a:ea typeface="Malgun Gothic" pitchFamily="34" charset="-122"/>
-                <a:cs typeface="Malgun Gothic" pitchFamily="34" charset="-120"/>
-              </a:rPr>
-              <a:t>❖ 분명 더 많은 정보를 줬는데 왜 답은 더 좋아지지 않을까?</a:t>
-            </a:r>
-            <a:endParaRPr lang="en-US" sz="1400" dirty="0"/>
-          </a:p>
-        </p:txBody>
-      </p:sp>
-    </p:spTree>
-  </p:cSld>
-  <p:clrMapOvr>
-    <a:masterClrMapping/>
-  </p:clrMapOvr>
-</p:sld>
-</file>
-
-<file path=ppt/slides/slide4.xml><?xml version="1.0" encoding="utf-8"?>
-<p:sld xmlns:a="http://schemas.openxmlformats.org/drawingml/2006/main" xmlns:r="http://schemas.openxmlformats.org/officeDocument/2006/relationships" xmlns:p="http://schemas.openxmlformats.org/presentationml/2006/main">
-  <p:cSld name="Slide 4">
-    <p:spTree>
-      <p:nvGrpSpPr>
-        <p:cNvPr id="1" name=""/>
-        <p:cNvGrpSpPr/>
-        <p:nvPr/>
-      </p:nvGrpSpPr>
-      <p:grpSpPr>
-        <a:xfrm>
-          <a:off x="0" y="0"/>
-          <a:ext cx="0" cy="0"/>
-          <a:chOff x="0" y="0"/>
-          <a:chExt cx="0" cy="0"/>
-        </a:xfrm>
-      </p:grpSpPr>
-      <p:sp>
-        <p:nvSpPr>
-          <p:cNvPr id="2" name="Text 0"/>
-          <p:cNvSpPr/>
-          <p:nvPr/>
-        </p:nvSpPr>
-        <p:spPr>
-          <a:xfrm>
-            <a:off x="548640" y="365760"/>
-            <a:ext cx="11091672" cy="822960"/>
-          </a:xfrm>
-          <a:prstGeom prst="rect">
-            <a:avLst/>
-          </a:prstGeom>
-          <a:noFill/>
-          <a:ln/>
-        </p:spPr>
-        <p:txBody>
-          <a:bodyPr wrap="square" lIns="0" tIns="0" rIns="0" bIns="0" rtlCol="0" anchor="ctr"/>
-          <a:lstStyle/>
-          <a:p>
-            <a:pPr indent="0" marL="0">
-              <a:buNone/>
-            </a:pPr>
-            <a:r>
-              <a:rPr lang="en-US" sz="2600" b="1" dirty="0">
-                <a:solidFill>
-                  <a:srgbClr val="2A2723"/>
-                </a:solidFill>
-                <a:latin typeface="Malgun Gothic" pitchFamily="34" charset="0"/>
-                <a:ea typeface="Malgun Gothic" pitchFamily="34" charset="-122"/>
-                <a:cs typeface="Malgun Gothic" pitchFamily="34" charset="-120"/>
-              </a:rPr>
-              <a:t>🔎 "AI가 멍청해서"가 아닙니다</a:t>
-            </a:r>
-            <a:endParaRPr lang="en-US" sz="2600" dirty="0"/>
-          </a:p>
-        </p:txBody>
-      </p:sp>
-      <p:sp>
-        <p:nvSpPr>
-          <p:cNvPr id="3" name="Text 1"/>
-          <p:cNvSpPr/>
-          <p:nvPr/>
-        </p:nvSpPr>
-        <p:spPr>
-          <a:xfrm>
-            <a:off x="548640" y="1325880"/>
-            <a:ext cx="11091672" cy="5074920"/>
-          </a:xfrm>
-          <a:prstGeom prst="rect">
-            <a:avLst/>
-          </a:prstGeom>
-          <a:noFill/>
-          <a:ln/>
-        </p:spPr>
-        <p:txBody>
-          <a:bodyPr wrap="square" lIns="0" tIns="0" rIns="0" bIns="0" rtlCol="0" anchor="t">
-            <a:normAutofit/>
-          </a:bodyPr>
-          <a:lstStyle/>
-          <a:p>
-            <a:pPr marL="177800" indent="-177800">
-              <a:spcAft>
-                <a:spcPts val="600"/>
-              </a:spcAft>
-              <a:buSzPct val="100000"/>
-              <a:buChar char="•"/>
-            </a:pPr>
-            <a:r>
-              <a:rPr lang="en-US" sz="1400" dirty="0">
-                <a:solidFill>
-                  <a:srgbClr val="2A2723"/>
-                </a:solidFill>
-                <a:latin typeface="Malgun Gothic" pitchFamily="34" charset="0"/>
-                <a:ea typeface="Malgun Gothic" pitchFamily="34" charset="-122"/>
-                <a:cs typeface="Malgun Gothic" pitchFamily="34" charset="-120"/>
-              </a:rPr>
-              <a:t>모델은 글자를 토큰이라는 작은 조각으로 쪼개, 한 번에 들여다볼 수 있는 창(컨텍스트)의 크기가 정해져 있습니다</a:t>
-            </a:r>
-            <a:endParaRPr lang="en-US" sz="1400" dirty="0"/>
-          </a:p>
-          <a:p>
-            <a:pPr marL="177800" indent="-177800">
-              <a:spcAft>
-                <a:spcPts val="600"/>
-              </a:spcAft>
-              <a:buSzPct val="100000"/>
-              <a:buChar char="•"/>
-            </a:pPr>
-            <a:r>
-              <a:rPr lang="en-US" sz="1400" dirty="0">
-                <a:solidFill>
-                  <a:srgbClr val="2A2723"/>
-                </a:solidFill>
-                <a:latin typeface="Malgun Gothic" pitchFamily="34" charset="0"/>
-                <a:ea typeface="Malgun Gothic" pitchFamily="34" charset="-122"/>
-                <a:cs typeface="Malgun Gothic" pitchFamily="34" charset="-120"/>
-              </a:rPr>
-              <a:t>그 창 안에서 어떤 조각에 얼마나 주의를 배분하느냐의 문제입니다</a:t>
-            </a:r>
-            <a:endParaRPr lang="en-US" sz="1400" dirty="0"/>
-          </a:p>
-          <a:p>
-            <a:pPr indent="0" marL="0">
-              <a:spcAft>
-                <a:spcPts val="600"/>
-              </a:spcAft>
-              <a:buNone/>
-            </a:pPr>
-            <a:r>
-              <a:rPr lang="en-US" sz="1400" dirty="0">
-                <a:solidFill>
-                  <a:srgbClr val="3F6B5F"/>
-                </a:solidFill>
-                <a:latin typeface="Malgun Gothic" pitchFamily="34" charset="0"/>
-                <a:ea typeface="Malgun Gothic" pitchFamily="34" charset="-122"/>
-                <a:cs typeface="Malgun Gothic" pitchFamily="34" charset="-120"/>
-              </a:rPr>
-              <a:t>❖ 정보를 "얼마나 넣느냐"가 아니라 "어떻게 배치하고 무엇에 집중시키느냐"의 문제</a:t>
-            </a:r>
-            <a:endParaRPr lang="en-US" sz="1400" dirty="0"/>
-          </a:p>
-          <a:p>
-            <a:pPr indent="0" marL="0">
-              <a:spcAft>
-                <a:spcPts val="600"/>
-              </a:spcAft>
-              <a:buNone/>
-            </a:pPr>
-            <a:r>
-              <a:rPr lang="en-US" sz="1400" dirty="0">
-                <a:solidFill>
-                  <a:srgbClr val="3F6B5F"/>
-                </a:solidFill>
-                <a:latin typeface="Malgun Gothic" pitchFamily="34" charset="0"/>
-                <a:ea typeface="Malgun Gothic" pitchFamily="34" charset="-122"/>
-                <a:cs typeface="Malgun Gothic" pitchFamily="34" charset="-120"/>
-              </a:rPr>
-              <a:t>★ 이 감각은 오늘 역사를 끝까지 따라가면 자연스럽게 손에 잡힙니다. 지금은 이 곤란을 접어두고 출발.</a:t>
-            </a:r>
-            <a:endParaRPr lang="en-US" sz="1400" dirty="0"/>
-          </a:p>
-        </p:txBody>
-      </p:sp>
-    </p:spTree>
-  </p:cSld>
-  <p:clrMapOvr>
-    <a:masterClrMapping/>
-  </p:clrMapOvr>
-</p:sld>
-</file>
-
-<file path=ppt/slides/slide5.xml><?xml version="1.0" encoding="utf-8"?>
-<p:sld xmlns:a="http://schemas.openxmlformats.org/drawingml/2006/main" xmlns:r="http://schemas.openxmlformats.org/officeDocument/2006/relationships" xmlns:p="http://schemas.openxmlformats.org/presentationml/2006/main">
-  <p:cSld name="Slide 5">
     <p:bg>
       <p:bgPr>
         <a:solidFill>
-          <a:srgbClr val="FBFAF7"/>
+          <a:srgbClr val="FAF8F4"/>
         </a:solidFill>
       </p:bgPr>
     </p:bg>
@@ -2902,19 +2883,58 @@
       </p:grpSpPr>
       <p:sp>
         <p:nvSpPr>
-          <p:cNvPr id="2" name="Shape 0"/>
-          <p:cNvSpPr/>
-          <p:nvPr/>
-        </p:nvSpPr>
-        <p:spPr>
-          <a:xfrm>
-            <a:off x="5175504" y="1828800"/>
-            <a:ext cx="1828800" cy="1828800"/>
-          </a:xfrm>
-          <a:prstGeom prst="roundRect">
-            <a:avLst>
-              <a:gd name="adj" fmla="val 15000"/>
-            </a:avLst>
+          <p:cNvPr id="2" name="Text 0"/>
+          <p:cNvSpPr/>
+          <p:nvPr/>
+        </p:nvSpPr>
+        <p:spPr>
+          <a:xfrm>
+            <a:off x="548640" y="384048"/>
+            <a:ext cx="11091672" cy="731520"/>
+          </a:xfrm>
+          <a:prstGeom prst="rect">
+            <a:avLst/>
+          </a:prstGeom>
+          <a:noFill/>
+          <a:ln/>
+        </p:spPr>
+        <p:txBody>
+          <a:bodyPr wrap="square" rtlCol="0" anchor="ctr">
+            <a:normAutofit/>
+          </a:bodyPr>
+          <a:lstStyle/>
+          <a:p>
+            <a:pPr indent="0" marL="0">
+              <a:buNone/>
+            </a:pPr>
+            <a:r>
+              <a:rPr lang="en-US" sz="2400" b="1" dirty="0">
+                <a:solidFill>
+                  <a:srgbClr val="2A2723"/>
+                </a:solidFill>
+                <a:latin typeface="Malgun Gothic" pitchFamily="34" charset="0"/>
+                <a:ea typeface="Malgun Gothic" pitchFamily="34" charset="-122"/>
+                <a:cs typeface="Malgun Gothic" pitchFamily="34" charset="-120"/>
+              </a:rPr>
+              <a:t>🗺️ 오늘의 여정</a:t>
+            </a:r>
+            <a:endParaRPr lang="en-US" sz="2400" dirty="0"/>
+          </a:p>
+        </p:txBody>
+      </p:sp>
+      <p:sp>
+        <p:nvSpPr>
+          <p:cNvPr id="3" name="Shape 1"/>
+          <p:cNvSpPr/>
+          <p:nvPr/>
+        </p:nvSpPr>
+        <p:spPr>
+          <a:xfrm>
+            <a:off x="566928" y="1133856"/>
+            <a:ext cx="777240" cy="41148"/>
+          </a:xfrm>
+          <a:prstGeom prst="rect">
+            <a:avLst/>
           </a:prstGeom>
           <a:solidFill>
             <a:srgbClr val="3F6B5F"/>
@@ -2924,14 +2944,41 @@
       </p:sp>
       <p:sp>
         <p:nvSpPr>
-          <p:cNvPr id="3" name="Text 1"/>
-          <p:cNvSpPr/>
-          <p:nvPr/>
-        </p:nvSpPr>
-        <p:spPr>
-          <a:xfrm>
-            <a:off x="5175504" y="1828800"/>
-            <a:ext cx="1828800" cy="1828800"/>
+          <p:cNvPr id="4" name="Shape 2"/>
+          <p:cNvSpPr/>
+          <p:nvPr/>
+        </p:nvSpPr>
+        <p:spPr>
+          <a:xfrm>
+            <a:off x="548640" y="1371600"/>
+            <a:ext cx="3453384" cy="1097280"/>
+          </a:xfrm>
+          <a:prstGeom prst="roundRect">
+            <a:avLst>
+              <a:gd name="adj" fmla="val 7500"/>
+            </a:avLst>
+          </a:prstGeom>
+          <a:solidFill>
+            <a:srgbClr val="FFFFFF"/>
+          </a:solidFill>
+          <a:ln w="22225">
+            <a:solidFill>
+              <a:srgbClr val="3A5A8C"/>
+            </a:solidFill>
+            <a:prstDash val="solid"/>
+          </a:ln>
+        </p:spPr>
+      </p:sp>
+      <p:sp>
+        <p:nvSpPr>
+          <p:cNvPr id="5" name="Text 3"/>
+          <p:cNvSpPr/>
+          <p:nvPr/>
+        </p:nvSpPr>
+        <p:spPr>
+          <a:xfrm>
+            <a:off x="603504" y="1481328"/>
+            <a:ext cx="3343656" cy="274320"/>
           </a:xfrm>
           <a:prstGeom prst="rect">
             <a:avLst/>
@@ -2947,30 +2994,30 @@
               <a:buNone/>
             </a:pPr>
             <a:r>
-              <a:rPr lang="en-US" sz="5200" b="1" dirty="0">
-                <a:solidFill>
-                  <a:srgbClr val="FFFFFF"/>
-                </a:solidFill>
-                <a:latin typeface="Malgun Gothic" pitchFamily="34" charset="0"/>
-                <a:ea typeface="Malgun Gothic" pitchFamily="34" charset="-122"/>
-                <a:cs typeface="Malgun Gothic" pitchFamily="34" charset="-120"/>
-              </a:rPr>
-              <a:t>1</a:t>
-            </a:r>
-            <a:endParaRPr lang="en-US" sz="5200" dirty="0"/>
-          </a:p>
-        </p:txBody>
-      </p:sp>
-      <p:sp>
-        <p:nvSpPr>
-          <p:cNvPr id="4" name="Text 2"/>
-          <p:cNvSpPr/>
-          <p:nvPr/>
-        </p:nvSpPr>
-        <p:spPr>
-          <a:xfrm>
-            <a:off x="914400" y="3931920"/>
-            <a:ext cx="10332720" cy="822960"/>
+              <a:rPr lang="en-US" sz="950" b="1" dirty="0">
+                <a:solidFill>
+                  <a:srgbClr val="6B6357"/>
+                </a:solidFill>
+                <a:latin typeface="Malgun Gothic" pitchFamily="34" charset="0"/>
+                <a:ea typeface="Malgun Gothic" pitchFamily="34" charset="-122"/>
+                <a:cs typeface="Malgun Gothic" pitchFamily="34" charset="-120"/>
+              </a:rPr>
+              <a:t>이미지 골목</a:t>
+            </a:r>
+            <a:endParaRPr lang="en-US" sz="950" dirty="0"/>
+          </a:p>
+        </p:txBody>
+      </p:sp>
+      <p:sp>
+        <p:nvSpPr>
+          <p:cNvPr id="6" name="Text 4"/>
+          <p:cNvSpPr/>
+          <p:nvPr/>
+        </p:nvSpPr>
+        <p:spPr>
+          <a:xfrm>
+            <a:off x="621792" y="1773936"/>
+            <a:ext cx="3307080" cy="603504"/>
           </a:xfrm>
           <a:prstGeom prst="rect">
             <a:avLst/>
@@ -2979,6 +3026,50 @@
           <a:ln/>
         </p:spPr>
         <p:txBody>
+          <a:bodyPr wrap="square" rtlCol="0" anchor="ctr">
+            <a:normAutofit/>
+          </a:bodyPr>
+          <a:lstStyle/>
+          <a:p>
+            <a:pPr algn="ctr" indent="0" marL="0">
+              <a:lnSpc>
+                <a:spcPct val="102000"/>
+              </a:lnSpc>
+              <a:buNone/>
+            </a:pPr>
+            <a:r>
+              <a:rPr lang="en-US" sz="1150" dirty="0">
+                <a:solidFill>
+                  <a:srgbClr val="2A2723"/>
+                </a:solidFill>
+                <a:latin typeface="Malgun Gothic" pitchFamily="34" charset="0"/>
+                <a:ea typeface="Malgun Gothic" pitchFamily="34" charset="-122"/>
+                <a:cs typeface="Malgun Gothic" pitchFamily="34" charset="-120"/>
+              </a:rPr>
+              <a:t>깊이의 벽</a:t>
+            </a:r>
+            <a:endParaRPr lang="en-US" sz="1150" dirty="0"/>
+          </a:p>
+        </p:txBody>
+      </p:sp>
+      <p:sp>
+        <p:nvSpPr>
+          <p:cNvPr id="7" name="Text 5"/>
+          <p:cNvSpPr/>
+          <p:nvPr/>
+        </p:nvSpPr>
+        <p:spPr>
+          <a:xfrm>
+            <a:off x="4002024" y="1371600"/>
+            <a:ext cx="365760" cy="1097280"/>
+          </a:xfrm>
+          <a:prstGeom prst="rect">
+            <a:avLst/>
+          </a:prstGeom>
+          <a:noFill/>
+          <a:ln/>
+        </p:spPr>
+        <p:txBody>
           <a:bodyPr wrap="square" rtlCol="0" anchor="ctr"/>
           <a:lstStyle/>
           <a:p>
@@ -2986,30 +3077,57 @@
               <a:buNone/>
             </a:pPr>
             <a:r>
-              <a:rPr lang="en-US" sz="3000" b="1" dirty="0">
-                <a:solidFill>
-                  <a:srgbClr val="2A2723"/>
-                </a:solidFill>
-                <a:latin typeface="Malgun Gothic" pitchFamily="34" charset="0"/>
-                <a:ea typeface="Malgun Gothic" pitchFamily="34" charset="-122"/>
-                <a:cs typeface="Malgun Gothic" pitchFamily="34" charset="-120"/>
-              </a:rPr>
-              <a:t>두 골목, 같은 벽</a:t>
-            </a:r>
-            <a:endParaRPr lang="en-US" sz="3000" dirty="0"/>
-          </a:p>
-        </p:txBody>
-      </p:sp>
-      <p:sp>
-        <p:nvSpPr>
-          <p:cNvPr id="5" name="Text 3"/>
-          <p:cNvSpPr/>
-          <p:nvPr/>
-        </p:nvSpPr>
-        <p:spPr>
-          <a:xfrm>
-            <a:off x="914400" y="4754880"/>
-            <a:ext cx="10332720" cy="548640"/>
+              <a:rPr lang="en-US" sz="1700" b="1" dirty="0">
+                <a:solidFill>
+                  <a:srgbClr val="3F6B5F"/>
+                </a:solidFill>
+                <a:latin typeface="Malgun Gothic" pitchFamily="34" charset="0"/>
+                <a:ea typeface="Malgun Gothic" pitchFamily="34" charset="-122"/>
+                <a:cs typeface="Malgun Gothic" pitchFamily="34" charset="-120"/>
+              </a:rPr>
+              <a:t>→</a:t>
+            </a:r>
+            <a:endParaRPr lang="en-US" sz="1700" dirty="0"/>
+          </a:p>
+        </p:txBody>
+      </p:sp>
+      <p:sp>
+        <p:nvSpPr>
+          <p:cNvPr id="8" name="Shape 6"/>
+          <p:cNvSpPr/>
+          <p:nvPr/>
+        </p:nvSpPr>
+        <p:spPr>
+          <a:xfrm>
+            <a:off x="4367784" y="1371600"/>
+            <a:ext cx="3453384" cy="1097280"/>
+          </a:xfrm>
+          <a:prstGeom prst="roundRect">
+            <a:avLst>
+              <a:gd name="adj" fmla="val 7500"/>
+            </a:avLst>
+          </a:prstGeom>
+          <a:solidFill>
+            <a:srgbClr val="FFFFFF"/>
+          </a:solidFill>
+          <a:ln w="22225">
+            <a:solidFill>
+              <a:srgbClr val="A65A3F"/>
+            </a:solidFill>
+            <a:prstDash val="solid"/>
+          </a:ln>
+        </p:spPr>
+      </p:sp>
+      <p:sp>
+        <p:nvSpPr>
+          <p:cNvPr id="9" name="Text 7"/>
+          <p:cNvSpPr/>
+          <p:nvPr/>
+        </p:nvSpPr>
+        <p:spPr>
+          <a:xfrm>
+            <a:off x="4422648" y="1481328"/>
+            <a:ext cx="3343656" cy="274320"/>
           </a:xfrm>
           <a:prstGeom prst="rect">
             <a:avLst/>
@@ -3025,7 +3143,7 @@
               <a:buNone/>
             </a:pPr>
             <a:r>
-              <a:rPr lang="en-US" sz="1600" dirty="0">
+              <a:rPr lang="en-US" sz="950" b="1" dirty="0">
                 <a:solidFill>
                   <a:srgbClr val="6B6357"/>
                 </a:solidFill>
@@ -3033,22 +3151,22 @@
                 <a:ea typeface="Malgun Gothic" pitchFamily="34" charset="-122"/>
                 <a:cs typeface="Malgun Gothic" pitchFamily="34" charset="-120"/>
               </a:rPr>
-              <a:t>트랜스포머는 하늘에서 뚝 떨어진 게 아니다</a:t>
-            </a:r>
-            <a:endParaRPr lang="en-US" sz="1600" dirty="0"/>
-          </a:p>
-        </p:txBody>
-      </p:sp>
-      <p:sp>
-        <p:nvSpPr>
-          <p:cNvPr id="6" name="Text 4"/>
-          <p:cNvSpPr/>
-          <p:nvPr/>
-        </p:nvSpPr>
-        <p:spPr>
-          <a:xfrm>
-            <a:off x="914400" y="5394960"/>
-            <a:ext cx="10332720" cy="457200"/>
+              <a:t>언어 골목</a:t>
+            </a:r>
+            <a:endParaRPr lang="en-US" sz="950" dirty="0"/>
+          </a:p>
+        </p:txBody>
+      </p:sp>
+      <p:sp>
+        <p:nvSpPr>
+          <p:cNvPr id="10" name="Text 8"/>
+          <p:cNvSpPr/>
+          <p:nvPr/>
+        </p:nvSpPr>
+        <p:spPr>
+          <a:xfrm>
+            <a:off x="4440936" y="1773936"/>
+            <a:ext cx="3307080" cy="603504"/>
           </a:xfrm>
           <a:prstGeom prst="rect">
             <a:avLst/>
@@ -3057,6 +3175,50 @@
           <a:ln/>
         </p:spPr>
         <p:txBody>
+          <a:bodyPr wrap="square" rtlCol="0" anchor="ctr">
+            <a:normAutofit/>
+          </a:bodyPr>
+          <a:lstStyle/>
+          <a:p>
+            <a:pPr algn="ctr" indent="0" marL="0">
+              <a:lnSpc>
+                <a:spcPct val="102000"/>
+              </a:lnSpc>
+              <a:buNone/>
+            </a:pPr>
+            <a:r>
+              <a:rPr lang="en-US" sz="1150" dirty="0">
+                <a:solidFill>
+                  <a:srgbClr val="2A2723"/>
+                </a:solidFill>
+                <a:latin typeface="Malgun Gothic" pitchFamily="34" charset="0"/>
+                <a:ea typeface="Malgun Gothic" pitchFamily="34" charset="-122"/>
+                <a:cs typeface="Malgun Gothic" pitchFamily="34" charset="-120"/>
+              </a:rPr>
+              <a:t>순차의 벽</a:t>
+            </a:r>
+            <a:endParaRPr lang="en-US" sz="1150" dirty="0"/>
+          </a:p>
+        </p:txBody>
+      </p:sp>
+      <p:sp>
+        <p:nvSpPr>
+          <p:cNvPr id="11" name="Text 9"/>
+          <p:cNvSpPr/>
+          <p:nvPr/>
+        </p:nvSpPr>
+        <p:spPr>
+          <a:xfrm>
+            <a:off x="7821168" y="1371600"/>
+            <a:ext cx="365760" cy="1097280"/>
+          </a:xfrm>
+          <a:prstGeom prst="rect">
+            <a:avLst/>
+          </a:prstGeom>
+          <a:noFill/>
+          <a:ln/>
+        </p:spPr>
+        <p:txBody>
           <a:bodyPr wrap="square" rtlCol="0" anchor="ctr"/>
           <a:lstStyle/>
           <a:p>
@@ -3064,15 +3226,474 @@
               <a:buNone/>
             </a:pPr>
             <a:r>
-              <a:rPr lang="en-US" sz="1300" i="1" dirty="0">
-                <a:solidFill>
-                  <a:srgbClr val="C8A15A"/>
-                </a:solidFill>
-                <a:latin typeface="Malgun Gothic" pitchFamily="34" charset="0"/>
-                <a:ea typeface="Malgun Gothic" pitchFamily="34" charset="-122"/>
-                <a:cs typeface="Malgun Gothic" pitchFamily="34" charset="-120"/>
-              </a:rPr>
-              <a:t>이미지 · 언어의 합류</a:t>
+              <a:rPr lang="en-US" sz="1700" b="1" dirty="0">
+                <a:solidFill>
+                  <a:srgbClr val="3F6B5F"/>
+                </a:solidFill>
+                <a:latin typeface="Malgun Gothic" pitchFamily="34" charset="0"/>
+                <a:ea typeface="Malgun Gothic" pitchFamily="34" charset="-122"/>
+                <a:cs typeface="Malgun Gothic" pitchFamily="34" charset="-120"/>
+              </a:rPr>
+              <a:t>→</a:t>
+            </a:r>
+            <a:endParaRPr lang="en-US" sz="1700" dirty="0"/>
+          </a:p>
+        </p:txBody>
+      </p:sp>
+      <p:sp>
+        <p:nvSpPr>
+          <p:cNvPr id="12" name="Shape 10"/>
+          <p:cNvSpPr/>
+          <p:nvPr/>
+        </p:nvSpPr>
+        <p:spPr>
+          <a:xfrm>
+            <a:off x="8186928" y="1371600"/>
+            <a:ext cx="3453384" cy="1097280"/>
+          </a:xfrm>
+          <a:prstGeom prst="roundRect">
+            <a:avLst>
+              <a:gd name="adj" fmla="val 7500"/>
+            </a:avLst>
+          </a:prstGeom>
+          <a:solidFill>
+            <a:srgbClr val="FFFFFF"/>
+          </a:solidFill>
+          <a:ln w="22225">
+            <a:solidFill>
+              <a:srgbClr val="3F6B5F"/>
+            </a:solidFill>
+            <a:prstDash val="solid"/>
+          </a:ln>
+        </p:spPr>
+      </p:sp>
+      <p:sp>
+        <p:nvSpPr>
+          <p:cNvPr id="13" name="Text 11"/>
+          <p:cNvSpPr/>
+          <p:nvPr/>
+        </p:nvSpPr>
+        <p:spPr>
+          <a:xfrm>
+            <a:off x="8241792" y="1481328"/>
+            <a:ext cx="3343656" cy="274320"/>
+          </a:xfrm>
+          <a:prstGeom prst="rect">
+            <a:avLst/>
+          </a:prstGeom>
+          <a:noFill/>
+          <a:ln/>
+        </p:spPr>
+        <p:txBody>
+          <a:bodyPr wrap="square" rtlCol="0" anchor="ctr"/>
+          <a:lstStyle/>
+          <a:p>
+            <a:pPr algn="ctr" indent="0" marL="0">
+              <a:buNone/>
+            </a:pPr>
+            <a:r>
+              <a:rPr lang="en-US" sz="950" b="1" dirty="0">
+                <a:solidFill>
+                  <a:srgbClr val="6B6357"/>
+                </a:solidFill>
+                <a:latin typeface="Malgun Gothic" pitchFamily="34" charset="0"/>
+                <a:ea typeface="Malgun Gothic" pitchFamily="34" charset="-122"/>
+                <a:cs typeface="Malgun Gothic" pitchFamily="34" charset="-120"/>
+              </a:rPr>
+              <a:t>같은 열쇠</a:t>
+            </a:r>
+            <a:endParaRPr lang="en-US" sz="950" dirty="0"/>
+          </a:p>
+        </p:txBody>
+      </p:sp>
+      <p:sp>
+        <p:nvSpPr>
+          <p:cNvPr id="14" name="Text 12"/>
+          <p:cNvSpPr/>
+          <p:nvPr/>
+        </p:nvSpPr>
+        <p:spPr>
+          <a:xfrm>
+            <a:off x="8260080" y="1773936"/>
+            <a:ext cx="3307080" cy="603504"/>
+          </a:xfrm>
+          <a:prstGeom prst="rect">
+            <a:avLst/>
+          </a:prstGeom>
+          <a:noFill/>
+          <a:ln/>
+        </p:spPr>
+        <p:txBody>
+          <a:bodyPr wrap="square" rtlCol="0" anchor="ctr">
+            <a:normAutofit/>
+          </a:bodyPr>
+          <a:lstStyle/>
+          <a:p>
+            <a:pPr algn="ctr" indent="0" marL="0">
+              <a:lnSpc>
+                <a:spcPct val="102000"/>
+              </a:lnSpc>
+              <a:buNone/>
+            </a:pPr>
+            <a:r>
+              <a:rPr lang="en-US" sz="1150" dirty="0">
+                <a:solidFill>
+                  <a:srgbClr val="2A2723"/>
+                </a:solidFill>
+                <a:latin typeface="Malgun Gothic" pitchFamily="34" charset="0"/>
+                <a:ea typeface="Malgun Gothic" pitchFamily="34" charset="-122"/>
+                <a:cs typeface="Malgun Gothic" pitchFamily="34" charset="-120"/>
+              </a:rPr>
+              <a:t>트랜스포머</a:t>
+            </a:r>
+            <a:endParaRPr lang="en-US" sz="1150" dirty="0"/>
+          </a:p>
+        </p:txBody>
+      </p:sp>
+      <p:sp>
+        <p:nvSpPr>
+          <p:cNvPr id="15" name="Text 13"/>
+          <p:cNvSpPr/>
+          <p:nvPr/>
+        </p:nvSpPr>
+        <p:spPr>
+          <a:xfrm>
+            <a:off x="548640" y="2615184"/>
+            <a:ext cx="11091672" cy="1057275"/>
+          </a:xfrm>
+          <a:prstGeom prst="rect">
+            <a:avLst/>
+          </a:prstGeom>
+          <a:noFill/>
+          <a:ln/>
+        </p:spPr>
+        <p:txBody>
+          <a:bodyPr wrap="square" rtlCol="0" anchor="t">
+            <a:normAutofit/>
+          </a:bodyPr>
+          <a:lstStyle/>
+          <a:p>
+            <a:pPr indent="0" marL="0">
+              <a:lnSpc>
+                <a:spcPct val="105000"/>
+              </a:lnSpc>
+              <a:buNone/>
+            </a:pPr>
+            <a:r>
+              <a:rPr lang="en-US" sz="1450" b="1" dirty="0">
+                <a:solidFill>
+                  <a:srgbClr val="3F6B5F"/>
+                </a:solidFill>
+                <a:latin typeface="Malgun Gothic" pitchFamily="34" charset="0"/>
+                <a:ea typeface="Malgun Gothic" pitchFamily="34" charset="-122"/>
+                <a:cs typeface="Malgun Gothic" pitchFamily="34" charset="-120"/>
+              </a:rPr>
+              <a:t>›  </a:t>
+            </a:r>
+            <a:pPr indent="0" marL="0">
+              <a:lnSpc>
+                <a:spcPct val="105000"/>
+              </a:lnSpc>
+              <a:buNone/>
+            </a:pPr>
+            <a:r>
+              <a:rPr lang="en-US" sz="1450" dirty="0">
+                <a:solidFill>
+                  <a:srgbClr val="6B6357"/>
+                </a:solidFill>
+                <a:latin typeface="Malgun Gothic" pitchFamily="34" charset="0"/>
+                <a:ea typeface="Malgun Gothic" pitchFamily="34" charset="-122"/>
+                <a:cs typeface="Malgun Gothic" pitchFamily="34" charset="-120"/>
+              </a:rPr>
+              <a:t>먼저 </a:t>
+            </a:r>
+            <a:pPr indent="0" marL="0">
+              <a:lnSpc>
+                <a:spcPct val="105000"/>
+              </a:lnSpc>
+              <a:buNone/>
+            </a:pPr>
+            <a:r>
+              <a:rPr lang="en-US" sz="1450" b="1" dirty="0">
+                <a:solidFill>
+                  <a:srgbClr val="2A2723"/>
+                </a:solidFill>
+                <a:latin typeface="Malgun Gothic" pitchFamily="34" charset="0"/>
+                <a:ea typeface="Malgun Gothic" pitchFamily="34" charset="-122"/>
+                <a:cs typeface="Malgun Gothic" pitchFamily="34" charset="-120"/>
+              </a:rPr>
+              <a:t>현실적 곤란</a:t>
+            </a:r>
+            <a:pPr indent="0" marL="0">
+              <a:lnSpc>
+                <a:spcPct val="105000"/>
+              </a:lnSpc>
+              <a:spcAft>
+                <a:spcPts val="700"/>
+              </a:spcAft>
+              <a:buNone/>
+            </a:pPr>
+            <a:r>
+              <a:rPr lang="en-US" sz="1450" dirty="0">
+                <a:solidFill>
+                  <a:srgbClr val="6B6357"/>
+                </a:solidFill>
+                <a:latin typeface="Malgun Gothic" pitchFamily="34" charset="0"/>
+                <a:ea typeface="Malgun Gothic" pitchFamily="34" charset="-122"/>
+                <a:cs typeface="Malgun Gothic" pitchFamily="34" charset="-120"/>
+              </a:rPr>
+              <a:t> 하나에서 출발 — 왜 정보를 더 줘도 답이 안 좋아질까</a:t>
+            </a:r>
+            <a:endParaRPr lang="en-US" sz="1450" dirty="0"/>
+          </a:p>
+          <a:p>
+            <a:pPr indent="0" marL="0">
+              <a:lnSpc>
+                <a:spcPct val="105000"/>
+              </a:lnSpc>
+              <a:buNone/>
+            </a:pPr>
+            <a:r>
+              <a:rPr lang="en-US" sz="1450" b="1" dirty="0">
+                <a:solidFill>
+                  <a:srgbClr val="3F6B5F"/>
+                </a:solidFill>
+                <a:latin typeface="Malgun Gothic" pitchFamily="34" charset="0"/>
+                <a:ea typeface="Malgun Gothic" pitchFamily="34" charset="-122"/>
+                <a:cs typeface="Malgun Gothic" pitchFamily="34" charset="-120"/>
+              </a:rPr>
+              <a:t>›  </a:t>
+            </a:r>
+            <a:pPr indent="0" marL="0">
+              <a:lnSpc>
+                <a:spcPct val="105000"/>
+              </a:lnSpc>
+              <a:buNone/>
+            </a:pPr>
+            <a:r>
+              <a:rPr lang="en-US" sz="1450" dirty="0">
+                <a:solidFill>
+                  <a:srgbClr val="6B6357"/>
+                </a:solidFill>
+                <a:latin typeface="Malgun Gothic" pitchFamily="34" charset="0"/>
+                <a:ea typeface="Malgun Gothic" pitchFamily="34" charset="-122"/>
+                <a:cs typeface="Malgun Gothic" pitchFamily="34" charset="-120"/>
+              </a:rPr>
+              <a:t>트랜스포머는 발명품이 아니라 </a:t>
+            </a:r>
+            <a:pPr indent="0" marL="0">
+              <a:lnSpc>
+                <a:spcPct val="105000"/>
+              </a:lnSpc>
+              <a:spcAft>
+                <a:spcPts val="700"/>
+              </a:spcAft>
+              <a:buNone/>
+            </a:pPr>
+            <a:r>
+              <a:rPr lang="en-US" sz="1450" b="1" dirty="0">
+                <a:solidFill>
+                  <a:srgbClr val="2A2723"/>
+                </a:solidFill>
+                <a:latin typeface="Malgun Gothic" pitchFamily="34" charset="0"/>
+                <a:ea typeface="Malgun Gothic" pitchFamily="34" charset="-122"/>
+                <a:cs typeface="Malgun Gothic" pitchFamily="34" charset="-120"/>
+              </a:rPr>
+              <a:t>두 분야가 합류한 결과</a:t>
+            </a:r>
+            <a:endParaRPr lang="en-US" sz="1450" dirty="0"/>
+          </a:p>
+          <a:p>
+            <a:pPr indent="0" marL="0">
+              <a:lnSpc>
+                <a:spcPct val="105000"/>
+              </a:lnSpc>
+              <a:buNone/>
+            </a:pPr>
+            <a:r>
+              <a:rPr lang="en-US" sz="1450" b="1" dirty="0">
+                <a:solidFill>
+                  <a:srgbClr val="3F6B5F"/>
+                </a:solidFill>
+                <a:latin typeface="Malgun Gothic" pitchFamily="34" charset="0"/>
+                <a:ea typeface="Malgun Gothic" pitchFamily="34" charset="-122"/>
+                <a:cs typeface="Malgun Gothic" pitchFamily="34" charset="-120"/>
+              </a:rPr>
+              <a:t>›  </a:t>
+            </a:r>
+            <a:pPr indent="0" marL="0">
+              <a:lnSpc>
+                <a:spcPct val="105000"/>
+              </a:lnSpc>
+              <a:buNone/>
+            </a:pPr>
+            <a:r>
+              <a:rPr lang="en-US" sz="1450" dirty="0">
+                <a:solidFill>
+                  <a:srgbClr val="6B6357"/>
+                </a:solidFill>
+                <a:latin typeface="Malgun Gothic" pitchFamily="34" charset="0"/>
+                <a:ea typeface="Malgun Gothic" pitchFamily="34" charset="-122"/>
+                <a:cs typeface="Malgun Gothic" pitchFamily="34" charset="-120"/>
+              </a:rPr>
+              <a:t>오늘은 </a:t>
+            </a:r>
+            <a:pPr indent="0" marL="0">
+              <a:lnSpc>
+                <a:spcPct val="105000"/>
+              </a:lnSpc>
+              <a:buNone/>
+            </a:pPr>
+            <a:r>
+              <a:rPr lang="en-US" sz="1450" b="1" dirty="0">
+                <a:solidFill>
+                  <a:srgbClr val="2A2723"/>
+                </a:solidFill>
+                <a:latin typeface="Malgun Gothic" pitchFamily="34" charset="0"/>
+                <a:ea typeface="Malgun Gothic" pitchFamily="34" charset="-122"/>
+                <a:cs typeface="Malgun Gothic" pitchFamily="34" charset="-120"/>
+              </a:rPr>
+              <a:t>이미지가 연 길</a:t>
+            </a:r>
+            <a:pPr indent="0" marL="0">
+              <a:lnSpc>
+                <a:spcPct val="105000"/>
+              </a:lnSpc>
+              <a:spcAft>
+                <a:spcPts val="700"/>
+              </a:spcAft>
+              <a:buNone/>
+            </a:pPr>
+            <a:r>
+              <a:rPr lang="en-US" sz="1450" dirty="0">
+                <a:solidFill>
+                  <a:srgbClr val="6B6357"/>
+                </a:solidFill>
+                <a:latin typeface="Malgun Gothic" pitchFamily="34" charset="0"/>
+                <a:ea typeface="Malgun Gothic" pitchFamily="34" charset="-122"/>
+                <a:cs typeface="Malgun Gothic" pitchFamily="34" charset="-120"/>
+              </a:rPr>
+              <a:t>부터 — "깊이의 벽"을 발견하고 뚫은 과정</a:t>
+            </a:r>
+            <a:endParaRPr lang="en-US" sz="1450" dirty="0"/>
+          </a:p>
+        </p:txBody>
+      </p:sp>
+      <p:sp>
+        <p:nvSpPr>
+          <p:cNvPr id="16" name="Shape 14"/>
+          <p:cNvSpPr/>
+          <p:nvPr/>
+        </p:nvSpPr>
+        <p:spPr>
+          <a:xfrm>
+            <a:off x="548640" y="3818763"/>
+            <a:ext cx="11091672" cy="548640"/>
+          </a:xfrm>
+          <a:prstGeom prst="roundRect">
+            <a:avLst>
+              <a:gd name="adj" fmla="val 10000"/>
+            </a:avLst>
+          </a:prstGeom>
+          <a:solidFill>
+            <a:srgbClr val="F2EDE4"/>
+          </a:solidFill>
+          <a:ln/>
+        </p:spPr>
+      </p:sp>
+      <p:sp>
+        <p:nvSpPr>
+          <p:cNvPr id="17" name="Shape 15"/>
+          <p:cNvSpPr/>
+          <p:nvPr/>
+        </p:nvSpPr>
+        <p:spPr>
+          <a:xfrm>
+            <a:off x="548640" y="3818763"/>
+            <a:ext cx="54864" cy="548640"/>
+          </a:xfrm>
+          <a:prstGeom prst="rect">
+            <a:avLst/>
+          </a:prstGeom>
+          <a:solidFill>
+            <a:srgbClr val="C8A15A"/>
+          </a:solidFill>
+          <a:ln/>
+        </p:spPr>
+      </p:sp>
+      <p:sp>
+        <p:nvSpPr>
+          <p:cNvPr id="18" name="Text 16"/>
+          <p:cNvSpPr/>
+          <p:nvPr/>
+        </p:nvSpPr>
+        <p:spPr>
+          <a:xfrm>
+            <a:off x="786384" y="3818763"/>
+            <a:ext cx="10707624" cy="548640"/>
+          </a:xfrm>
+          <a:prstGeom prst="rect">
+            <a:avLst/>
+          </a:prstGeom>
+          <a:noFill/>
+          <a:ln/>
+        </p:spPr>
+        <p:txBody>
+          <a:bodyPr wrap="square" rtlCol="0" anchor="ctr">
+            <a:normAutofit/>
+          </a:bodyPr>
+          <a:lstStyle/>
+          <a:p>
+            <a:pPr indent="0" marL="0">
+              <a:lnSpc>
+                <a:spcPct val="104000"/>
+              </a:lnSpc>
+              <a:buNone/>
+            </a:pPr>
+            <a:r>
+              <a:rPr lang="en-US" sz="1300" dirty="0">
+                <a:solidFill>
+                  <a:srgbClr val="6B6357"/>
+                </a:solidFill>
+                <a:latin typeface="Malgun Gothic" pitchFamily="34" charset="0"/>
+                <a:ea typeface="Malgun Gothic" pitchFamily="34" charset="-122"/>
+                <a:cs typeface="Malgun Gothic" pitchFamily="34" charset="-120"/>
+              </a:rPr>
+              <a:t>🎯 이미지의 "깊이의 벽"을 이해하고 나면, 나중에 언어의 "순차의 벽"이 </a:t>
+            </a:r>
+            <a:pPr indent="0" marL="0">
+              <a:lnSpc>
+                <a:spcPct val="104000"/>
+              </a:lnSpc>
+              <a:buNone/>
+            </a:pPr>
+            <a:r>
+              <a:rPr lang="en-US" sz="1300" b="1" dirty="0">
+                <a:solidFill>
+                  <a:srgbClr val="2A2723"/>
+                </a:solidFill>
+                <a:latin typeface="Malgun Gothic" pitchFamily="34" charset="0"/>
+                <a:ea typeface="Malgun Gothic" pitchFamily="34" charset="-122"/>
+                <a:cs typeface="Malgun Gothic" pitchFamily="34" charset="-120"/>
+              </a:rPr>
+              <a:t>놀랄 만큼 같은 모양</a:t>
+            </a:r>
+            <a:pPr indent="0" marL="0">
+              <a:lnSpc>
+                <a:spcPct val="104000"/>
+              </a:lnSpc>
+              <a:buNone/>
+            </a:pPr>
+            <a:r>
+              <a:rPr lang="en-US" sz="1300" dirty="0">
+                <a:solidFill>
+                  <a:srgbClr val="6B6357"/>
+                </a:solidFill>
+                <a:latin typeface="Malgun Gothic" pitchFamily="34" charset="0"/>
+                <a:ea typeface="Malgun Gothic" pitchFamily="34" charset="-122"/>
+                <a:cs typeface="Malgun Gothic" pitchFamily="34" charset="-120"/>
+              </a:rPr>
+              <a:t>이라는 걸 알아보게 됩니다.</a:t>
             </a:r>
             <a:endParaRPr lang="en-US" sz="1300" dirty="0"/>
           </a:p>
@@ -3086,9 +3707,16 @@
 </p:sld>
 </file>
 
-<file path=ppt/slides/slide6.xml><?xml version="1.0" encoding="utf-8"?>
+<file path=ppt/slides/slide3.xml><?xml version="1.0" encoding="utf-8"?>
 <p:sld xmlns:a="http://schemas.openxmlformats.org/drawingml/2006/main" xmlns:r="http://schemas.openxmlformats.org/officeDocument/2006/relationships" xmlns:p="http://schemas.openxmlformats.org/presentationml/2006/main">
-  <p:cSld name="Slide 6">
+  <p:cSld name="Slide 3">
+    <p:bg>
+      <p:bgPr>
+        <a:solidFill>
+          <a:srgbClr val="FAF8F4"/>
+        </a:solidFill>
+      </p:bgPr>
+    </p:bg>
     <p:spTree>
       <p:nvGrpSpPr>
         <p:cNvPr id="1" name=""/>
@@ -3111,8 +3739,8 @@
         </p:nvSpPr>
         <p:spPr>
           <a:xfrm>
-            <a:off x="548640" y="365760"/>
-            <a:ext cx="11091672" cy="822960"/>
+            <a:off x="548640" y="384048"/>
+            <a:ext cx="11091672" cy="731520"/>
           </a:xfrm>
           <a:prstGeom prst="rect">
             <a:avLst/>
@@ -3121,78 +3749,229 @@
           <a:ln/>
         </p:spPr>
         <p:txBody>
-          <a:bodyPr wrap="square" lIns="0" tIns="0" rIns="0" bIns="0" rtlCol="0" anchor="ctr"/>
-          <a:lstStyle/>
-          <a:p>
-            <a:pPr indent="0" marL="0">
-              <a:buNone/>
-            </a:pPr>
-            <a:r>
-              <a:rPr lang="en-US" sz="2600" b="1" dirty="0">
-                <a:solidFill>
-                  <a:srgbClr val="2A2723"/>
-                </a:solidFill>
-                <a:latin typeface="Malgun Gothic" pitchFamily="34" charset="0"/>
-                <a:ea typeface="Malgun Gothic" pitchFamily="34" charset="-122"/>
-                <a:cs typeface="Malgun Gothic" pitchFamily="34" charset="-120"/>
-              </a:rPr>
-              <a:t>🧱 각자의 막다른 벽</a:t>
-            </a:r>
-            <a:endParaRPr lang="en-US" sz="2600" dirty="0"/>
-          </a:p>
-        </p:txBody>
-      </p:sp>
-      <p:sp>
-        <p:nvSpPr>
-          <p:cNvPr id="3" name="Text 1"/>
-          <p:cNvSpPr/>
-          <p:nvPr/>
-        </p:nvSpPr>
-        <p:spPr>
-          <a:xfrm>
-            <a:off x="548640" y="1325880"/>
-            <a:ext cx="11091672" cy="5074920"/>
-          </a:xfrm>
-          <a:prstGeom prst="rect">
-            <a:avLst/>
-          </a:prstGeom>
-          <a:noFill/>
-          <a:ln/>
-        </p:spPr>
-        <p:txBody>
-          <a:bodyPr wrap="square" lIns="0" tIns="0" rIns="0" bIns="0" rtlCol="0" anchor="t">
+          <a:bodyPr wrap="square" rtlCol="0" anchor="ctr">
             <a:normAutofit/>
           </a:bodyPr>
           <a:lstStyle/>
           <a:p>
             <a:pPr indent="0" marL="0">
+              <a:buNone/>
+            </a:pPr>
+            <a:r>
+              <a:rPr lang="en-US" sz="2400" b="1" dirty="0">
+                <a:solidFill>
+                  <a:srgbClr val="2A2723"/>
+                </a:solidFill>
+                <a:latin typeface="Malgun Gothic" pitchFamily="34" charset="0"/>
+                <a:ea typeface="Malgun Gothic" pitchFamily="34" charset="-122"/>
+                <a:cs typeface="Malgun Gothic" pitchFamily="34" charset="-120"/>
+              </a:rPr>
+              <a:t>📄 아주 현실적인 </a:t>
+            </a:r>
+            <a:pPr indent="0" marL="0">
+              <a:buNone/>
+            </a:pPr>
+            <a:r>
+              <a:rPr lang="en-US" sz="2400" b="1" dirty="0">
+                <a:solidFill>
+                  <a:srgbClr val="3F6B5F"/>
+                </a:solidFill>
+                <a:latin typeface="Malgun Gothic" pitchFamily="34" charset="0"/>
+                <a:ea typeface="Malgun Gothic" pitchFamily="34" charset="-122"/>
+                <a:cs typeface="Malgun Gothic" pitchFamily="34" charset="-120"/>
+              </a:rPr>
+              <a:t>곤란</a:t>
+            </a:r>
+            <a:pPr indent="0" marL="0">
+              <a:buNone/>
+            </a:pPr>
+            <a:r>
+              <a:rPr lang="en-US" sz="2400" b="1" dirty="0">
+                <a:solidFill>
+                  <a:srgbClr val="2A2723"/>
+                </a:solidFill>
+                <a:latin typeface="Malgun Gothic" pitchFamily="34" charset="0"/>
+                <a:ea typeface="Malgun Gothic" pitchFamily="34" charset="-122"/>
+                <a:cs typeface="Malgun Gothic" pitchFamily="34" charset="-120"/>
+              </a:rPr>
+              <a:t>에서 출발</a:t>
+            </a:r>
+            <a:endParaRPr lang="en-US" sz="2400" dirty="0"/>
+          </a:p>
+        </p:txBody>
+      </p:sp>
+      <p:sp>
+        <p:nvSpPr>
+          <p:cNvPr id="3" name="Shape 1"/>
+          <p:cNvSpPr/>
+          <p:nvPr/>
+        </p:nvSpPr>
+        <p:spPr>
+          <a:xfrm>
+            <a:off x="566928" y="1133856"/>
+            <a:ext cx="777240" cy="41148"/>
+          </a:xfrm>
+          <a:prstGeom prst="rect">
+            <a:avLst/>
+          </a:prstGeom>
+          <a:solidFill>
+            <a:srgbClr val="3F6B5F"/>
+          </a:solidFill>
+          <a:ln/>
+        </p:spPr>
+      </p:sp>
+      <p:sp>
+        <p:nvSpPr>
+          <p:cNvPr id="4" name="Text 2"/>
+          <p:cNvSpPr/>
+          <p:nvPr/>
+        </p:nvSpPr>
+        <p:spPr>
+          <a:xfrm>
+            <a:off x="548640" y="1371600"/>
+            <a:ext cx="11091672" cy="312039"/>
+          </a:xfrm>
+          <a:prstGeom prst="rect">
+            <a:avLst/>
+          </a:prstGeom>
+          <a:noFill/>
+          <a:ln/>
+        </p:spPr>
+        <p:txBody>
+          <a:bodyPr wrap="square" rtlCol="0" anchor="t">
+            <a:normAutofit/>
+          </a:bodyPr>
+          <a:lstStyle/>
+          <a:p>
+            <a:pPr indent="0" marL="0">
+              <a:lnSpc>
+                <a:spcPct val="108000"/>
+              </a:lnSpc>
               <a:spcAft>
-                <a:spcPts val="600"/>
+                <a:spcPts val="200"/>
               </a:spcAft>
               <a:buNone/>
             </a:pPr>
             <a:r>
-              <a:rPr lang="en-US" sz="1400" b="1" dirty="0">
-                <a:solidFill>
-                  <a:srgbClr val="2A2723"/>
-                </a:solidFill>
-                <a:latin typeface="Malgun Gothic" pitchFamily="34" charset="0"/>
-                <a:ea typeface="Malgun Gothic" pitchFamily="34" charset="-122"/>
-                <a:cs typeface="Malgun Gothic" pitchFamily="34" charset="-120"/>
-              </a:rPr>
-              <a:t>🖼️ 이미지</a:t>
-            </a:r>
-            <a:endParaRPr lang="en-US" sz="1400" dirty="0"/>
-          </a:p>
-          <a:p>
-            <a:pPr lvl="1" indent="0" marL="0">
+              <a:rPr lang="en-US" sz="1350" dirty="0">
+                <a:solidFill>
+                  <a:srgbClr val="6B6357"/>
+                </a:solidFill>
+                <a:latin typeface="Malgun Gothic" pitchFamily="34" charset="0"/>
+                <a:ea typeface="Malgun Gothic" pitchFamily="34" charset="-122"/>
+                <a:cs typeface="Malgun Gothic" pitchFamily="34" charset="-120"/>
+              </a:rPr>
+              <a:t>80쪽짜리 문서를 통째로 AI에 붙여 넣고 "이거 요약해줘"라고 시켜 본 적 있으실 겁니다. 그런데 결과가 어딘가 흐릿합니다.</a:t>
+            </a:r>
+            <a:endParaRPr lang="en-US" sz="1350" dirty="0"/>
+          </a:p>
+        </p:txBody>
+      </p:sp>
+      <p:sp>
+        <p:nvSpPr>
+          <p:cNvPr id="5" name="Text 3"/>
+          <p:cNvSpPr/>
+          <p:nvPr/>
+        </p:nvSpPr>
+        <p:spPr>
+          <a:xfrm>
+            <a:off x="548640" y="1829943"/>
+            <a:ext cx="11091672" cy="1057275"/>
+          </a:xfrm>
+          <a:prstGeom prst="rect">
+            <a:avLst/>
+          </a:prstGeom>
+          <a:noFill/>
+          <a:ln/>
+        </p:spPr>
+        <p:txBody>
+          <a:bodyPr wrap="square" rtlCol="0" anchor="t">
+            <a:normAutofit/>
+          </a:bodyPr>
+          <a:lstStyle/>
+          <a:p>
+            <a:pPr indent="0" marL="0">
+              <a:lnSpc>
+                <a:spcPct val="105000"/>
+              </a:lnSpc>
+              <a:buNone/>
+            </a:pPr>
+            <a:r>
+              <a:rPr lang="en-US" sz="1450" b="1" dirty="0">
+                <a:solidFill>
+                  <a:srgbClr val="3F6B5F"/>
+                </a:solidFill>
+                <a:latin typeface="Malgun Gothic" pitchFamily="34" charset="0"/>
+                <a:ea typeface="Malgun Gothic" pitchFamily="34" charset="-122"/>
+                <a:cs typeface="Malgun Gothic" pitchFamily="34" charset="-120"/>
+              </a:rPr>
+              <a:t>›  </a:t>
+            </a:r>
+            <a:pPr indent="0" marL="0">
+              <a:lnSpc>
+                <a:spcPct val="105000"/>
+              </a:lnSpc>
+              <a:buNone/>
+            </a:pPr>
+            <a:r>
+              <a:rPr lang="en-US" sz="1450" dirty="0">
+                <a:solidFill>
+                  <a:srgbClr val="6B6357"/>
+                </a:solidFill>
+                <a:latin typeface="Malgun Gothic" pitchFamily="34" charset="0"/>
+                <a:ea typeface="Malgun Gothic" pitchFamily="34" charset="-122"/>
+                <a:cs typeface="Malgun Gothic" pitchFamily="34" charset="-120"/>
+              </a:rPr>
+              <a:t>앞부분은 잘 반영되는데 </a:t>
+            </a:r>
+            <a:pPr indent="0" marL="0">
+              <a:lnSpc>
+                <a:spcPct val="105000"/>
+              </a:lnSpc>
               <a:spcAft>
-                <a:spcPts val="600"/>
+                <a:spcPts val="700"/>
               </a:spcAft>
               <a:buNone/>
             </a:pPr>
             <a:r>
-              <a:rPr lang="en-US" sz="1400" dirty="0">
+              <a:rPr lang="en-US" sz="1450" b="1" dirty="0">
+                <a:solidFill>
+                  <a:srgbClr val="2A2723"/>
+                </a:solidFill>
+                <a:latin typeface="Malgun Gothic" pitchFamily="34" charset="0"/>
+                <a:ea typeface="Malgun Gothic" pitchFamily="34" charset="-122"/>
+                <a:cs typeface="Malgun Gothic" pitchFamily="34" charset="-120"/>
+              </a:rPr>
+              <a:t>중간은 뭉개지고</a:t>
+            </a:r>
+            <a:endParaRPr lang="en-US" sz="1450" dirty="0"/>
+          </a:p>
+          <a:p>
+            <a:pPr indent="0" marL="0">
+              <a:lnSpc>
+                <a:spcPct val="105000"/>
+              </a:lnSpc>
+              <a:buNone/>
+            </a:pPr>
+            <a:r>
+              <a:rPr lang="en-US" sz="1450" b="1" dirty="0">
+                <a:solidFill>
+                  <a:srgbClr val="3F6B5F"/>
+                </a:solidFill>
+                <a:latin typeface="Malgun Gothic" pitchFamily="34" charset="0"/>
+                <a:ea typeface="Malgun Gothic" pitchFamily="34" charset="-122"/>
+                <a:cs typeface="Malgun Gothic" pitchFamily="34" charset="-120"/>
+              </a:rPr>
+              <a:t>›  </a:t>
+            </a:r>
+            <a:pPr indent="0" marL="0">
+              <a:lnSpc>
+                <a:spcPct val="105000"/>
+              </a:lnSpc>
+              <a:buNone/>
+            </a:pPr>
+            <a:r>
+              <a:rPr lang="en-US" sz="1450" dirty="0">
                 <a:solidFill>
                   <a:srgbClr val="6B6357"/>
                 </a:solidFill>
@@ -3200,19 +3979,56 @@
                 <a:ea typeface="Malgun Gothic" pitchFamily="34" charset="-122"/>
                 <a:cs typeface="Malgun Gothic" pitchFamily="34" charset="-120"/>
               </a:rPr>
-              <a:t>사진 속 고양이를 알아보게 만들려던 사람들 — "어떻게 하면 신경망을 더 깊게 쌓을 수 있을까"라는 벽 앞에서 오래 멈춰 섰습니다</a:t>
-            </a:r>
-            <a:endParaRPr lang="en-US" sz="1400" dirty="0"/>
-          </a:p>
-          <a:p>
-            <a:pPr lvl="1" indent="0" marL="0">
+              <a:t>분명 문서에 있던 </a:t>
+            </a:r>
+            <a:pPr indent="0" marL="0">
+              <a:lnSpc>
+                <a:spcPct val="105000"/>
+              </a:lnSpc>
               <a:spcAft>
-                <a:spcPts val="600"/>
+                <a:spcPts val="700"/>
               </a:spcAft>
               <a:buNone/>
             </a:pPr>
             <a:r>
-              <a:rPr lang="en-US" sz="1400" dirty="0">
+              <a:rPr lang="en-US" sz="1450" b="1" dirty="0">
+                <a:solidFill>
+                  <a:srgbClr val="2A2723"/>
+                </a:solidFill>
+                <a:latin typeface="Malgun Gothic" pitchFamily="34" charset="0"/>
+                <a:ea typeface="Malgun Gothic" pitchFamily="34" charset="-122"/>
+                <a:cs typeface="Malgun Gothic" pitchFamily="34" charset="-120"/>
+              </a:rPr>
+              <a:t>핵심 조항을 슬쩍 빠뜨립니다</a:t>
+            </a:r>
+            <a:endParaRPr lang="en-US" sz="1450" dirty="0"/>
+          </a:p>
+          <a:p>
+            <a:pPr indent="0" marL="0">
+              <a:lnSpc>
+                <a:spcPct val="105000"/>
+              </a:lnSpc>
+              <a:buNone/>
+            </a:pPr>
+            <a:r>
+              <a:rPr lang="en-US" sz="1450" b="1" dirty="0">
+                <a:solidFill>
+                  <a:srgbClr val="3F6B5F"/>
+                </a:solidFill>
+                <a:latin typeface="Malgun Gothic" pitchFamily="34" charset="0"/>
+                <a:ea typeface="Malgun Gothic" pitchFamily="34" charset="-122"/>
+                <a:cs typeface="Malgun Gothic" pitchFamily="34" charset="-120"/>
+              </a:rPr>
+              <a:t>›  </a:t>
+            </a:r>
+            <a:pPr indent="0" marL="0">
+              <a:lnSpc>
+                <a:spcPct val="105000"/>
+              </a:lnSpc>
+              <a:buNone/>
+            </a:pPr>
+            <a:r>
+              <a:rPr lang="en-US" sz="1450" dirty="0">
                 <a:solidFill>
                   <a:srgbClr val="6B6357"/>
                 </a:solidFill>
@@ -3220,89 +4036,146 @@
                 <a:ea typeface="Malgun Gothic" pitchFamily="34" charset="-122"/>
                 <a:cs typeface="Malgun Gothic" pitchFamily="34" charset="-120"/>
               </a:rPr>
-              <a:t>= 깊이의 벽</a:t>
-            </a:r>
-            <a:endParaRPr lang="en-US" sz="1400" dirty="0"/>
-          </a:p>
-          <a:p>
-            <a:pPr indent="0" marL="0">
+              <a:t>길게 넣을수록 </a:t>
+            </a:r>
+            <a:pPr indent="0" marL="0">
+              <a:lnSpc>
+                <a:spcPct val="105000"/>
+              </a:lnSpc>
+              <a:buNone/>
+            </a:pPr>
+            <a:r>
+              <a:rPr lang="en-US" sz="1450" b="1" dirty="0">
+                <a:solidFill>
+                  <a:srgbClr val="2A2723"/>
+                </a:solidFill>
+                <a:latin typeface="Malgun Gothic" pitchFamily="34" charset="0"/>
+                <a:ea typeface="Malgun Gothic" pitchFamily="34" charset="-122"/>
+                <a:cs typeface="Malgun Gothic" pitchFamily="34" charset="-120"/>
+              </a:rPr>
+              <a:t>응답은 느려지고</a:t>
+            </a:r>
+            <a:pPr indent="0" marL="0">
+              <a:lnSpc>
+                <a:spcPct val="105000"/>
+              </a:lnSpc>
+              <a:buNone/>
+            </a:pPr>
+            <a:r>
+              <a:rPr lang="en-US" sz="1450" dirty="0">
+                <a:solidFill>
+                  <a:srgbClr val="6B6357"/>
+                </a:solidFill>
+                <a:latin typeface="Malgun Gothic" pitchFamily="34" charset="0"/>
+                <a:ea typeface="Malgun Gothic" pitchFamily="34" charset="-122"/>
+                <a:cs typeface="Malgun Gothic" pitchFamily="34" charset="-120"/>
+              </a:rPr>
+              <a:t> 비용 청구서 숫자는 </a:t>
+            </a:r>
+            <a:pPr indent="0" marL="0">
+              <a:lnSpc>
+                <a:spcPct val="105000"/>
+              </a:lnSpc>
               <a:spcAft>
-                <a:spcPts val="600"/>
+                <a:spcPts val="700"/>
               </a:spcAft>
               <a:buNone/>
             </a:pPr>
             <a:r>
-              <a:rPr lang="en-US" sz="1400" b="1" dirty="0">
-                <a:solidFill>
-                  <a:srgbClr val="2A2723"/>
-                </a:solidFill>
-                <a:latin typeface="Malgun Gothic" pitchFamily="34" charset="0"/>
-                <a:ea typeface="Malgun Gothic" pitchFamily="34" charset="-122"/>
-                <a:cs typeface="Malgun Gothic" pitchFamily="34" charset="-120"/>
-              </a:rPr>
-              <a:t>💬 언어</a:t>
-            </a:r>
-            <a:endParaRPr lang="en-US" sz="1400" dirty="0"/>
-          </a:p>
-          <a:p>
-            <a:pPr lvl="1" indent="0" marL="0">
-              <a:spcAft>
-                <a:spcPts val="600"/>
-              </a:spcAft>
-              <a:buNone/>
-            </a:pPr>
-            <a:r>
-              <a:rPr lang="en-US" sz="1400" dirty="0">
-                <a:solidFill>
-                  <a:srgbClr val="6B6357"/>
-                </a:solidFill>
-                <a:latin typeface="Malgun Gothic" pitchFamily="34" charset="0"/>
-                <a:ea typeface="Malgun Gothic" pitchFamily="34" charset="-122"/>
-                <a:cs typeface="Malgun Gothic" pitchFamily="34" charset="-120"/>
-              </a:rPr>
-              <a:t>문장을 이해시키려던 사람들 — "어떻게 하면 앞 단어를 잊지 않고 긴 문장을 처리할까"라는 벽 앞에서 멈춰 섰습니다</a:t>
-            </a:r>
-            <a:endParaRPr lang="en-US" sz="1400" dirty="0"/>
-          </a:p>
-          <a:p>
-            <a:pPr lvl="1" indent="0" marL="0">
-              <a:spcAft>
-                <a:spcPts val="600"/>
-              </a:spcAft>
-              <a:buNone/>
-            </a:pPr>
-            <a:r>
-              <a:rPr lang="en-US" sz="1400" dirty="0">
-                <a:solidFill>
-                  <a:srgbClr val="6B6357"/>
-                </a:solidFill>
-                <a:latin typeface="Malgun Gothic" pitchFamily="34" charset="0"/>
-                <a:ea typeface="Malgun Gothic" pitchFamily="34" charset="-122"/>
-                <a:cs typeface="Malgun Gothic" pitchFamily="34" charset="-120"/>
-              </a:rPr>
-              <a:t>= 순차의 벽</a:t>
-            </a:r>
-            <a:endParaRPr lang="en-US" sz="1400" dirty="0"/>
-          </a:p>
-          <a:p>
-            <a:pPr indent="0" marL="0">
-              <a:spcAft>
-                <a:spcPts val="600"/>
-              </a:spcAft>
-              <a:buNone/>
-            </a:pPr>
-            <a:r>
-              <a:rPr lang="en-US" sz="1400" dirty="0">
-                <a:solidFill>
-                  <a:srgbClr val="3F6B5F"/>
-                </a:solidFill>
-                <a:latin typeface="Malgun Gothic" pitchFamily="34" charset="0"/>
-                <a:ea typeface="Malgun Gothic" pitchFamily="34" charset="-122"/>
-                <a:cs typeface="Malgun Gothic" pitchFamily="34" charset="-120"/>
-              </a:rPr>
-              <a:t>★ 🔑 두 벽은 얼핏 전혀 다르지만 뿌리가 닮았습니다. 그래서 같은 열쇠 하나가 두 벽을 동시에 뚫습니다.</a:t>
-            </a:r>
-            <a:endParaRPr lang="en-US" sz="1400" dirty="0"/>
+              <a:rPr lang="en-US" sz="1450" b="1" dirty="0">
+                <a:solidFill>
+                  <a:srgbClr val="2A2723"/>
+                </a:solidFill>
+                <a:latin typeface="Malgun Gothic" pitchFamily="34" charset="0"/>
+                <a:ea typeface="Malgun Gothic" pitchFamily="34" charset="-122"/>
+                <a:cs typeface="Malgun Gothic" pitchFamily="34" charset="-120"/>
+              </a:rPr>
+              <a:t>커집니다</a:t>
+            </a:r>
+            <a:endParaRPr lang="en-US" sz="1450" dirty="0"/>
+          </a:p>
+        </p:txBody>
+      </p:sp>
+      <p:sp>
+        <p:nvSpPr>
+          <p:cNvPr id="6" name="Shape 4"/>
+          <p:cNvSpPr/>
+          <p:nvPr/>
+        </p:nvSpPr>
+        <p:spPr>
+          <a:xfrm>
+            <a:off x="548640" y="3033522"/>
+            <a:ext cx="11091672" cy="914400"/>
+          </a:xfrm>
+          <a:prstGeom prst="roundRect">
+            <a:avLst>
+              <a:gd name="adj" fmla="val 14000"/>
+            </a:avLst>
+          </a:prstGeom>
+          <a:solidFill>
+            <a:srgbClr val="3F6B5F"/>
+          </a:solidFill>
+          <a:ln/>
+        </p:spPr>
+      </p:sp>
+      <p:sp>
+        <p:nvSpPr>
+          <p:cNvPr id="7" name="Text 5"/>
+          <p:cNvSpPr/>
+          <p:nvPr/>
+        </p:nvSpPr>
+        <p:spPr>
+          <a:xfrm>
+            <a:off x="1005840" y="3033522"/>
+            <a:ext cx="10177272" cy="914400"/>
+          </a:xfrm>
+          <a:prstGeom prst="rect">
+            <a:avLst/>
+          </a:prstGeom>
+          <a:noFill/>
+          <a:ln/>
+        </p:spPr>
+        <p:txBody>
+          <a:bodyPr wrap="square" rtlCol="0" anchor="ctr">
+            <a:normAutofit/>
+          </a:bodyPr>
+          <a:lstStyle/>
+          <a:p>
+            <a:pPr algn="ctr" indent="0" marL="0">
+              <a:lnSpc>
+                <a:spcPct val="110000"/>
+              </a:lnSpc>
+              <a:buNone/>
+            </a:pPr>
+            <a:r>
+              <a:rPr lang="en-US" sz="1700" b="1" dirty="0">
+                <a:solidFill>
+                  <a:srgbClr val="FFFFFF"/>
+                </a:solidFill>
+                <a:latin typeface="Malgun Gothic" pitchFamily="34" charset="0"/>
+                <a:ea typeface="Malgun Gothic" pitchFamily="34" charset="-122"/>
+                <a:cs typeface="Malgun Gothic" pitchFamily="34" charset="-120"/>
+              </a:rPr>
+              <a:t>분명 더 많은 정보를 줬는데  </a:t>
+            </a:r>
+            <a:pPr algn="ctr" indent="0" marL="0">
+              <a:lnSpc>
+                <a:spcPct val="110000"/>
+              </a:lnSpc>
+              <a:buNone/>
+            </a:pPr>
+            <a:r>
+              <a:rPr lang="en-US" sz="1700" b="1" dirty="0">
+                <a:solidFill>
+                  <a:srgbClr val="C8A15A"/>
+                </a:solidFill>
+                <a:latin typeface="Malgun Gothic" pitchFamily="34" charset="0"/>
+                <a:ea typeface="Malgun Gothic" pitchFamily="34" charset="-122"/>
+                <a:cs typeface="Malgun Gothic" pitchFamily="34" charset="-120"/>
+              </a:rPr>
+              <a:t>왜 답은 더 좋아지지 않을까?</a:t>
+            </a:r>
+            <a:endParaRPr lang="en-US" sz="1700" dirty="0"/>
           </a:p>
         </p:txBody>
       </p:sp>
@@ -3314,9 +4187,16 @@
 </p:sld>
 </file>
 
-<file path=ppt/slides/slide7.xml><?xml version="1.0" encoding="utf-8"?>
+<file path=ppt/slides/slide4.xml><?xml version="1.0" encoding="utf-8"?>
 <p:sld xmlns:a="http://schemas.openxmlformats.org/drawingml/2006/main" xmlns:r="http://schemas.openxmlformats.org/officeDocument/2006/relationships" xmlns:p="http://schemas.openxmlformats.org/presentationml/2006/main">
-  <p:cSld name="Slide 7">
+  <p:cSld name="Slide 4">
+    <p:bg>
+      <p:bgPr>
+        <a:solidFill>
+          <a:srgbClr val="FAF8F4"/>
+        </a:solidFill>
+      </p:bgPr>
+    </p:bg>
     <p:spTree>
       <p:nvGrpSpPr>
         <p:cNvPr id="1" name=""/>
@@ -3339,8 +4219,8 @@
         </p:nvSpPr>
         <p:spPr>
           <a:xfrm>
-            <a:off x="548640" y="365760"/>
-            <a:ext cx="11091672" cy="822960"/>
+            <a:off x="548640" y="384048"/>
+            <a:ext cx="11091672" cy="731520"/>
           </a:xfrm>
           <a:prstGeom prst="rect">
             <a:avLst/>
@@ -3349,89 +4229,520 @@
           <a:ln/>
         </p:spPr>
         <p:txBody>
-          <a:bodyPr wrap="square" lIns="0" tIns="0" rIns="0" bIns="0" rtlCol="0" anchor="ctr"/>
-          <a:lstStyle/>
-          <a:p>
-            <a:pPr indent="0" marL="0">
-              <a:buNone/>
-            </a:pPr>
-            <a:r>
-              <a:rPr lang="en-US" sz="2600" b="1" dirty="0">
-                <a:solidFill>
-                  <a:srgbClr val="2A2723"/>
-                </a:solidFill>
-                <a:latin typeface="Malgun Gothic" pitchFamily="34" charset="0"/>
-                <a:ea typeface="Malgun Gothic" pitchFamily="34" charset="-122"/>
-                <a:cs typeface="Malgun Gothic" pitchFamily="34" charset="-120"/>
-              </a:rPr>
-              <a:t>🚶 먼저 이미지가 연 길부터</a:t>
-            </a:r>
-            <a:endParaRPr lang="en-US" sz="2600" dirty="0"/>
-          </a:p>
-        </p:txBody>
-      </p:sp>
-      <p:sp>
-        <p:nvSpPr>
-          <p:cNvPr id="3" name="Text 1"/>
-          <p:cNvSpPr/>
-          <p:nvPr/>
-        </p:nvSpPr>
-        <p:spPr>
-          <a:xfrm>
-            <a:off x="548640" y="1325880"/>
-            <a:ext cx="11091672" cy="5074920"/>
-          </a:xfrm>
-          <a:prstGeom prst="rect">
-            <a:avLst/>
-          </a:prstGeom>
-          <a:noFill/>
-          <a:ln/>
-        </p:spPr>
-        <p:txBody>
-          <a:bodyPr wrap="square" lIns="0" tIns="0" rIns="0" bIns="0" rtlCol="0" anchor="t">
+          <a:bodyPr wrap="square" rtlCol="0" anchor="ctr">
             <a:normAutofit/>
           </a:bodyPr>
           <a:lstStyle/>
           <a:p>
-            <a:pPr marL="177800" indent="-177800">
+            <a:pPr indent="0" marL="0">
+              <a:buNone/>
+            </a:pPr>
+            <a:r>
+              <a:rPr lang="en-US" sz="2400" b="1" dirty="0">
+                <a:solidFill>
+                  <a:srgbClr val="2A2723"/>
+                </a:solidFill>
+                <a:latin typeface="Malgun Gothic" pitchFamily="34" charset="0"/>
+                <a:ea typeface="Malgun Gothic" pitchFamily="34" charset="-122"/>
+                <a:cs typeface="Malgun Gothic" pitchFamily="34" charset="-120"/>
+              </a:rPr>
+              <a:t>🔎 "AI가 멍청해서"가 </a:t>
+            </a:r>
+            <a:pPr indent="0" marL="0">
+              <a:buNone/>
+            </a:pPr>
+            <a:r>
+              <a:rPr lang="en-US" sz="2400" b="1" dirty="0">
+                <a:solidFill>
+                  <a:srgbClr val="3F6B5F"/>
+                </a:solidFill>
+                <a:latin typeface="Malgun Gothic" pitchFamily="34" charset="0"/>
+                <a:ea typeface="Malgun Gothic" pitchFamily="34" charset="-122"/>
+                <a:cs typeface="Malgun Gothic" pitchFamily="34" charset="-120"/>
+              </a:rPr>
+              <a:t>아닙니다</a:t>
+            </a:r>
+            <a:endParaRPr lang="en-US" sz="2400" dirty="0"/>
+          </a:p>
+        </p:txBody>
+      </p:sp>
+      <p:sp>
+        <p:nvSpPr>
+          <p:cNvPr id="3" name="Shape 1"/>
+          <p:cNvSpPr/>
+          <p:nvPr/>
+        </p:nvSpPr>
+        <p:spPr>
+          <a:xfrm>
+            <a:off x="566928" y="1133856"/>
+            <a:ext cx="777240" cy="41148"/>
+          </a:xfrm>
+          <a:prstGeom prst="rect">
+            <a:avLst/>
+          </a:prstGeom>
+          <a:solidFill>
+            <a:srgbClr val="3F6B5F"/>
+          </a:solidFill>
+          <a:ln/>
+        </p:spPr>
+      </p:sp>
+      <p:sp>
+        <p:nvSpPr>
+          <p:cNvPr id="4" name="Text 2"/>
+          <p:cNvSpPr/>
+          <p:nvPr/>
+        </p:nvSpPr>
+        <p:spPr>
+          <a:xfrm>
+            <a:off x="548640" y="1371600"/>
+            <a:ext cx="11091672" cy="717042"/>
+          </a:xfrm>
+          <a:prstGeom prst="rect">
+            <a:avLst/>
+          </a:prstGeom>
+          <a:noFill/>
+          <a:ln/>
+        </p:spPr>
+        <p:txBody>
+          <a:bodyPr wrap="square" rtlCol="0" anchor="t">
+            <a:normAutofit/>
+          </a:bodyPr>
+          <a:lstStyle/>
+          <a:p>
+            <a:pPr indent="0" marL="0">
+              <a:lnSpc>
+                <a:spcPct val="105000"/>
+              </a:lnSpc>
+              <a:buNone/>
+            </a:pPr>
+            <a:r>
+              <a:rPr lang="en-US" sz="1450" b="1" dirty="0">
+                <a:solidFill>
+                  <a:srgbClr val="3F6B5F"/>
+                </a:solidFill>
+                <a:latin typeface="Malgun Gothic" pitchFamily="34" charset="0"/>
+                <a:ea typeface="Malgun Gothic" pitchFamily="34" charset="-122"/>
+                <a:cs typeface="Malgun Gothic" pitchFamily="34" charset="-120"/>
+              </a:rPr>
+              <a:t>›  </a:t>
+            </a:r>
+            <a:pPr indent="0" marL="0">
+              <a:lnSpc>
+                <a:spcPct val="105000"/>
+              </a:lnSpc>
+              <a:buNone/>
+            </a:pPr>
+            <a:r>
+              <a:rPr lang="en-US" sz="1450" dirty="0">
+                <a:solidFill>
+                  <a:srgbClr val="6B6357"/>
+                </a:solidFill>
+                <a:latin typeface="Malgun Gothic" pitchFamily="34" charset="0"/>
+                <a:ea typeface="Malgun Gothic" pitchFamily="34" charset="-122"/>
+                <a:cs typeface="Malgun Gothic" pitchFamily="34" charset="-120"/>
+              </a:rPr>
+              <a:t>모델은 글자를 </a:t>
+            </a:r>
+            <a:pPr indent="0" marL="0">
+              <a:lnSpc>
+                <a:spcPct val="105000"/>
+              </a:lnSpc>
+              <a:buNone/>
+            </a:pPr>
+            <a:r>
+              <a:rPr lang="en-US" sz="1450" b="1" dirty="0">
+                <a:solidFill>
+                  <a:srgbClr val="2A2723"/>
+                </a:solidFill>
+                <a:latin typeface="Malgun Gothic" pitchFamily="34" charset="0"/>
+                <a:ea typeface="Malgun Gothic" pitchFamily="34" charset="-122"/>
+                <a:cs typeface="Malgun Gothic" pitchFamily="34" charset="-120"/>
+              </a:rPr>
+              <a:t>토큰</a:t>
+            </a:r>
+            <a:pPr indent="0" marL="0">
+              <a:lnSpc>
+                <a:spcPct val="105000"/>
+              </a:lnSpc>
+              <a:buNone/>
+            </a:pPr>
+            <a:r>
+              <a:rPr lang="en-US" sz="1450" dirty="0">
+                <a:solidFill>
+                  <a:srgbClr val="6B6357"/>
+                </a:solidFill>
+                <a:latin typeface="Malgun Gothic" pitchFamily="34" charset="0"/>
+                <a:ea typeface="Malgun Gothic" pitchFamily="34" charset="-122"/>
+                <a:cs typeface="Malgun Gothic" pitchFamily="34" charset="-120"/>
+              </a:rPr>
+              <a:t>이라는 작은 조각으로 쪼개, 한 번에 들여다볼 수 있는 </a:t>
+            </a:r>
+            <a:pPr indent="0" marL="0">
+              <a:lnSpc>
+                <a:spcPct val="105000"/>
+              </a:lnSpc>
+              <a:buNone/>
+            </a:pPr>
+            <a:r>
+              <a:rPr lang="en-US" sz="1450" b="1" dirty="0">
+                <a:solidFill>
+                  <a:srgbClr val="2A2723"/>
+                </a:solidFill>
+                <a:latin typeface="Malgun Gothic" pitchFamily="34" charset="0"/>
+                <a:ea typeface="Malgun Gothic" pitchFamily="34" charset="-122"/>
+                <a:cs typeface="Malgun Gothic" pitchFamily="34" charset="-120"/>
+              </a:rPr>
+              <a:t>창(컨텍스트)</a:t>
+            </a:r>
+            <a:pPr indent="0" marL="0">
+              <a:lnSpc>
+                <a:spcPct val="105000"/>
+              </a:lnSpc>
               <a:spcAft>
-                <a:spcPts val="600"/>
+                <a:spcPts val="700"/>
               </a:spcAft>
-              <a:buSzPct val="100000"/>
-              <a:buChar char="▪"/>
-            </a:pPr>
-            <a:r>
-              <a:rPr lang="en-US" sz="1400" dirty="0">
-                <a:solidFill>
-                  <a:srgbClr val="2A2723"/>
-                </a:solidFill>
-                <a:latin typeface="Malgun Gothic" pitchFamily="34" charset="0"/>
-                <a:ea typeface="Malgun Gothic" pitchFamily="34" charset="-122"/>
-                <a:cs typeface="Malgun Gothic" pitchFamily="34" charset="-120"/>
-              </a:rPr>
-              <a:t>[그림] 오늘이미지 — 깊이의 벽 발견하고 뚫기 → 다음언어 — 순차의 벽 같은 모양임을 알아보기</a:t>
-            </a:r>
-            <a:endParaRPr lang="en-US" sz="1400" dirty="0"/>
-          </a:p>
-          <a:p>
-            <a:pPr indent="0" marL="0">
+              <a:buNone/>
+            </a:pPr>
+            <a:r>
+              <a:rPr lang="en-US" sz="1450" dirty="0">
+                <a:solidFill>
+                  <a:srgbClr val="6B6357"/>
+                </a:solidFill>
+                <a:latin typeface="Malgun Gothic" pitchFamily="34" charset="0"/>
+                <a:ea typeface="Malgun Gothic" pitchFamily="34" charset="-122"/>
+                <a:cs typeface="Malgun Gothic" pitchFamily="34" charset="-120"/>
+              </a:rPr>
+              <a:t>의 크기가 정해져 있습니다</a:t>
+            </a:r>
+            <a:endParaRPr lang="en-US" sz="1450" dirty="0"/>
+          </a:p>
+          <a:p>
+            <a:pPr indent="0" marL="0">
+              <a:lnSpc>
+                <a:spcPct val="105000"/>
+              </a:lnSpc>
+              <a:buNone/>
+            </a:pPr>
+            <a:r>
+              <a:rPr lang="en-US" sz="1450" b="1" dirty="0">
+                <a:solidFill>
+                  <a:srgbClr val="3F6B5F"/>
+                </a:solidFill>
+                <a:latin typeface="Malgun Gothic" pitchFamily="34" charset="0"/>
+                <a:ea typeface="Malgun Gothic" pitchFamily="34" charset="-122"/>
+                <a:cs typeface="Malgun Gothic" pitchFamily="34" charset="-120"/>
+              </a:rPr>
+              <a:t>›  </a:t>
+            </a:r>
+            <a:pPr indent="0" marL="0">
+              <a:lnSpc>
+                <a:spcPct val="105000"/>
+              </a:lnSpc>
+              <a:buNone/>
+            </a:pPr>
+            <a:r>
+              <a:rPr lang="en-US" sz="1450" dirty="0">
+                <a:solidFill>
+                  <a:srgbClr val="6B6357"/>
+                </a:solidFill>
+                <a:latin typeface="Malgun Gothic" pitchFamily="34" charset="0"/>
+                <a:ea typeface="Malgun Gothic" pitchFamily="34" charset="-122"/>
+                <a:cs typeface="Malgun Gothic" pitchFamily="34" charset="-120"/>
+              </a:rPr>
+              <a:t>그 창 안에서 </a:t>
+            </a:r>
+            <a:pPr indent="0" marL="0">
+              <a:lnSpc>
+                <a:spcPct val="105000"/>
+              </a:lnSpc>
+              <a:buNone/>
+            </a:pPr>
+            <a:r>
+              <a:rPr lang="en-US" sz="1450" b="1" dirty="0">
+                <a:solidFill>
+                  <a:srgbClr val="2A2723"/>
+                </a:solidFill>
+                <a:latin typeface="Malgun Gothic" pitchFamily="34" charset="0"/>
+                <a:ea typeface="Malgun Gothic" pitchFamily="34" charset="-122"/>
+                <a:cs typeface="Malgun Gothic" pitchFamily="34" charset="-120"/>
+              </a:rPr>
+              <a:t>어떤 조각에 얼마나 주의를 배분하느냐</a:t>
+            </a:r>
+            <a:pPr indent="0" marL="0">
+              <a:lnSpc>
+                <a:spcPct val="105000"/>
+              </a:lnSpc>
               <a:spcAft>
-                <a:spcPts val="600"/>
+                <a:spcPts val="700"/>
               </a:spcAft>
               <a:buNone/>
             </a:pPr>
             <a:r>
-              <a:rPr lang="en-US" sz="1400" dirty="0">
-                <a:solidFill>
-                  <a:srgbClr val="3F6B5F"/>
-                </a:solidFill>
-                <a:latin typeface="Malgun Gothic" pitchFamily="34" charset="0"/>
-                <a:ea typeface="Malgun Gothic" pitchFamily="34" charset="-122"/>
-                <a:cs typeface="Malgun Gothic" pitchFamily="34" charset="-120"/>
-              </a:rPr>
-              <a:t>★ 🔑 이미지 쪽에서 사람들이 깊이의 벽을 어떻게 발견하고 어떻게 뚫었는지 이해하고 나면, 언어 쪽 사람들이 만난 순차의 벽이 놀랄 만큼 같은 모양이라는 걸 알아보게 됩니다.</a:t>
-            </a:r>
-            <a:endParaRPr lang="en-US" sz="1400" dirty="0"/>
+              <a:rPr lang="en-US" sz="1450" dirty="0">
+                <a:solidFill>
+                  <a:srgbClr val="6B6357"/>
+                </a:solidFill>
+                <a:latin typeface="Malgun Gothic" pitchFamily="34" charset="0"/>
+                <a:ea typeface="Malgun Gothic" pitchFamily="34" charset="-122"/>
+                <a:cs typeface="Malgun Gothic" pitchFamily="34" charset="-120"/>
+              </a:rPr>
+              <a:t>의 문제입니다</a:t>
+            </a:r>
+            <a:endParaRPr lang="en-US" sz="1450" dirty="0"/>
+          </a:p>
+        </p:txBody>
+      </p:sp>
+      <p:sp>
+        <p:nvSpPr>
+          <p:cNvPr id="5" name="Shape 3"/>
+          <p:cNvSpPr/>
+          <p:nvPr/>
+        </p:nvSpPr>
+        <p:spPr>
+          <a:xfrm>
+            <a:off x="548640" y="2234946"/>
+            <a:ext cx="11091672" cy="914400"/>
+          </a:xfrm>
+          <a:prstGeom prst="roundRect">
+            <a:avLst>
+              <a:gd name="adj" fmla="val 14000"/>
+            </a:avLst>
+          </a:prstGeom>
+          <a:solidFill>
+            <a:srgbClr val="3F6B5F"/>
+          </a:solidFill>
+          <a:ln/>
+        </p:spPr>
+      </p:sp>
+      <p:sp>
+        <p:nvSpPr>
+          <p:cNvPr id="6" name="Text 4"/>
+          <p:cNvSpPr/>
+          <p:nvPr/>
+        </p:nvSpPr>
+        <p:spPr>
+          <a:xfrm>
+            <a:off x="1005840" y="2234946"/>
+            <a:ext cx="10177272" cy="914400"/>
+          </a:xfrm>
+          <a:prstGeom prst="rect">
+            <a:avLst/>
+          </a:prstGeom>
+          <a:noFill/>
+          <a:ln/>
+        </p:spPr>
+        <p:txBody>
+          <a:bodyPr wrap="square" rtlCol="0" anchor="ctr">
+            <a:normAutofit/>
+          </a:bodyPr>
+          <a:lstStyle/>
+          <a:p>
+            <a:pPr algn="ctr" indent="0" marL="0">
+              <a:lnSpc>
+                <a:spcPct val="110000"/>
+              </a:lnSpc>
+              <a:buNone/>
+            </a:pPr>
+            <a:r>
+              <a:rPr lang="en-US" sz="1700" b="1" dirty="0">
+                <a:solidFill>
+                  <a:srgbClr val="FFFFFF"/>
+                </a:solidFill>
+                <a:latin typeface="Malgun Gothic" pitchFamily="34" charset="0"/>
+                <a:ea typeface="Malgun Gothic" pitchFamily="34" charset="-122"/>
+                <a:cs typeface="Malgun Gothic" pitchFamily="34" charset="-120"/>
+              </a:rPr>
+              <a:t>정보를 </a:t>
+            </a:r>
+            <a:pPr algn="ctr" indent="0" marL="0">
+              <a:lnSpc>
+                <a:spcPct val="110000"/>
+              </a:lnSpc>
+              <a:buNone/>
+            </a:pPr>
+            <a:r>
+              <a:rPr lang="en-US" sz="1700" b="1" dirty="0">
+                <a:solidFill>
+                  <a:srgbClr val="C8A15A"/>
+                </a:solidFill>
+                <a:latin typeface="Malgun Gothic" pitchFamily="34" charset="0"/>
+                <a:ea typeface="Malgun Gothic" pitchFamily="34" charset="-122"/>
+                <a:cs typeface="Malgun Gothic" pitchFamily="34" charset="-120"/>
+              </a:rPr>
+              <a:t>"얼마나 넣느냐"</a:t>
+            </a:r>
+            <a:pPr algn="ctr" indent="0" marL="0">
+              <a:lnSpc>
+                <a:spcPct val="110000"/>
+              </a:lnSpc>
+              <a:buNone/>
+            </a:pPr>
+            <a:r>
+              <a:rPr lang="en-US" sz="1700" b="1" dirty="0">
+                <a:solidFill>
+                  <a:srgbClr val="FFFFFF"/>
+                </a:solidFill>
+                <a:latin typeface="Malgun Gothic" pitchFamily="34" charset="0"/>
+                <a:ea typeface="Malgun Gothic" pitchFamily="34" charset="-122"/>
+                <a:cs typeface="Malgun Gothic" pitchFamily="34" charset="-120"/>
+              </a:rPr>
+              <a:t>가 아니라  </a:t>
+            </a:r>
+            <a:pPr algn="ctr" indent="0" marL="0">
+              <a:lnSpc>
+                <a:spcPct val="110000"/>
+              </a:lnSpc>
+              <a:buNone/>
+            </a:pPr>
+            <a:r>
+              <a:rPr lang="en-US" sz="1700" b="1" dirty="0">
+                <a:solidFill>
+                  <a:srgbClr val="C8A15A"/>
+                </a:solidFill>
+                <a:latin typeface="Malgun Gothic" pitchFamily="34" charset="0"/>
+                <a:ea typeface="Malgun Gothic" pitchFamily="34" charset="-122"/>
+                <a:cs typeface="Malgun Gothic" pitchFamily="34" charset="-120"/>
+              </a:rPr>
+              <a:t>"어떻게 배치하고 무엇에 집중시키느냐"</a:t>
+            </a:r>
+            <a:pPr algn="ctr" indent="0" marL="0">
+              <a:lnSpc>
+                <a:spcPct val="110000"/>
+              </a:lnSpc>
+              <a:buNone/>
+            </a:pPr>
+            <a:r>
+              <a:rPr lang="en-US" sz="1700" b="1" dirty="0">
+                <a:solidFill>
+                  <a:srgbClr val="FFFFFF"/>
+                </a:solidFill>
+                <a:latin typeface="Malgun Gothic" pitchFamily="34" charset="0"/>
+                <a:ea typeface="Malgun Gothic" pitchFamily="34" charset="-122"/>
+                <a:cs typeface="Malgun Gothic" pitchFamily="34" charset="-120"/>
+              </a:rPr>
+              <a:t>의 문제</a:t>
+            </a:r>
+            <a:endParaRPr lang="en-US" sz="1700" dirty="0"/>
+          </a:p>
+        </p:txBody>
+      </p:sp>
+      <p:sp>
+        <p:nvSpPr>
+          <p:cNvPr id="7" name="Shape 5"/>
+          <p:cNvSpPr/>
+          <p:nvPr/>
+        </p:nvSpPr>
+        <p:spPr>
+          <a:xfrm>
+            <a:off x="548640" y="3295650"/>
+            <a:ext cx="11091672" cy="548640"/>
+          </a:xfrm>
+          <a:prstGeom prst="roundRect">
+            <a:avLst>
+              <a:gd name="adj" fmla="val 10000"/>
+            </a:avLst>
+          </a:prstGeom>
+          <a:solidFill>
+            <a:srgbClr val="F2EDE4"/>
+          </a:solidFill>
+          <a:ln/>
+        </p:spPr>
+      </p:sp>
+      <p:sp>
+        <p:nvSpPr>
+          <p:cNvPr id="8" name="Shape 6"/>
+          <p:cNvSpPr/>
+          <p:nvPr/>
+        </p:nvSpPr>
+        <p:spPr>
+          <a:xfrm>
+            <a:off x="548640" y="3295650"/>
+            <a:ext cx="54864" cy="548640"/>
+          </a:xfrm>
+          <a:prstGeom prst="rect">
+            <a:avLst/>
+          </a:prstGeom>
+          <a:solidFill>
+            <a:srgbClr val="C8A15A"/>
+          </a:solidFill>
+          <a:ln/>
+        </p:spPr>
+      </p:sp>
+      <p:sp>
+        <p:nvSpPr>
+          <p:cNvPr id="9" name="Text 7"/>
+          <p:cNvSpPr/>
+          <p:nvPr/>
+        </p:nvSpPr>
+        <p:spPr>
+          <a:xfrm>
+            <a:off x="786384" y="3295650"/>
+            <a:ext cx="10707624" cy="548640"/>
+          </a:xfrm>
+          <a:prstGeom prst="rect">
+            <a:avLst/>
+          </a:prstGeom>
+          <a:noFill/>
+          <a:ln/>
+        </p:spPr>
+        <p:txBody>
+          <a:bodyPr wrap="square" rtlCol="0" anchor="ctr">
+            <a:normAutofit/>
+          </a:bodyPr>
+          <a:lstStyle/>
+          <a:p>
+            <a:pPr indent="0" marL="0">
+              <a:lnSpc>
+                <a:spcPct val="104000"/>
+              </a:lnSpc>
+              <a:buNone/>
+            </a:pPr>
+            <a:r>
+              <a:rPr lang="en-US" sz="1300" dirty="0">
+                <a:solidFill>
+                  <a:srgbClr val="6B6357"/>
+                </a:solidFill>
+                <a:latin typeface="Malgun Gothic" pitchFamily="34" charset="0"/>
+                <a:ea typeface="Malgun Gothic" pitchFamily="34" charset="-122"/>
+                <a:cs typeface="Malgun Gothic" pitchFamily="34" charset="-120"/>
+              </a:rPr>
+              <a:t>이 감각은 오늘 역사를 끝까지 따라가면 </a:t>
+            </a:r>
+            <a:pPr indent="0" marL="0">
+              <a:lnSpc>
+                <a:spcPct val="104000"/>
+              </a:lnSpc>
+              <a:buNone/>
+            </a:pPr>
+            <a:r>
+              <a:rPr lang="en-US" sz="1300" b="1" dirty="0">
+                <a:solidFill>
+                  <a:srgbClr val="2A2723"/>
+                </a:solidFill>
+                <a:latin typeface="Malgun Gothic" pitchFamily="34" charset="0"/>
+                <a:ea typeface="Malgun Gothic" pitchFamily="34" charset="-122"/>
+                <a:cs typeface="Malgun Gothic" pitchFamily="34" charset="-120"/>
+              </a:rPr>
+              <a:t>자연스럽게 손에 잡힙니다.</a:t>
+            </a:r>
+            <a:pPr indent="0" marL="0">
+              <a:lnSpc>
+                <a:spcPct val="104000"/>
+              </a:lnSpc>
+              <a:buNone/>
+            </a:pPr>
+            <a:r>
+              <a:rPr lang="en-US" sz="1300" dirty="0">
+                <a:solidFill>
+                  <a:srgbClr val="6B6357"/>
+                </a:solidFill>
+                <a:latin typeface="Malgun Gothic" pitchFamily="34" charset="0"/>
+                <a:ea typeface="Malgun Gothic" pitchFamily="34" charset="-122"/>
+                <a:cs typeface="Malgun Gothic" pitchFamily="34" charset="-120"/>
+              </a:rPr>
+              <a:t> 지금은 이 곤란을 접어두고 출발.</a:t>
+            </a:r>
+            <a:endParaRPr lang="en-US" sz="1300" dirty="0"/>
           </a:p>
         </p:txBody>
       </p:sp>
@@ -3443,9 +4754,16 @@
 </p:sld>
 </file>
 
-<file path=ppt/slides/slide8.xml><?xml version="1.0" encoding="utf-8"?>
+<file path=ppt/slides/slide5.xml><?xml version="1.0" encoding="utf-8"?>
 <p:sld xmlns:a="http://schemas.openxmlformats.org/drawingml/2006/main" xmlns:r="http://schemas.openxmlformats.org/officeDocument/2006/relationships" xmlns:p="http://schemas.openxmlformats.org/presentationml/2006/main">
-  <p:cSld name="Slide 8">
+  <p:cSld name="Slide 5">
+    <p:bg>
+      <p:bgPr>
+        <a:solidFill>
+          <a:srgbClr val="FAF8F4"/>
+        </a:solidFill>
+      </p:bgPr>
+    </p:bg>
     <p:spTree>
       <p:nvGrpSpPr>
         <p:cNvPr id="1" name=""/>
@@ -3462,14 +4780,36 @@
       </p:grpSpPr>
       <p:sp>
         <p:nvSpPr>
-          <p:cNvPr id="2" name="Text 0"/>
-          <p:cNvSpPr/>
-          <p:nvPr/>
-        </p:nvSpPr>
-        <p:spPr>
-          <a:xfrm>
-            <a:off x="548640" y="365760"/>
-            <a:ext cx="11091672" cy="822960"/>
+          <p:cNvPr id="2" name="Shape 0"/>
+          <p:cNvSpPr/>
+          <p:nvPr/>
+        </p:nvSpPr>
+        <p:spPr>
+          <a:xfrm>
+            <a:off x="5175504" y="1828800"/>
+            <a:ext cx="1828800" cy="1828800"/>
+          </a:xfrm>
+          <a:prstGeom prst="roundRect">
+            <a:avLst>
+              <a:gd name="adj" fmla="val 15000"/>
+            </a:avLst>
+          </a:prstGeom>
+          <a:solidFill>
+            <a:srgbClr val="3F6B5F"/>
+          </a:solidFill>
+          <a:ln/>
+        </p:spPr>
+      </p:sp>
+      <p:sp>
+        <p:nvSpPr>
+          <p:cNvPr id="3" name="Text 1"/>
+          <p:cNvSpPr/>
+          <p:nvPr/>
+        </p:nvSpPr>
+        <p:spPr>
+          <a:xfrm>
+            <a:off x="5175504" y="1828800"/>
+            <a:ext cx="1828800" cy="1828800"/>
           </a:xfrm>
           <a:prstGeom prst="rect">
             <a:avLst/>
@@ -3478,37 +4818,37 @@
           <a:ln/>
         </p:spPr>
         <p:txBody>
-          <a:bodyPr wrap="square" lIns="0" tIns="0" rIns="0" bIns="0" rtlCol="0" anchor="ctr"/>
-          <a:lstStyle/>
-          <a:p>
-            <a:pPr indent="0" marL="0">
-              <a:buNone/>
-            </a:pPr>
-            <a:r>
-              <a:rPr lang="en-US" sz="2600" b="1" dirty="0">
-                <a:solidFill>
-                  <a:srgbClr val="2A2723"/>
-                </a:solidFill>
-                <a:latin typeface="Malgun Gothic" pitchFamily="34" charset="0"/>
-                <a:ea typeface="Malgun Gothic" pitchFamily="34" charset="-122"/>
-                <a:cs typeface="Malgun Gothic" pitchFamily="34" charset="-120"/>
-              </a:rPr>
-              <a:t>📌 이것만은 꼭 — 핵심 4문장</a:t>
-            </a:r>
-            <a:endParaRPr lang="en-US" sz="2600" dirty="0"/>
-          </a:p>
-        </p:txBody>
-      </p:sp>
-      <p:sp>
-        <p:nvSpPr>
-          <p:cNvPr id="3" name="Text 1"/>
-          <p:cNvSpPr/>
-          <p:nvPr/>
-        </p:nvSpPr>
-        <p:spPr>
-          <a:xfrm>
-            <a:off x="548640" y="1325880"/>
-            <a:ext cx="11091672" cy="5074920"/>
+          <a:bodyPr wrap="square" rtlCol="0" anchor="ctr"/>
+          <a:lstStyle/>
+          <a:p>
+            <a:pPr algn="ctr" indent="0" marL="0">
+              <a:buNone/>
+            </a:pPr>
+            <a:r>
+              <a:rPr lang="en-US" sz="5200" b="1" dirty="0">
+                <a:solidFill>
+                  <a:srgbClr val="FFFFFF"/>
+                </a:solidFill>
+                <a:latin typeface="Malgun Gothic" pitchFamily="34" charset="0"/>
+                <a:ea typeface="Malgun Gothic" pitchFamily="34" charset="-122"/>
+                <a:cs typeface="Malgun Gothic" pitchFamily="34" charset="-120"/>
+              </a:rPr>
+              <a:t>1</a:t>
+            </a:r>
+            <a:endParaRPr lang="en-US" sz="5200" dirty="0"/>
+          </a:p>
+        </p:txBody>
+      </p:sp>
+      <p:sp>
+        <p:nvSpPr>
+          <p:cNvPr id="4" name="Text 2"/>
+          <p:cNvSpPr/>
+          <p:nvPr/>
+        </p:nvSpPr>
+        <p:spPr>
+          <a:xfrm>
+            <a:off x="914400" y="3931920"/>
+            <a:ext cx="10332720" cy="868680"/>
           </a:xfrm>
           <a:prstGeom prst="rect">
             <a:avLst/>
@@ -3517,93 +4857,129 @@
           <a:ln/>
         </p:spPr>
         <p:txBody>
-          <a:bodyPr wrap="square" lIns="0" tIns="0" rIns="0" bIns="0" rtlCol="0" anchor="t">
-            <a:normAutofit/>
-          </a:bodyPr>
-          <a:lstStyle/>
-          <a:p>
-            <a:pPr marL="177800" indent="-177800">
-              <a:spcAft>
-                <a:spcPts val="600"/>
-              </a:spcAft>
-              <a:buSzPct val="100000"/>
-              <a:buChar char="•"/>
-            </a:pPr>
-            <a:r>
-              <a:rPr lang="en-US" sz="1400" dirty="0">
-                <a:solidFill>
-                  <a:srgbClr val="2A2723"/>
-                </a:solidFill>
-                <a:latin typeface="Malgun Gothic" pitchFamily="34" charset="0"/>
-                <a:ea typeface="Malgun Gothic" pitchFamily="34" charset="-122"/>
-                <a:cs typeface="Malgun Gothic" pitchFamily="34" charset="-120"/>
-              </a:rPr>
-              <a:t>1. 문서를 더 많이 넣어도 답이 흐려지는 건 AI가 멍청해서가 아님</a:t>
-            </a:r>
-            <a:endParaRPr lang="en-US" sz="1400" dirty="0"/>
-          </a:p>
-          <a:p>
-            <a:pPr marL="177800" indent="-177800">
-              <a:spcAft>
-                <a:spcPts val="600"/>
-              </a:spcAft>
-              <a:buSzPct val="100000"/>
-              <a:buChar char="•"/>
-            </a:pPr>
-            <a:r>
-              <a:rPr lang="en-US" sz="1400" dirty="0">
-                <a:solidFill>
-                  <a:srgbClr val="2A2723"/>
-                </a:solidFill>
-                <a:latin typeface="Malgun Gothic" pitchFamily="34" charset="0"/>
-                <a:ea typeface="Malgun Gothic" pitchFamily="34" charset="-122"/>
-                <a:cs typeface="Malgun Gothic" pitchFamily="34" charset="-120"/>
-              </a:rPr>
-              <a:t>2. 정보는 "얼마나 넣느냐"가 아니라 "어떻게 배치·집중시키느냐"의 문제 (컨텍스트 창 + 주의 배분)</a:t>
-            </a:r>
-            <a:endParaRPr lang="en-US" sz="1400" dirty="0"/>
-          </a:p>
-          <a:p>
-            <a:pPr marL="177800" indent="-177800">
-              <a:spcAft>
-                <a:spcPts val="600"/>
-              </a:spcAft>
-              <a:buSzPct val="100000"/>
-              <a:buChar char="•"/>
-            </a:pPr>
-            <a:r>
-              <a:rPr lang="en-US" sz="1400" dirty="0">
-                <a:solidFill>
-                  <a:srgbClr val="2A2723"/>
-                </a:solidFill>
-                <a:latin typeface="Malgun Gothic" pitchFamily="34" charset="0"/>
-                <a:ea typeface="Malgun Gothic" pitchFamily="34" charset="-122"/>
-                <a:cs typeface="Malgun Gothic" pitchFamily="34" charset="-120"/>
-              </a:rPr>
-              <a:t>3. 트랜스포머는 발명품이 아니라 이미지·언어 두 분야가 같은 열쇠로 합류한 결과</a:t>
-            </a:r>
-            <a:endParaRPr lang="en-US" sz="1400" dirty="0"/>
-          </a:p>
-          <a:p>
-            <a:pPr marL="177800" indent="-177800">
-              <a:spcAft>
-                <a:spcPts val="600"/>
-              </a:spcAft>
-              <a:buSzPct val="100000"/>
-              <a:buChar char="•"/>
-            </a:pPr>
-            <a:r>
-              <a:rPr lang="en-US" sz="1400" dirty="0">
-                <a:solidFill>
-                  <a:srgbClr val="2A2723"/>
-                </a:solidFill>
-                <a:latin typeface="Malgun Gothic" pitchFamily="34" charset="0"/>
-                <a:ea typeface="Malgun Gothic" pitchFamily="34" charset="-122"/>
-                <a:cs typeface="Malgun Gothic" pitchFamily="34" charset="-120"/>
-              </a:rPr>
-              <a:t>4. 이미지의 깊이의 벽과 언어의 순차의 벽은 뿌리가 닮음 — 이미지부터 따라간다</a:t>
-            </a:r>
-            <a:endParaRPr lang="en-US" sz="1400" dirty="0"/>
+          <a:bodyPr wrap="square" rtlCol="0" anchor="ctr"/>
+          <a:lstStyle/>
+          <a:p>
+            <a:pPr algn="ctr" indent="0" marL="0">
+              <a:buNone/>
+            </a:pPr>
+            <a:r>
+              <a:rPr lang="en-US" sz="3000" b="1" dirty="0">
+                <a:solidFill>
+                  <a:srgbClr val="2A2723"/>
+                </a:solidFill>
+                <a:latin typeface="Malgun Gothic" pitchFamily="34" charset="0"/>
+                <a:ea typeface="Malgun Gothic" pitchFamily="34" charset="-122"/>
+                <a:cs typeface="Malgun Gothic" pitchFamily="34" charset="-120"/>
+              </a:rPr>
+              <a:t>두 골목, 같은 벽</a:t>
+            </a:r>
+            <a:endParaRPr lang="en-US" sz="3000" dirty="0"/>
+          </a:p>
+        </p:txBody>
+      </p:sp>
+      <p:sp>
+        <p:nvSpPr>
+          <p:cNvPr id="5" name="Text 3"/>
+          <p:cNvSpPr/>
+          <p:nvPr/>
+        </p:nvSpPr>
+        <p:spPr>
+          <a:xfrm>
+            <a:off x="914400" y="4846320"/>
+            <a:ext cx="10332720" cy="548640"/>
+          </a:xfrm>
+          <a:prstGeom prst="rect">
+            <a:avLst/>
+          </a:prstGeom>
+          <a:noFill/>
+          <a:ln/>
+        </p:spPr>
+        <p:txBody>
+          <a:bodyPr wrap="square" rtlCol="0" anchor="ctr"/>
+          <a:lstStyle/>
+          <a:p>
+            <a:pPr algn="ctr" indent="0" marL="0">
+              <a:buNone/>
+            </a:pPr>
+            <a:r>
+              <a:rPr lang="en-US" sz="1600" dirty="0">
+                <a:solidFill>
+                  <a:srgbClr val="6B6357"/>
+                </a:solidFill>
+                <a:latin typeface="Malgun Gothic" pitchFamily="34" charset="0"/>
+                <a:ea typeface="Malgun Gothic" pitchFamily="34" charset="-122"/>
+                <a:cs typeface="Malgun Gothic" pitchFamily="34" charset="-120"/>
+              </a:rPr>
+              <a:t>트랜스포머는 하늘에서 뚝 떨어진 게 아니다</a:t>
+            </a:r>
+            <a:endParaRPr lang="en-US" sz="1600" dirty="0"/>
+          </a:p>
+        </p:txBody>
+      </p:sp>
+      <p:sp>
+        <p:nvSpPr>
+          <p:cNvPr id="6" name="Shape 4"/>
+          <p:cNvSpPr/>
+          <p:nvPr/>
+        </p:nvSpPr>
+        <p:spPr>
+          <a:xfrm>
+            <a:off x="4594860" y="5486400"/>
+            <a:ext cx="2999232" cy="457200"/>
+          </a:xfrm>
+          <a:prstGeom prst="roundRect">
+            <a:avLst>
+              <a:gd name="adj" fmla="val 50000"/>
+            </a:avLst>
+          </a:prstGeom>
+          <a:solidFill>
+            <a:srgbClr val="F2EDE4"/>
+          </a:solidFill>
+          <a:ln w="12700">
+            <a:solidFill>
+              <a:srgbClr val="E3DACB"/>
+            </a:solidFill>
+            <a:prstDash val="solid"/>
+          </a:ln>
+        </p:spPr>
+      </p:sp>
+      <p:sp>
+        <p:nvSpPr>
+          <p:cNvPr id="7" name="Text 5"/>
+          <p:cNvSpPr/>
+          <p:nvPr/>
+        </p:nvSpPr>
+        <p:spPr>
+          <a:xfrm>
+            <a:off x="4594860" y="5486400"/>
+            <a:ext cx="2999232" cy="457200"/>
+          </a:xfrm>
+          <a:prstGeom prst="rect">
+            <a:avLst/>
+          </a:prstGeom>
+          <a:noFill/>
+          <a:ln/>
+        </p:spPr>
+        <p:txBody>
+          <a:bodyPr wrap="square" rtlCol="0" anchor="ctr"/>
+          <a:lstStyle/>
+          <a:p>
+            <a:pPr algn="ctr" indent="0" marL="0">
+              <a:buNone/>
+            </a:pPr>
+            <a:r>
+              <a:rPr lang="en-US" sz="1300" dirty="0">
+                <a:solidFill>
+                  <a:srgbClr val="6B6357"/>
+                </a:solidFill>
+                <a:latin typeface="Malgun Gothic" pitchFamily="34" charset="0"/>
+                <a:ea typeface="Malgun Gothic" pitchFamily="34" charset="-122"/>
+                <a:cs typeface="Malgun Gothic" pitchFamily="34" charset="-120"/>
+              </a:rPr>
+              <a:t>이미지 · 언어의 합류</a:t>
+            </a:r>
+            <a:endParaRPr lang="en-US" sz="1300" dirty="0"/>
           </a:p>
         </p:txBody>
       </p:sp>
@@ -3615,9 +4991,16 @@
 </p:sld>
 </file>
 
-<file path=ppt/slides/slide9.xml><?xml version="1.0" encoding="utf-8"?>
+<file path=ppt/slides/slide6.xml><?xml version="1.0" encoding="utf-8"?>
 <p:sld xmlns:a="http://schemas.openxmlformats.org/drawingml/2006/main" xmlns:r="http://schemas.openxmlformats.org/officeDocument/2006/relationships" xmlns:p="http://schemas.openxmlformats.org/presentationml/2006/main">
-  <p:cSld name="Slide 9">
+  <p:cSld name="Slide 6">
+    <p:bg>
+      <p:bgPr>
+        <a:solidFill>
+          <a:srgbClr val="FAF8F4"/>
+        </a:solidFill>
+      </p:bgPr>
+    </p:bg>
     <p:spTree>
       <p:nvGrpSpPr>
         <p:cNvPr id="1" name=""/>
@@ -3640,8 +5023,8 @@
         </p:nvSpPr>
         <p:spPr>
           <a:xfrm>
-            <a:off x="548640" y="365760"/>
-            <a:ext cx="11091672" cy="822960"/>
+            <a:off x="548640" y="384048"/>
+            <a:ext cx="11091672" cy="731520"/>
           </a:xfrm>
           <a:prstGeom prst="rect">
             <a:avLst/>
@@ -3650,132 +5033,2539 @@
           <a:ln/>
         </p:spPr>
         <p:txBody>
-          <a:bodyPr wrap="square" lIns="0" tIns="0" rIns="0" bIns="0" rtlCol="0" anchor="ctr"/>
-          <a:lstStyle/>
-          <a:p>
-            <a:pPr indent="0" marL="0">
-              <a:buNone/>
-            </a:pPr>
-            <a:r>
-              <a:rPr lang="en-US" sz="2600" b="1" dirty="0">
-                <a:solidFill>
-                  <a:srgbClr val="2A2723"/>
-                </a:solidFill>
-                <a:latin typeface="Malgun Gothic" pitchFamily="34" charset="0"/>
-                <a:ea typeface="Malgun Gothic" pitchFamily="34" charset="-122"/>
-                <a:cs typeface="Malgun Gothic" pitchFamily="34" charset="-120"/>
-              </a:rPr>
-              <a:t>🎯 이해도 확인 질문</a:t>
-            </a:r>
-            <a:endParaRPr lang="en-US" sz="2600" dirty="0"/>
-          </a:p>
-        </p:txBody>
-      </p:sp>
-      <p:sp>
-        <p:nvSpPr>
-          <p:cNvPr id="3" name="Text 1"/>
-          <p:cNvSpPr/>
-          <p:nvPr/>
-        </p:nvSpPr>
-        <p:spPr>
-          <a:xfrm>
-            <a:off x="548640" y="1325880"/>
-            <a:ext cx="11091672" cy="5074920"/>
-          </a:xfrm>
-          <a:prstGeom prst="rect">
-            <a:avLst/>
-          </a:prstGeom>
-          <a:noFill/>
-          <a:ln/>
-        </p:spPr>
-        <p:txBody>
-          <a:bodyPr wrap="square" lIns="0" tIns="0" rIns="0" bIns="0" rtlCol="0" anchor="t">
+          <a:bodyPr wrap="square" rtlCol="0" anchor="ctr">
             <a:normAutofit/>
           </a:bodyPr>
           <a:lstStyle/>
           <a:p>
-            <a:pPr marL="177800" indent="-177800">
-              <a:spcAft>
-                <a:spcPts val="600"/>
-              </a:spcAft>
-              <a:buSzPct val="100000"/>
-              <a:buChar char="•"/>
-            </a:pPr>
-            <a:r>
-              <a:rPr lang="en-US" sz="1400" dirty="0">
-                <a:solidFill>
-                  <a:srgbClr val="2A2723"/>
-                </a:solidFill>
-                <a:latin typeface="Malgun Gothic" pitchFamily="34" charset="0"/>
-                <a:ea typeface="Malgun Gothic" pitchFamily="34" charset="-122"/>
-                <a:cs typeface="Malgun Gothic" pitchFamily="34" charset="-120"/>
-              </a:rPr>
-              <a:t>Q1. 80쪽 문서를 통째로 넣어도 요약이 흐릿한 건 "AI가 멍청해서"인가? 진짜 원인은?</a:t>
-            </a:r>
-            <a:endParaRPr lang="en-US" sz="1400" dirty="0"/>
-          </a:p>
-          <a:p>
-            <a:pPr marL="177800" indent="-177800">
-              <a:spcAft>
-                <a:spcPts val="600"/>
-              </a:spcAft>
-              <a:buSzPct val="100000"/>
-              <a:buChar char="•"/>
-            </a:pPr>
-            <a:r>
-              <a:rPr lang="en-US" sz="1400" dirty="0">
-                <a:solidFill>
-                  <a:srgbClr val="2A2723"/>
-                </a:solidFill>
-                <a:latin typeface="Malgun Gothic" pitchFamily="34" charset="0"/>
-                <a:ea typeface="Malgun Gothic" pitchFamily="34" charset="-122"/>
-                <a:cs typeface="Malgun Gothic" pitchFamily="34" charset="-120"/>
-              </a:rPr>
-              <a:t>Q2. 정보는 "얼마나 넣느냐"의 문제인가, 아니면 무엇의 문제인가?</a:t>
-            </a:r>
-            <a:endParaRPr lang="en-US" sz="1400" dirty="0"/>
-          </a:p>
-          <a:p>
-            <a:pPr marL="177800" indent="-177800">
-              <a:spcAft>
-                <a:spcPts val="600"/>
-              </a:spcAft>
-              <a:buSzPct val="100000"/>
-              <a:buChar char="•"/>
-            </a:pPr>
-            <a:r>
-              <a:rPr lang="en-US" sz="1400" dirty="0">
-                <a:solidFill>
-                  <a:srgbClr val="2A2723"/>
-                </a:solidFill>
-                <a:latin typeface="Malgun Gothic" pitchFamily="34" charset="0"/>
-                <a:ea typeface="Malgun Gothic" pitchFamily="34" charset="-122"/>
-                <a:cs typeface="Malgun Gothic" pitchFamily="34" charset="-120"/>
-              </a:rPr>
-              <a:t>Q3. 트랜스포머는 어떻게 등장했나? (두 분야 · 같은 열쇠 · 합류)</a:t>
-            </a:r>
-            <a:endParaRPr lang="en-US" sz="1400" dirty="0"/>
-          </a:p>
-          <a:p>
-            <a:pPr marL="177800" indent="-177800">
-              <a:spcAft>
-                <a:spcPts val="600"/>
-              </a:spcAft>
-              <a:buSzPct val="100000"/>
-              <a:buChar char="•"/>
-            </a:pPr>
-            <a:r>
-              <a:rPr lang="en-US" sz="1400" dirty="0">
-                <a:solidFill>
-                  <a:srgbClr val="2A2723"/>
-                </a:solidFill>
-                <a:latin typeface="Malgun Gothic" pitchFamily="34" charset="0"/>
-                <a:ea typeface="Malgun Gothic" pitchFamily="34" charset="-122"/>
-                <a:cs typeface="Malgun Gothic" pitchFamily="34" charset="-120"/>
-              </a:rPr>
-              <a:t>Q4. 이미지의 벽과 언어의 벽은 각각 무엇이며, 둘의 관계는?</a:t>
-            </a:r>
-            <a:endParaRPr lang="en-US" sz="1400" dirty="0"/>
+            <a:pPr indent="0" marL="0">
+              <a:buNone/>
+            </a:pPr>
+            <a:r>
+              <a:rPr lang="en-US" sz="2400" b="1" dirty="0">
+                <a:solidFill>
+                  <a:srgbClr val="2A2723"/>
+                </a:solidFill>
+                <a:latin typeface="Malgun Gothic" pitchFamily="34" charset="0"/>
+                <a:ea typeface="Malgun Gothic" pitchFamily="34" charset="-122"/>
+                <a:cs typeface="Malgun Gothic" pitchFamily="34" charset="-120"/>
+              </a:rPr>
+              <a:t>🧱 각자의 </a:t>
+            </a:r>
+            <a:pPr indent="0" marL="0">
+              <a:buNone/>
+            </a:pPr>
+            <a:r>
+              <a:rPr lang="en-US" sz="2400" b="1" dirty="0">
+                <a:solidFill>
+                  <a:srgbClr val="3F6B5F"/>
+                </a:solidFill>
+                <a:latin typeface="Malgun Gothic" pitchFamily="34" charset="0"/>
+                <a:ea typeface="Malgun Gothic" pitchFamily="34" charset="-122"/>
+                <a:cs typeface="Malgun Gothic" pitchFamily="34" charset="-120"/>
+              </a:rPr>
+              <a:t>막다른 벽</a:t>
+            </a:r>
+            <a:endParaRPr lang="en-US" sz="2400" dirty="0"/>
+          </a:p>
+        </p:txBody>
+      </p:sp>
+      <p:sp>
+        <p:nvSpPr>
+          <p:cNvPr id="3" name="Shape 1"/>
+          <p:cNvSpPr/>
+          <p:nvPr/>
+        </p:nvSpPr>
+        <p:spPr>
+          <a:xfrm>
+            <a:off x="566928" y="1133856"/>
+            <a:ext cx="777240" cy="41148"/>
+          </a:xfrm>
+          <a:prstGeom prst="rect">
+            <a:avLst/>
+          </a:prstGeom>
+          <a:solidFill>
+            <a:srgbClr val="3F6B5F"/>
+          </a:solidFill>
+          <a:ln/>
+        </p:spPr>
+      </p:sp>
+      <p:sp>
+        <p:nvSpPr>
+          <p:cNvPr id="4" name="Shape 2"/>
+          <p:cNvSpPr/>
+          <p:nvPr/>
+        </p:nvSpPr>
+        <p:spPr>
+          <a:xfrm>
+            <a:off x="548640" y="1371600"/>
+            <a:ext cx="5362956" cy="1325880"/>
+          </a:xfrm>
+          <a:prstGeom prst="roundRect">
+            <a:avLst>
+              <a:gd name="adj" fmla="val 6207"/>
+            </a:avLst>
+          </a:prstGeom>
+          <a:solidFill>
+            <a:srgbClr val="FFFFFF"/>
+          </a:solidFill>
+          <a:ln w="12700">
+            <a:solidFill>
+              <a:srgbClr val="E3DACB"/>
+            </a:solidFill>
+            <a:prstDash val="solid"/>
+          </a:ln>
+        </p:spPr>
+      </p:sp>
+      <p:sp>
+        <p:nvSpPr>
+          <p:cNvPr id="5" name="Text 3"/>
+          <p:cNvSpPr/>
+          <p:nvPr/>
+        </p:nvSpPr>
+        <p:spPr>
+          <a:xfrm>
+            <a:off x="749808" y="1517904"/>
+            <a:ext cx="4960620" cy="274320"/>
+          </a:xfrm>
+          <a:prstGeom prst="rect">
+            <a:avLst/>
+          </a:prstGeom>
+          <a:noFill/>
+          <a:ln/>
+        </p:spPr>
+        <p:txBody>
+          <a:bodyPr wrap="square" rtlCol="0" anchor="ctr"/>
+          <a:lstStyle/>
+          <a:p>
+            <a:pPr indent="0" marL="0">
+              <a:buNone/>
+            </a:pPr>
+            <a:r>
+              <a:rPr lang="en-US" sz="1350" b="1" dirty="0">
+                <a:solidFill>
+                  <a:srgbClr val="2A2723"/>
+                </a:solidFill>
+                <a:latin typeface="Malgun Gothic" pitchFamily="34" charset="0"/>
+                <a:ea typeface="Malgun Gothic" pitchFamily="34" charset="-122"/>
+                <a:cs typeface="Malgun Gothic" pitchFamily="34" charset="-120"/>
+              </a:rPr>
+              <a:t>🖼️ 이미지</a:t>
+            </a:r>
+            <a:endParaRPr lang="en-US" sz="1350" dirty="0"/>
+          </a:p>
+        </p:txBody>
+      </p:sp>
+      <p:sp>
+        <p:nvSpPr>
+          <p:cNvPr id="6" name="Text 4"/>
+          <p:cNvSpPr/>
+          <p:nvPr/>
+        </p:nvSpPr>
+        <p:spPr>
+          <a:xfrm>
+            <a:off x="749808" y="1847088"/>
+            <a:ext cx="4960620" cy="476250"/>
+          </a:xfrm>
+          <a:prstGeom prst="rect">
+            <a:avLst/>
+          </a:prstGeom>
+          <a:noFill/>
+          <a:ln/>
+        </p:spPr>
+        <p:txBody>
+          <a:bodyPr wrap="square" rtlCol="0" anchor="t">
+            <a:normAutofit/>
+          </a:bodyPr>
+          <a:lstStyle/>
+          <a:p>
+            <a:pPr indent="0" marL="0">
+              <a:lnSpc>
+                <a:spcPct val="103000"/>
+              </a:lnSpc>
+              <a:buNone/>
+            </a:pPr>
+            <a:r>
+              <a:rPr lang="en-US" sz="1250" dirty="0">
+                <a:solidFill>
+                  <a:srgbClr val="6B6357"/>
+                </a:solidFill>
+                <a:latin typeface="Malgun Gothic" pitchFamily="34" charset="0"/>
+                <a:ea typeface="Malgun Gothic" pitchFamily="34" charset="-122"/>
+                <a:cs typeface="Malgun Gothic" pitchFamily="34" charset="-120"/>
+              </a:rPr>
+              <a:t>사진 속 </a:t>
+            </a:r>
+            <a:pPr indent="0" marL="0">
+              <a:lnSpc>
+                <a:spcPct val="103000"/>
+              </a:lnSpc>
+              <a:buNone/>
+            </a:pPr>
+            <a:r>
+              <a:rPr lang="en-US" sz="1250" b="1" dirty="0">
+                <a:solidFill>
+                  <a:srgbClr val="2A2723"/>
+                </a:solidFill>
+                <a:latin typeface="Malgun Gothic" pitchFamily="34" charset="0"/>
+                <a:ea typeface="Malgun Gothic" pitchFamily="34" charset="-122"/>
+                <a:cs typeface="Malgun Gothic" pitchFamily="34" charset="-120"/>
+              </a:rPr>
+              <a:t>고양이를 알아보게</a:t>
+            </a:r>
+            <a:pPr indent="0" marL="0">
+              <a:lnSpc>
+                <a:spcPct val="103000"/>
+              </a:lnSpc>
+              <a:buNone/>
+            </a:pPr>
+            <a:r>
+              <a:rPr lang="en-US" sz="1250" dirty="0">
+                <a:solidFill>
+                  <a:srgbClr val="6B6357"/>
+                </a:solidFill>
+                <a:latin typeface="Malgun Gothic" pitchFamily="34" charset="0"/>
+                <a:ea typeface="Malgun Gothic" pitchFamily="34" charset="-122"/>
+                <a:cs typeface="Malgun Gothic" pitchFamily="34" charset="-120"/>
+              </a:rPr>
+              <a:t> 만들려던 사람들 — "어떻게 하면 신경망을 </a:t>
+            </a:r>
+            <a:pPr indent="0" marL="0">
+              <a:lnSpc>
+                <a:spcPct val="103000"/>
+              </a:lnSpc>
+              <a:buNone/>
+            </a:pPr>
+            <a:r>
+              <a:rPr lang="en-US" sz="1250" b="1" dirty="0">
+                <a:solidFill>
+                  <a:srgbClr val="2A2723"/>
+                </a:solidFill>
+                <a:latin typeface="Malgun Gothic" pitchFamily="34" charset="0"/>
+                <a:ea typeface="Malgun Gothic" pitchFamily="34" charset="-122"/>
+                <a:cs typeface="Malgun Gothic" pitchFamily="34" charset="-120"/>
+              </a:rPr>
+              <a:t>더 깊게 쌓을</a:t>
+            </a:r>
+            <a:pPr indent="0" marL="0">
+              <a:lnSpc>
+                <a:spcPct val="103000"/>
+              </a:lnSpc>
+              <a:buNone/>
+            </a:pPr>
+            <a:r>
+              <a:rPr lang="en-US" sz="1250" dirty="0">
+                <a:solidFill>
+                  <a:srgbClr val="6B6357"/>
+                </a:solidFill>
+                <a:latin typeface="Malgun Gothic" pitchFamily="34" charset="0"/>
+                <a:ea typeface="Malgun Gothic" pitchFamily="34" charset="-122"/>
+                <a:cs typeface="Malgun Gothic" pitchFamily="34" charset="-120"/>
+              </a:rPr>
+              <a:t> 수 있을까"라는 벽 앞에서 오래 멈춰 섰습니다</a:t>
+            </a:r>
+            <a:endParaRPr lang="en-US" sz="1250" dirty="0"/>
+          </a:p>
+        </p:txBody>
+      </p:sp>
+      <p:sp>
+        <p:nvSpPr>
+          <p:cNvPr id="7" name="Text 5"/>
+          <p:cNvSpPr/>
+          <p:nvPr/>
+        </p:nvSpPr>
+        <p:spPr>
+          <a:xfrm>
+            <a:off x="749808" y="2323338"/>
+            <a:ext cx="4960620" cy="274320"/>
+          </a:xfrm>
+          <a:prstGeom prst="rect">
+            <a:avLst/>
+          </a:prstGeom>
+          <a:noFill/>
+          <a:ln/>
+        </p:spPr>
+        <p:txBody>
+          <a:bodyPr wrap="square" rtlCol="0" anchor="t">
+            <a:normAutofit/>
+          </a:bodyPr>
+          <a:lstStyle/>
+          <a:p>
+            <a:pPr indent="0" marL="0">
+              <a:lnSpc>
+                <a:spcPct val="103000"/>
+              </a:lnSpc>
+              <a:buNone/>
+            </a:pPr>
+            <a:r>
+              <a:rPr lang="en-US" sz="1250" b="1" dirty="0">
+                <a:solidFill>
+                  <a:srgbClr val="3A5A8C"/>
+                </a:solidFill>
+                <a:latin typeface="Malgun Gothic" pitchFamily="34" charset="0"/>
+                <a:ea typeface="Malgun Gothic" pitchFamily="34" charset="-122"/>
+                <a:cs typeface="Malgun Gothic" pitchFamily="34" charset="-120"/>
+              </a:rPr>
+              <a:t>= 깊이의 벽</a:t>
+            </a:r>
+            <a:endParaRPr lang="en-US" sz="1250" dirty="0"/>
+          </a:p>
+        </p:txBody>
+      </p:sp>
+      <p:sp>
+        <p:nvSpPr>
+          <p:cNvPr id="8" name="Shape 6"/>
+          <p:cNvSpPr/>
+          <p:nvPr/>
+        </p:nvSpPr>
+        <p:spPr>
+          <a:xfrm>
+            <a:off x="6277356" y="1371600"/>
+            <a:ext cx="5362956" cy="1325880"/>
+          </a:xfrm>
+          <a:prstGeom prst="roundRect">
+            <a:avLst>
+              <a:gd name="adj" fmla="val 6207"/>
+            </a:avLst>
+          </a:prstGeom>
+          <a:solidFill>
+            <a:srgbClr val="FFFFFF"/>
+          </a:solidFill>
+          <a:ln w="12700">
+            <a:solidFill>
+              <a:srgbClr val="E3DACB"/>
+            </a:solidFill>
+            <a:prstDash val="solid"/>
+          </a:ln>
+        </p:spPr>
+      </p:sp>
+      <p:sp>
+        <p:nvSpPr>
+          <p:cNvPr id="9" name="Text 7"/>
+          <p:cNvSpPr/>
+          <p:nvPr/>
+        </p:nvSpPr>
+        <p:spPr>
+          <a:xfrm>
+            <a:off x="6478524" y="1517904"/>
+            <a:ext cx="4960620" cy="274320"/>
+          </a:xfrm>
+          <a:prstGeom prst="rect">
+            <a:avLst/>
+          </a:prstGeom>
+          <a:noFill/>
+          <a:ln/>
+        </p:spPr>
+        <p:txBody>
+          <a:bodyPr wrap="square" rtlCol="0" anchor="ctr"/>
+          <a:lstStyle/>
+          <a:p>
+            <a:pPr indent="0" marL="0">
+              <a:buNone/>
+            </a:pPr>
+            <a:r>
+              <a:rPr lang="en-US" sz="1350" b="1" dirty="0">
+                <a:solidFill>
+                  <a:srgbClr val="2A2723"/>
+                </a:solidFill>
+                <a:latin typeface="Malgun Gothic" pitchFamily="34" charset="0"/>
+                <a:ea typeface="Malgun Gothic" pitchFamily="34" charset="-122"/>
+                <a:cs typeface="Malgun Gothic" pitchFamily="34" charset="-120"/>
+              </a:rPr>
+              <a:t>💬 언어</a:t>
+            </a:r>
+            <a:endParaRPr lang="en-US" sz="1350" dirty="0"/>
+          </a:p>
+        </p:txBody>
+      </p:sp>
+      <p:sp>
+        <p:nvSpPr>
+          <p:cNvPr id="10" name="Text 8"/>
+          <p:cNvSpPr/>
+          <p:nvPr/>
+        </p:nvSpPr>
+        <p:spPr>
+          <a:xfrm>
+            <a:off x="6478524" y="1847088"/>
+            <a:ext cx="4960620" cy="476250"/>
+          </a:xfrm>
+          <a:prstGeom prst="rect">
+            <a:avLst/>
+          </a:prstGeom>
+          <a:noFill/>
+          <a:ln/>
+        </p:spPr>
+        <p:txBody>
+          <a:bodyPr wrap="square" rtlCol="0" anchor="t">
+            <a:normAutofit/>
+          </a:bodyPr>
+          <a:lstStyle/>
+          <a:p>
+            <a:pPr indent="0" marL="0">
+              <a:lnSpc>
+                <a:spcPct val="103000"/>
+              </a:lnSpc>
+              <a:buNone/>
+            </a:pPr>
+            <a:r>
+              <a:rPr lang="en-US" sz="1250" dirty="0">
+                <a:solidFill>
+                  <a:srgbClr val="6B6357"/>
+                </a:solidFill>
+                <a:latin typeface="Malgun Gothic" pitchFamily="34" charset="0"/>
+                <a:ea typeface="Malgun Gothic" pitchFamily="34" charset="-122"/>
+                <a:cs typeface="Malgun Gothic" pitchFamily="34" charset="-120"/>
+              </a:rPr>
+              <a:t>문장을 </a:t>
+            </a:r>
+            <a:pPr indent="0" marL="0">
+              <a:lnSpc>
+                <a:spcPct val="103000"/>
+              </a:lnSpc>
+              <a:buNone/>
+            </a:pPr>
+            <a:r>
+              <a:rPr lang="en-US" sz="1250" b="1" dirty="0">
+                <a:solidFill>
+                  <a:srgbClr val="2A2723"/>
+                </a:solidFill>
+                <a:latin typeface="Malgun Gothic" pitchFamily="34" charset="0"/>
+                <a:ea typeface="Malgun Gothic" pitchFamily="34" charset="-122"/>
+                <a:cs typeface="Malgun Gothic" pitchFamily="34" charset="-120"/>
+              </a:rPr>
+              <a:t>이해시키려던</a:t>
+            </a:r>
+            <a:pPr indent="0" marL="0">
+              <a:lnSpc>
+                <a:spcPct val="103000"/>
+              </a:lnSpc>
+              <a:buNone/>
+            </a:pPr>
+            <a:r>
+              <a:rPr lang="en-US" sz="1250" dirty="0">
+                <a:solidFill>
+                  <a:srgbClr val="6B6357"/>
+                </a:solidFill>
+                <a:latin typeface="Malgun Gothic" pitchFamily="34" charset="0"/>
+                <a:ea typeface="Malgun Gothic" pitchFamily="34" charset="-122"/>
+                <a:cs typeface="Malgun Gothic" pitchFamily="34" charset="-120"/>
+              </a:rPr>
+              <a:t> 사람들 — "어떻게 하면 </a:t>
+            </a:r>
+            <a:pPr indent="0" marL="0">
+              <a:lnSpc>
+                <a:spcPct val="103000"/>
+              </a:lnSpc>
+              <a:buNone/>
+            </a:pPr>
+            <a:r>
+              <a:rPr lang="en-US" sz="1250" b="1" dirty="0">
+                <a:solidFill>
+                  <a:srgbClr val="2A2723"/>
+                </a:solidFill>
+                <a:latin typeface="Malgun Gothic" pitchFamily="34" charset="0"/>
+                <a:ea typeface="Malgun Gothic" pitchFamily="34" charset="-122"/>
+                <a:cs typeface="Malgun Gothic" pitchFamily="34" charset="-120"/>
+              </a:rPr>
+              <a:t>앞 단어를 잊지 않고</a:t>
+            </a:r>
+            <a:pPr indent="0" marL="0">
+              <a:lnSpc>
+                <a:spcPct val="103000"/>
+              </a:lnSpc>
+              <a:buNone/>
+            </a:pPr>
+            <a:r>
+              <a:rPr lang="en-US" sz="1250" dirty="0">
+                <a:solidFill>
+                  <a:srgbClr val="6B6357"/>
+                </a:solidFill>
+                <a:latin typeface="Malgun Gothic" pitchFamily="34" charset="0"/>
+                <a:ea typeface="Malgun Gothic" pitchFamily="34" charset="-122"/>
+                <a:cs typeface="Malgun Gothic" pitchFamily="34" charset="-120"/>
+              </a:rPr>
+              <a:t> 긴 문장을 처리할까"라는 벽 앞에서 멈춰 섰습니다</a:t>
+            </a:r>
+            <a:endParaRPr lang="en-US" sz="1250" dirty="0"/>
+          </a:p>
+        </p:txBody>
+      </p:sp>
+      <p:sp>
+        <p:nvSpPr>
+          <p:cNvPr id="11" name="Text 9"/>
+          <p:cNvSpPr/>
+          <p:nvPr/>
+        </p:nvSpPr>
+        <p:spPr>
+          <a:xfrm>
+            <a:off x="6478524" y="2323338"/>
+            <a:ext cx="4960620" cy="274320"/>
+          </a:xfrm>
+          <a:prstGeom prst="rect">
+            <a:avLst/>
+          </a:prstGeom>
+          <a:noFill/>
+          <a:ln/>
+        </p:spPr>
+        <p:txBody>
+          <a:bodyPr wrap="square" rtlCol="0" anchor="t">
+            <a:normAutofit/>
+          </a:bodyPr>
+          <a:lstStyle/>
+          <a:p>
+            <a:pPr indent="0" marL="0">
+              <a:lnSpc>
+                <a:spcPct val="103000"/>
+              </a:lnSpc>
+              <a:buNone/>
+            </a:pPr>
+            <a:r>
+              <a:rPr lang="en-US" sz="1250" b="1" dirty="0">
+                <a:solidFill>
+                  <a:srgbClr val="A65A3F"/>
+                </a:solidFill>
+                <a:latin typeface="Malgun Gothic" pitchFamily="34" charset="0"/>
+                <a:ea typeface="Malgun Gothic" pitchFamily="34" charset="-122"/>
+                <a:cs typeface="Malgun Gothic" pitchFamily="34" charset="-120"/>
+              </a:rPr>
+              <a:t>= 순차의 벽</a:t>
+            </a:r>
+            <a:endParaRPr lang="en-US" sz="1250" dirty="0"/>
+          </a:p>
+        </p:txBody>
+      </p:sp>
+      <p:sp>
+        <p:nvSpPr>
+          <p:cNvPr id="12" name="Shape 10"/>
+          <p:cNvSpPr/>
+          <p:nvPr/>
+        </p:nvSpPr>
+        <p:spPr>
+          <a:xfrm>
+            <a:off x="548640" y="2843784"/>
+            <a:ext cx="11091672" cy="548640"/>
+          </a:xfrm>
+          <a:prstGeom prst="roundRect">
+            <a:avLst>
+              <a:gd name="adj" fmla="val 10000"/>
+            </a:avLst>
+          </a:prstGeom>
+          <a:solidFill>
+            <a:srgbClr val="F2EDE4"/>
+          </a:solidFill>
+          <a:ln/>
+        </p:spPr>
+      </p:sp>
+      <p:sp>
+        <p:nvSpPr>
+          <p:cNvPr id="13" name="Shape 11"/>
+          <p:cNvSpPr/>
+          <p:nvPr/>
+        </p:nvSpPr>
+        <p:spPr>
+          <a:xfrm>
+            <a:off x="548640" y="2843784"/>
+            <a:ext cx="54864" cy="548640"/>
+          </a:xfrm>
+          <a:prstGeom prst="rect">
+            <a:avLst/>
+          </a:prstGeom>
+          <a:solidFill>
+            <a:srgbClr val="C8A15A"/>
+          </a:solidFill>
+          <a:ln/>
+        </p:spPr>
+      </p:sp>
+      <p:sp>
+        <p:nvSpPr>
+          <p:cNvPr id="14" name="Text 12"/>
+          <p:cNvSpPr/>
+          <p:nvPr/>
+        </p:nvSpPr>
+        <p:spPr>
+          <a:xfrm>
+            <a:off x="786384" y="2843784"/>
+            <a:ext cx="10707624" cy="548640"/>
+          </a:xfrm>
+          <a:prstGeom prst="rect">
+            <a:avLst/>
+          </a:prstGeom>
+          <a:noFill/>
+          <a:ln/>
+        </p:spPr>
+        <p:txBody>
+          <a:bodyPr wrap="square" rtlCol="0" anchor="ctr">
+            <a:normAutofit/>
+          </a:bodyPr>
+          <a:lstStyle/>
+          <a:p>
+            <a:pPr indent="0" marL="0">
+              <a:lnSpc>
+                <a:spcPct val="104000"/>
+              </a:lnSpc>
+              <a:buNone/>
+            </a:pPr>
+            <a:r>
+              <a:rPr lang="en-US" sz="1300" dirty="0">
+                <a:solidFill>
+                  <a:srgbClr val="6B6357"/>
+                </a:solidFill>
+                <a:latin typeface="Malgun Gothic" pitchFamily="34" charset="0"/>
+                <a:ea typeface="Malgun Gothic" pitchFamily="34" charset="-122"/>
+                <a:cs typeface="Malgun Gothic" pitchFamily="34" charset="-120"/>
+              </a:rPr>
+              <a:t>🔑 두 벽은 얼핏 전혀 다르지만 </a:t>
+            </a:r>
+            <a:pPr indent="0" marL="0">
+              <a:lnSpc>
+                <a:spcPct val="104000"/>
+              </a:lnSpc>
+              <a:buNone/>
+            </a:pPr>
+            <a:r>
+              <a:rPr lang="en-US" sz="1300" b="1" dirty="0">
+                <a:solidFill>
+                  <a:srgbClr val="2A2723"/>
+                </a:solidFill>
+                <a:latin typeface="Malgun Gothic" pitchFamily="34" charset="0"/>
+                <a:ea typeface="Malgun Gothic" pitchFamily="34" charset="-122"/>
+                <a:cs typeface="Malgun Gothic" pitchFamily="34" charset="-120"/>
+              </a:rPr>
+              <a:t>뿌리가 닮았습니다.</a:t>
+            </a:r>
+            <a:pPr indent="0" marL="0">
+              <a:lnSpc>
+                <a:spcPct val="104000"/>
+              </a:lnSpc>
+              <a:buNone/>
+            </a:pPr>
+            <a:r>
+              <a:rPr lang="en-US" sz="1300" dirty="0">
+                <a:solidFill>
+                  <a:srgbClr val="6B6357"/>
+                </a:solidFill>
+                <a:latin typeface="Malgun Gothic" pitchFamily="34" charset="0"/>
+                <a:ea typeface="Malgun Gothic" pitchFamily="34" charset="-122"/>
+                <a:cs typeface="Malgun Gothic" pitchFamily="34" charset="-120"/>
+              </a:rPr>
+              <a:t> 그래서 같은 열쇠 하나가 두 벽을 동시에 뚫습니다.</a:t>
+            </a:r>
+            <a:endParaRPr lang="en-US" sz="1300" dirty="0"/>
+          </a:p>
+        </p:txBody>
+      </p:sp>
+    </p:spTree>
+  </p:cSld>
+  <p:clrMapOvr>
+    <a:masterClrMapping/>
+  </p:clrMapOvr>
+</p:sld>
+</file>
+
+<file path=ppt/slides/slide7.xml><?xml version="1.0" encoding="utf-8"?>
+<p:sld xmlns:a="http://schemas.openxmlformats.org/drawingml/2006/main" xmlns:r="http://schemas.openxmlformats.org/officeDocument/2006/relationships" xmlns:p="http://schemas.openxmlformats.org/presentationml/2006/main">
+  <p:cSld name="Slide 7">
+    <p:bg>
+      <p:bgPr>
+        <a:solidFill>
+          <a:srgbClr val="FAF8F4"/>
+        </a:solidFill>
+      </p:bgPr>
+    </p:bg>
+    <p:spTree>
+      <p:nvGrpSpPr>
+        <p:cNvPr id="1" name=""/>
+        <p:cNvGrpSpPr/>
+        <p:nvPr/>
+      </p:nvGrpSpPr>
+      <p:grpSpPr>
+        <a:xfrm>
+          <a:off x="0" y="0"/>
+          <a:ext cx="0" cy="0"/>
+          <a:chOff x="0" y="0"/>
+          <a:chExt cx="0" cy="0"/>
+        </a:xfrm>
+      </p:grpSpPr>
+      <p:sp>
+        <p:nvSpPr>
+          <p:cNvPr id="2" name="Text 0"/>
+          <p:cNvSpPr/>
+          <p:nvPr/>
+        </p:nvSpPr>
+        <p:spPr>
+          <a:xfrm>
+            <a:off x="548640" y="384048"/>
+            <a:ext cx="11091672" cy="731520"/>
+          </a:xfrm>
+          <a:prstGeom prst="rect">
+            <a:avLst/>
+          </a:prstGeom>
+          <a:noFill/>
+          <a:ln/>
+        </p:spPr>
+        <p:txBody>
+          <a:bodyPr wrap="square" rtlCol="0" anchor="ctr">
+            <a:normAutofit/>
+          </a:bodyPr>
+          <a:lstStyle/>
+          <a:p>
+            <a:pPr indent="0" marL="0">
+              <a:buNone/>
+            </a:pPr>
+            <a:r>
+              <a:rPr lang="en-US" sz="2400" b="1" dirty="0">
+                <a:solidFill>
+                  <a:srgbClr val="2A2723"/>
+                </a:solidFill>
+                <a:latin typeface="Malgun Gothic" pitchFamily="34" charset="0"/>
+                <a:ea typeface="Malgun Gothic" pitchFamily="34" charset="-122"/>
+                <a:cs typeface="Malgun Gothic" pitchFamily="34" charset="-120"/>
+              </a:rPr>
+              <a:t>🚶 먼저 </a:t>
+            </a:r>
+            <a:pPr indent="0" marL="0">
+              <a:buNone/>
+            </a:pPr>
+            <a:r>
+              <a:rPr lang="en-US" sz="2400" b="1" dirty="0">
+                <a:solidFill>
+                  <a:srgbClr val="3F6B5F"/>
+                </a:solidFill>
+                <a:latin typeface="Malgun Gothic" pitchFamily="34" charset="0"/>
+                <a:ea typeface="Malgun Gothic" pitchFamily="34" charset="-122"/>
+                <a:cs typeface="Malgun Gothic" pitchFamily="34" charset="-120"/>
+              </a:rPr>
+              <a:t>이미지가 연 길</a:t>
+            </a:r>
+            <a:pPr indent="0" marL="0">
+              <a:buNone/>
+            </a:pPr>
+            <a:r>
+              <a:rPr lang="en-US" sz="2400" b="1" dirty="0">
+                <a:solidFill>
+                  <a:srgbClr val="2A2723"/>
+                </a:solidFill>
+                <a:latin typeface="Malgun Gothic" pitchFamily="34" charset="0"/>
+                <a:ea typeface="Malgun Gothic" pitchFamily="34" charset="-122"/>
+                <a:cs typeface="Malgun Gothic" pitchFamily="34" charset="-120"/>
+              </a:rPr>
+              <a:t>부터</a:t>
+            </a:r>
+            <a:endParaRPr lang="en-US" sz="2400" dirty="0"/>
+          </a:p>
+        </p:txBody>
+      </p:sp>
+      <p:sp>
+        <p:nvSpPr>
+          <p:cNvPr id="3" name="Shape 1"/>
+          <p:cNvSpPr/>
+          <p:nvPr/>
+        </p:nvSpPr>
+        <p:spPr>
+          <a:xfrm>
+            <a:off x="566928" y="1133856"/>
+            <a:ext cx="777240" cy="41148"/>
+          </a:xfrm>
+          <a:prstGeom prst="rect">
+            <a:avLst/>
+          </a:prstGeom>
+          <a:solidFill>
+            <a:srgbClr val="3F6B5F"/>
+          </a:solidFill>
+          <a:ln/>
+        </p:spPr>
+      </p:sp>
+      <p:sp>
+        <p:nvSpPr>
+          <p:cNvPr id="4" name="Shape 2"/>
+          <p:cNvSpPr/>
+          <p:nvPr/>
+        </p:nvSpPr>
+        <p:spPr>
+          <a:xfrm>
+            <a:off x="548640" y="1371600"/>
+            <a:ext cx="5362956" cy="1097280"/>
+          </a:xfrm>
+          <a:prstGeom prst="roundRect">
+            <a:avLst>
+              <a:gd name="adj" fmla="val 7500"/>
+            </a:avLst>
+          </a:prstGeom>
+          <a:solidFill>
+            <a:srgbClr val="FFFFFF"/>
+          </a:solidFill>
+          <a:ln w="22225">
+            <a:solidFill>
+              <a:srgbClr val="3A5A8C"/>
+            </a:solidFill>
+            <a:prstDash val="solid"/>
+          </a:ln>
+        </p:spPr>
+      </p:sp>
+      <p:sp>
+        <p:nvSpPr>
+          <p:cNvPr id="5" name="Text 3"/>
+          <p:cNvSpPr/>
+          <p:nvPr/>
+        </p:nvSpPr>
+        <p:spPr>
+          <a:xfrm>
+            <a:off x="603504" y="1481328"/>
+            <a:ext cx="5253228" cy="274320"/>
+          </a:xfrm>
+          <a:prstGeom prst="rect">
+            <a:avLst/>
+          </a:prstGeom>
+          <a:noFill/>
+          <a:ln/>
+        </p:spPr>
+        <p:txBody>
+          <a:bodyPr wrap="square" rtlCol="0" anchor="ctr"/>
+          <a:lstStyle/>
+          <a:p>
+            <a:pPr algn="ctr" indent="0" marL="0">
+              <a:buNone/>
+            </a:pPr>
+            <a:r>
+              <a:rPr lang="en-US" sz="950" b="1" dirty="0">
+                <a:solidFill>
+                  <a:srgbClr val="6B6357"/>
+                </a:solidFill>
+                <a:latin typeface="Malgun Gothic" pitchFamily="34" charset="0"/>
+                <a:ea typeface="Malgun Gothic" pitchFamily="34" charset="-122"/>
+                <a:cs typeface="Malgun Gothic" pitchFamily="34" charset="-120"/>
+              </a:rPr>
+              <a:t>오늘</a:t>
+            </a:r>
+            <a:endParaRPr lang="en-US" sz="950" dirty="0"/>
+          </a:p>
+        </p:txBody>
+      </p:sp>
+      <p:sp>
+        <p:nvSpPr>
+          <p:cNvPr id="6" name="Text 4"/>
+          <p:cNvSpPr/>
+          <p:nvPr/>
+        </p:nvSpPr>
+        <p:spPr>
+          <a:xfrm>
+            <a:off x="621792" y="1773936"/>
+            <a:ext cx="5216652" cy="603504"/>
+          </a:xfrm>
+          <a:prstGeom prst="rect">
+            <a:avLst/>
+          </a:prstGeom>
+          <a:noFill/>
+          <a:ln/>
+        </p:spPr>
+        <p:txBody>
+          <a:bodyPr wrap="square" rtlCol="0" anchor="ctr">
+            <a:normAutofit/>
+          </a:bodyPr>
+          <a:lstStyle/>
+          <a:p>
+            <a:pPr algn="ctr" indent="0" marL="0">
+              <a:lnSpc>
+                <a:spcPct val="102000"/>
+              </a:lnSpc>
+              <a:buNone/>
+            </a:pPr>
+            <a:r>
+              <a:rPr lang="en-US" sz="1150" dirty="0">
+                <a:solidFill>
+                  <a:srgbClr val="2A2723"/>
+                </a:solidFill>
+                <a:latin typeface="Malgun Gothic" pitchFamily="34" charset="0"/>
+                <a:ea typeface="Malgun Gothic" pitchFamily="34" charset="-122"/>
+                <a:cs typeface="Malgun Gothic" pitchFamily="34" charset="-120"/>
+              </a:rPr>
+              <a:t>이미지 — 깊이의 벽  발견하고 뚫기</a:t>
+            </a:r>
+            <a:endParaRPr lang="en-US" sz="1150" dirty="0"/>
+          </a:p>
+        </p:txBody>
+      </p:sp>
+      <p:sp>
+        <p:nvSpPr>
+          <p:cNvPr id="7" name="Text 5"/>
+          <p:cNvSpPr/>
+          <p:nvPr/>
+        </p:nvSpPr>
+        <p:spPr>
+          <a:xfrm>
+            <a:off x="5911596" y="1371600"/>
+            <a:ext cx="365760" cy="1097280"/>
+          </a:xfrm>
+          <a:prstGeom prst="rect">
+            <a:avLst/>
+          </a:prstGeom>
+          <a:noFill/>
+          <a:ln/>
+        </p:spPr>
+        <p:txBody>
+          <a:bodyPr wrap="square" rtlCol="0" anchor="ctr"/>
+          <a:lstStyle/>
+          <a:p>
+            <a:pPr algn="ctr" indent="0" marL="0">
+              <a:buNone/>
+            </a:pPr>
+            <a:r>
+              <a:rPr lang="en-US" sz="1700" b="1" dirty="0">
+                <a:solidFill>
+                  <a:srgbClr val="3F6B5F"/>
+                </a:solidFill>
+                <a:latin typeface="Malgun Gothic" pitchFamily="34" charset="0"/>
+                <a:ea typeface="Malgun Gothic" pitchFamily="34" charset="-122"/>
+                <a:cs typeface="Malgun Gothic" pitchFamily="34" charset="-120"/>
+              </a:rPr>
+              <a:t>→</a:t>
+            </a:r>
+            <a:endParaRPr lang="en-US" sz="1700" dirty="0"/>
+          </a:p>
+        </p:txBody>
+      </p:sp>
+      <p:sp>
+        <p:nvSpPr>
+          <p:cNvPr id="8" name="Shape 6"/>
+          <p:cNvSpPr/>
+          <p:nvPr/>
+        </p:nvSpPr>
+        <p:spPr>
+          <a:xfrm>
+            <a:off x="6277356" y="1371600"/>
+            <a:ext cx="5362956" cy="1097280"/>
+          </a:xfrm>
+          <a:prstGeom prst="roundRect">
+            <a:avLst>
+              <a:gd name="adj" fmla="val 7500"/>
+            </a:avLst>
+          </a:prstGeom>
+          <a:solidFill>
+            <a:srgbClr val="FFFFFF"/>
+          </a:solidFill>
+          <a:ln w="22225">
+            <a:solidFill>
+              <a:srgbClr val="A65A3F"/>
+            </a:solidFill>
+            <a:prstDash val="solid"/>
+          </a:ln>
+        </p:spPr>
+      </p:sp>
+      <p:sp>
+        <p:nvSpPr>
+          <p:cNvPr id="9" name="Text 7"/>
+          <p:cNvSpPr/>
+          <p:nvPr/>
+        </p:nvSpPr>
+        <p:spPr>
+          <a:xfrm>
+            <a:off x="6332220" y="1481328"/>
+            <a:ext cx="5253228" cy="274320"/>
+          </a:xfrm>
+          <a:prstGeom prst="rect">
+            <a:avLst/>
+          </a:prstGeom>
+          <a:noFill/>
+          <a:ln/>
+        </p:spPr>
+        <p:txBody>
+          <a:bodyPr wrap="square" rtlCol="0" anchor="ctr"/>
+          <a:lstStyle/>
+          <a:p>
+            <a:pPr algn="ctr" indent="0" marL="0">
+              <a:buNone/>
+            </a:pPr>
+            <a:r>
+              <a:rPr lang="en-US" sz="950" b="1" dirty="0">
+                <a:solidFill>
+                  <a:srgbClr val="6B6357"/>
+                </a:solidFill>
+                <a:latin typeface="Malgun Gothic" pitchFamily="34" charset="0"/>
+                <a:ea typeface="Malgun Gothic" pitchFamily="34" charset="-122"/>
+                <a:cs typeface="Malgun Gothic" pitchFamily="34" charset="-120"/>
+              </a:rPr>
+              <a:t>다음</a:t>
+            </a:r>
+            <a:endParaRPr lang="en-US" sz="950" dirty="0"/>
+          </a:p>
+        </p:txBody>
+      </p:sp>
+      <p:sp>
+        <p:nvSpPr>
+          <p:cNvPr id="10" name="Text 8"/>
+          <p:cNvSpPr/>
+          <p:nvPr/>
+        </p:nvSpPr>
+        <p:spPr>
+          <a:xfrm>
+            <a:off x="6350508" y="1773936"/>
+            <a:ext cx="5216652" cy="603504"/>
+          </a:xfrm>
+          <a:prstGeom prst="rect">
+            <a:avLst/>
+          </a:prstGeom>
+          <a:noFill/>
+          <a:ln/>
+        </p:spPr>
+        <p:txBody>
+          <a:bodyPr wrap="square" rtlCol="0" anchor="ctr">
+            <a:normAutofit/>
+          </a:bodyPr>
+          <a:lstStyle/>
+          <a:p>
+            <a:pPr algn="ctr" indent="0" marL="0">
+              <a:lnSpc>
+                <a:spcPct val="102000"/>
+              </a:lnSpc>
+              <a:buNone/>
+            </a:pPr>
+            <a:r>
+              <a:rPr lang="en-US" sz="1150" dirty="0">
+                <a:solidFill>
+                  <a:srgbClr val="2A2723"/>
+                </a:solidFill>
+                <a:latin typeface="Malgun Gothic" pitchFamily="34" charset="0"/>
+                <a:ea typeface="Malgun Gothic" pitchFamily="34" charset="-122"/>
+                <a:cs typeface="Malgun Gothic" pitchFamily="34" charset="-120"/>
+              </a:rPr>
+              <a:t>언어 — 순차의 벽  같은 모양임을 알아보기</a:t>
+            </a:r>
+            <a:endParaRPr lang="en-US" sz="1150" dirty="0"/>
+          </a:p>
+        </p:txBody>
+      </p:sp>
+      <p:sp>
+        <p:nvSpPr>
+          <p:cNvPr id="11" name="Shape 9"/>
+          <p:cNvSpPr/>
+          <p:nvPr/>
+        </p:nvSpPr>
+        <p:spPr>
+          <a:xfrm>
+            <a:off x="548640" y="2615184"/>
+            <a:ext cx="11091672" cy="548640"/>
+          </a:xfrm>
+          <a:prstGeom prst="roundRect">
+            <a:avLst>
+              <a:gd name="adj" fmla="val 10000"/>
+            </a:avLst>
+          </a:prstGeom>
+          <a:solidFill>
+            <a:srgbClr val="F2EDE4"/>
+          </a:solidFill>
+          <a:ln/>
+        </p:spPr>
+      </p:sp>
+      <p:sp>
+        <p:nvSpPr>
+          <p:cNvPr id="12" name="Shape 10"/>
+          <p:cNvSpPr/>
+          <p:nvPr/>
+        </p:nvSpPr>
+        <p:spPr>
+          <a:xfrm>
+            <a:off x="548640" y="2615184"/>
+            <a:ext cx="54864" cy="548640"/>
+          </a:xfrm>
+          <a:prstGeom prst="rect">
+            <a:avLst/>
+          </a:prstGeom>
+          <a:solidFill>
+            <a:srgbClr val="C8A15A"/>
+          </a:solidFill>
+          <a:ln/>
+        </p:spPr>
+      </p:sp>
+      <p:sp>
+        <p:nvSpPr>
+          <p:cNvPr id="13" name="Text 11"/>
+          <p:cNvSpPr/>
+          <p:nvPr/>
+        </p:nvSpPr>
+        <p:spPr>
+          <a:xfrm>
+            <a:off x="786384" y="2615184"/>
+            <a:ext cx="10707624" cy="548640"/>
+          </a:xfrm>
+          <a:prstGeom prst="rect">
+            <a:avLst/>
+          </a:prstGeom>
+          <a:noFill/>
+          <a:ln/>
+        </p:spPr>
+        <p:txBody>
+          <a:bodyPr wrap="square" rtlCol="0" anchor="ctr">
+            <a:normAutofit/>
+          </a:bodyPr>
+          <a:lstStyle/>
+          <a:p>
+            <a:pPr indent="0" marL="0">
+              <a:lnSpc>
+                <a:spcPct val="104000"/>
+              </a:lnSpc>
+              <a:buNone/>
+            </a:pPr>
+            <a:r>
+              <a:rPr lang="en-US" sz="1300" dirty="0">
+                <a:solidFill>
+                  <a:srgbClr val="6B6357"/>
+                </a:solidFill>
+                <a:latin typeface="Malgun Gothic" pitchFamily="34" charset="0"/>
+                <a:ea typeface="Malgun Gothic" pitchFamily="34" charset="-122"/>
+                <a:cs typeface="Malgun Gothic" pitchFamily="34" charset="-120"/>
+              </a:rPr>
+              <a:t>🔑 이미지 쪽에서 사람들이 </a:t>
+            </a:r>
+            <a:pPr indent="0" marL="0">
+              <a:lnSpc>
+                <a:spcPct val="104000"/>
+              </a:lnSpc>
+              <a:buNone/>
+            </a:pPr>
+            <a:r>
+              <a:rPr lang="en-US" sz="1300" b="1" dirty="0">
+                <a:solidFill>
+                  <a:srgbClr val="2A2723"/>
+                </a:solidFill>
+                <a:latin typeface="Malgun Gothic" pitchFamily="34" charset="0"/>
+                <a:ea typeface="Malgun Gothic" pitchFamily="34" charset="-122"/>
+                <a:cs typeface="Malgun Gothic" pitchFamily="34" charset="-120"/>
+              </a:rPr>
+              <a:t>깊이의 벽을 어떻게 발견하고 어떻게 뚫었는지</a:t>
+            </a:r>
+            <a:pPr indent="0" marL="0">
+              <a:lnSpc>
+                <a:spcPct val="104000"/>
+              </a:lnSpc>
+              <a:buNone/>
+            </a:pPr>
+            <a:r>
+              <a:rPr lang="en-US" sz="1300" dirty="0">
+                <a:solidFill>
+                  <a:srgbClr val="6B6357"/>
+                </a:solidFill>
+                <a:latin typeface="Malgun Gothic" pitchFamily="34" charset="0"/>
+                <a:ea typeface="Malgun Gothic" pitchFamily="34" charset="-122"/>
+                <a:cs typeface="Malgun Gothic" pitchFamily="34" charset="-120"/>
+              </a:rPr>
+              <a:t> 이해하고 나면, 언어 쪽 사람들이 만난 </a:t>
+            </a:r>
+            <a:pPr indent="0" marL="0">
+              <a:lnSpc>
+                <a:spcPct val="104000"/>
+              </a:lnSpc>
+              <a:buNone/>
+            </a:pPr>
+            <a:r>
+              <a:rPr lang="en-US" sz="1300" b="1" dirty="0">
+                <a:solidFill>
+                  <a:srgbClr val="2A2723"/>
+                </a:solidFill>
+                <a:latin typeface="Malgun Gothic" pitchFamily="34" charset="0"/>
+                <a:ea typeface="Malgun Gothic" pitchFamily="34" charset="-122"/>
+                <a:cs typeface="Malgun Gothic" pitchFamily="34" charset="-120"/>
+              </a:rPr>
+              <a:t>순차의 벽이 놀랄 만큼 같은 모양</a:t>
+            </a:r>
+            <a:pPr indent="0" marL="0">
+              <a:lnSpc>
+                <a:spcPct val="104000"/>
+              </a:lnSpc>
+              <a:buNone/>
+            </a:pPr>
+            <a:r>
+              <a:rPr lang="en-US" sz="1300" dirty="0">
+                <a:solidFill>
+                  <a:srgbClr val="6B6357"/>
+                </a:solidFill>
+                <a:latin typeface="Malgun Gothic" pitchFamily="34" charset="0"/>
+                <a:ea typeface="Malgun Gothic" pitchFamily="34" charset="-122"/>
+                <a:cs typeface="Malgun Gothic" pitchFamily="34" charset="-120"/>
+              </a:rPr>
+              <a:t>이라는 걸 알아보게 됩니다.</a:t>
+            </a:r>
+            <a:endParaRPr lang="en-US" sz="1300" dirty="0"/>
+          </a:p>
+        </p:txBody>
+      </p:sp>
+    </p:spTree>
+  </p:cSld>
+  <p:clrMapOvr>
+    <a:masterClrMapping/>
+  </p:clrMapOvr>
+</p:sld>
+</file>
+
+<file path=ppt/slides/slide8.xml><?xml version="1.0" encoding="utf-8"?>
+<p:sld xmlns:a="http://schemas.openxmlformats.org/drawingml/2006/main" xmlns:r="http://schemas.openxmlformats.org/officeDocument/2006/relationships" xmlns:p="http://schemas.openxmlformats.org/presentationml/2006/main">
+  <p:cSld name="Slide 8">
+    <p:bg>
+      <p:bgPr>
+        <a:solidFill>
+          <a:srgbClr val="FAF8F4"/>
+        </a:solidFill>
+      </p:bgPr>
+    </p:bg>
+    <p:spTree>
+      <p:nvGrpSpPr>
+        <p:cNvPr id="1" name=""/>
+        <p:cNvGrpSpPr/>
+        <p:nvPr/>
+      </p:nvGrpSpPr>
+      <p:grpSpPr>
+        <a:xfrm>
+          <a:off x="0" y="0"/>
+          <a:ext cx="0" cy="0"/>
+          <a:chOff x="0" y="0"/>
+          <a:chExt cx="0" cy="0"/>
+        </a:xfrm>
+      </p:grpSpPr>
+      <p:sp>
+        <p:nvSpPr>
+          <p:cNvPr id="2" name="Text 0"/>
+          <p:cNvSpPr/>
+          <p:nvPr/>
+        </p:nvSpPr>
+        <p:spPr>
+          <a:xfrm>
+            <a:off x="548640" y="384048"/>
+            <a:ext cx="11091672" cy="731520"/>
+          </a:xfrm>
+          <a:prstGeom prst="rect">
+            <a:avLst/>
+          </a:prstGeom>
+          <a:noFill/>
+          <a:ln/>
+        </p:spPr>
+        <p:txBody>
+          <a:bodyPr wrap="square" rtlCol="0" anchor="ctr">
+            <a:normAutofit/>
+          </a:bodyPr>
+          <a:lstStyle/>
+          <a:p>
+            <a:pPr indent="0" marL="0">
+              <a:buNone/>
+            </a:pPr>
+            <a:r>
+              <a:rPr lang="en-US" sz="2400" b="1" dirty="0">
+                <a:solidFill>
+                  <a:srgbClr val="2A2723"/>
+                </a:solidFill>
+                <a:latin typeface="Malgun Gothic" pitchFamily="34" charset="0"/>
+                <a:ea typeface="Malgun Gothic" pitchFamily="34" charset="-122"/>
+                <a:cs typeface="Malgun Gothic" pitchFamily="34" charset="-120"/>
+              </a:rPr>
+              <a:t>📌 이것만은 꼭 — </a:t>
+            </a:r>
+            <a:pPr indent="0" marL="0">
+              <a:buNone/>
+            </a:pPr>
+            <a:r>
+              <a:rPr lang="en-US" sz="2400" b="1" dirty="0">
+                <a:solidFill>
+                  <a:srgbClr val="3F6B5F"/>
+                </a:solidFill>
+                <a:latin typeface="Malgun Gothic" pitchFamily="34" charset="0"/>
+                <a:ea typeface="Malgun Gothic" pitchFamily="34" charset="-122"/>
+                <a:cs typeface="Malgun Gothic" pitchFamily="34" charset="-120"/>
+              </a:rPr>
+              <a:t>핵심 4문장</a:t>
+            </a:r>
+            <a:endParaRPr lang="en-US" sz="2400" dirty="0"/>
+          </a:p>
+        </p:txBody>
+      </p:sp>
+      <p:sp>
+        <p:nvSpPr>
+          <p:cNvPr id="3" name="Shape 1"/>
+          <p:cNvSpPr/>
+          <p:nvPr/>
+        </p:nvSpPr>
+        <p:spPr>
+          <a:xfrm>
+            <a:off x="566928" y="1133856"/>
+            <a:ext cx="777240" cy="41148"/>
+          </a:xfrm>
+          <a:prstGeom prst="rect">
+            <a:avLst/>
+          </a:prstGeom>
+          <a:solidFill>
+            <a:srgbClr val="3F6B5F"/>
+          </a:solidFill>
+          <a:ln/>
+        </p:spPr>
+      </p:sp>
+      <p:sp>
+        <p:nvSpPr>
+          <p:cNvPr id="4" name="Shape 2"/>
+          <p:cNvSpPr/>
+          <p:nvPr/>
+        </p:nvSpPr>
+        <p:spPr>
+          <a:xfrm>
+            <a:off x="548640" y="1371600"/>
+            <a:ext cx="11091672" cy="516636"/>
+          </a:xfrm>
+          <a:prstGeom prst="roundRect">
+            <a:avLst>
+              <a:gd name="adj" fmla="val 15929"/>
+            </a:avLst>
+          </a:prstGeom>
+          <a:solidFill>
+            <a:srgbClr val="FFFFFF"/>
+          </a:solidFill>
+          <a:ln w="12700">
+            <a:solidFill>
+              <a:srgbClr val="E3DACB"/>
+            </a:solidFill>
+            <a:prstDash val="solid"/>
+          </a:ln>
+        </p:spPr>
+      </p:sp>
+      <p:sp>
+        <p:nvSpPr>
+          <p:cNvPr id="5" name="Shape 3"/>
+          <p:cNvSpPr/>
+          <p:nvPr/>
+        </p:nvSpPr>
+        <p:spPr>
+          <a:xfrm>
+            <a:off x="676656" y="1474470"/>
+            <a:ext cx="310896" cy="310896"/>
+          </a:xfrm>
+          <a:prstGeom prst="roundRect">
+            <a:avLst>
+              <a:gd name="adj" fmla="val 17647"/>
+            </a:avLst>
+          </a:prstGeom>
+          <a:solidFill>
+            <a:srgbClr val="3F6B5F"/>
+          </a:solidFill>
+          <a:ln/>
+        </p:spPr>
+      </p:sp>
+      <p:sp>
+        <p:nvSpPr>
+          <p:cNvPr id="6" name="Text 4"/>
+          <p:cNvSpPr/>
+          <p:nvPr/>
+        </p:nvSpPr>
+        <p:spPr>
+          <a:xfrm>
+            <a:off x="676656" y="1474470"/>
+            <a:ext cx="310896" cy="310896"/>
+          </a:xfrm>
+          <a:prstGeom prst="rect">
+            <a:avLst/>
+          </a:prstGeom>
+          <a:noFill/>
+          <a:ln/>
+        </p:spPr>
+        <p:txBody>
+          <a:bodyPr wrap="square" rtlCol="0" anchor="ctr"/>
+          <a:lstStyle/>
+          <a:p>
+            <a:pPr algn="ctr" indent="0" marL="0">
+              <a:buNone/>
+            </a:pPr>
+            <a:r>
+              <a:rPr lang="en-US" sz="1200" b="1" dirty="0">
+                <a:solidFill>
+                  <a:srgbClr val="FFFFFF"/>
+                </a:solidFill>
+                <a:latin typeface="Malgun Gothic" pitchFamily="34" charset="0"/>
+                <a:ea typeface="Malgun Gothic" pitchFamily="34" charset="-122"/>
+                <a:cs typeface="Malgun Gothic" pitchFamily="34" charset="-120"/>
+              </a:rPr>
+              <a:t>1</a:t>
+            </a:r>
+            <a:endParaRPr lang="en-US" sz="1200" dirty="0"/>
+          </a:p>
+        </p:txBody>
+      </p:sp>
+      <p:sp>
+        <p:nvSpPr>
+          <p:cNvPr id="7" name="Text 5"/>
+          <p:cNvSpPr/>
+          <p:nvPr/>
+        </p:nvSpPr>
+        <p:spPr>
+          <a:xfrm>
+            <a:off x="1115568" y="1371600"/>
+            <a:ext cx="10378440" cy="516636"/>
+          </a:xfrm>
+          <a:prstGeom prst="rect">
+            <a:avLst/>
+          </a:prstGeom>
+          <a:noFill/>
+          <a:ln/>
+        </p:spPr>
+        <p:txBody>
+          <a:bodyPr wrap="square" rtlCol="0" anchor="ctr">
+            <a:normAutofit/>
+          </a:bodyPr>
+          <a:lstStyle/>
+          <a:p>
+            <a:pPr indent="0" marL="0">
+              <a:lnSpc>
+                <a:spcPct val="102000"/>
+              </a:lnSpc>
+              <a:buNone/>
+            </a:pPr>
+            <a:r>
+              <a:rPr lang="en-US" sz="1300" dirty="0">
+                <a:solidFill>
+                  <a:srgbClr val="2A2723"/>
+                </a:solidFill>
+                <a:latin typeface="Malgun Gothic" pitchFamily="34" charset="0"/>
+                <a:ea typeface="Malgun Gothic" pitchFamily="34" charset="-122"/>
+                <a:cs typeface="Malgun Gothic" pitchFamily="34" charset="-120"/>
+              </a:rPr>
+              <a:t>문서를 더 많이 넣어도 답이 흐려지는 건 </a:t>
+            </a:r>
+            <a:pPr indent="0" marL="0">
+              <a:lnSpc>
+                <a:spcPct val="102000"/>
+              </a:lnSpc>
+              <a:buNone/>
+            </a:pPr>
+            <a:r>
+              <a:rPr lang="en-US" sz="1300" b="1" dirty="0">
+                <a:solidFill>
+                  <a:srgbClr val="2A2723"/>
+                </a:solidFill>
+                <a:latin typeface="Malgun Gothic" pitchFamily="34" charset="0"/>
+                <a:ea typeface="Malgun Gothic" pitchFamily="34" charset="-122"/>
+                <a:cs typeface="Malgun Gothic" pitchFamily="34" charset="-120"/>
+              </a:rPr>
+              <a:t>AI가 멍청해서가 아님</a:t>
+            </a:r>
+            <a:endParaRPr lang="en-US" sz="1300" dirty="0"/>
+          </a:p>
+        </p:txBody>
+      </p:sp>
+      <p:sp>
+        <p:nvSpPr>
+          <p:cNvPr id="8" name="Shape 6"/>
+          <p:cNvSpPr/>
+          <p:nvPr/>
+        </p:nvSpPr>
+        <p:spPr>
+          <a:xfrm>
+            <a:off x="548640" y="1979676"/>
+            <a:ext cx="11091672" cy="516636"/>
+          </a:xfrm>
+          <a:prstGeom prst="roundRect">
+            <a:avLst>
+              <a:gd name="adj" fmla="val 15929"/>
+            </a:avLst>
+          </a:prstGeom>
+          <a:solidFill>
+            <a:srgbClr val="FFFFFF"/>
+          </a:solidFill>
+          <a:ln w="12700">
+            <a:solidFill>
+              <a:srgbClr val="E3DACB"/>
+            </a:solidFill>
+            <a:prstDash val="solid"/>
+          </a:ln>
+        </p:spPr>
+      </p:sp>
+      <p:sp>
+        <p:nvSpPr>
+          <p:cNvPr id="9" name="Shape 7"/>
+          <p:cNvSpPr/>
+          <p:nvPr/>
+        </p:nvSpPr>
+        <p:spPr>
+          <a:xfrm>
+            <a:off x="676656" y="2082546"/>
+            <a:ext cx="310896" cy="310896"/>
+          </a:xfrm>
+          <a:prstGeom prst="roundRect">
+            <a:avLst>
+              <a:gd name="adj" fmla="val 17647"/>
+            </a:avLst>
+          </a:prstGeom>
+          <a:solidFill>
+            <a:srgbClr val="3F6B5F"/>
+          </a:solidFill>
+          <a:ln/>
+        </p:spPr>
+      </p:sp>
+      <p:sp>
+        <p:nvSpPr>
+          <p:cNvPr id="10" name="Text 8"/>
+          <p:cNvSpPr/>
+          <p:nvPr/>
+        </p:nvSpPr>
+        <p:spPr>
+          <a:xfrm>
+            <a:off x="676656" y="2082546"/>
+            <a:ext cx="310896" cy="310896"/>
+          </a:xfrm>
+          <a:prstGeom prst="rect">
+            <a:avLst/>
+          </a:prstGeom>
+          <a:noFill/>
+          <a:ln/>
+        </p:spPr>
+        <p:txBody>
+          <a:bodyPr wrap="square" rtlCol="0" anchor="ctr"/>
+          <a:lstStyle/>
+          <a:p>
+            <a:pPr algn="ctr" indent="0" marL="0">
+              <a:buNone/>
+            </a:pPr>
+            <a:r>
+              <a:rPr lang="en-US" sz="1200" b="1" dirty="0">
+                <a:solidFill>
+                  <a:srgbClr val="FFFFFF"/>
+                </a:solidFill>
+                <a:latin typeface="Malgun Gothic" pitchFamily="34" charset="0"/>
+                <a:ea typeface="Malgun Gothic" pitchFamily="34" charset="-122"/>
+                <a:cs typeface="Malgun Gothic" pitchFamily="34" charset="-120"/>
+              </a:rPr>
+              <a:t>2</a:t>
+            </a:r>
+            <a:endParaRPr lang="en-US" sz="1200" dirty="0"/>
+          </a:p>
+        </p:txBody>
+      </p:sp>
+      <p:sp>
+        <p:nvSpPr>
+          <p:cNvPr id="11" name="Text 9"/>
+          <p:cNvSpPr/>
+          <p:nvPr/>
+        </p:nvSpPr>
+        <p:spPr>
+          <a:xfrm>
+            <a:off x="1115568" y="1979676"/>
+            <a:ext cx="10378440" cy="516636"/>
+          </a:xfrm>
+          <a:prstGeom prst="rect">
+            <a:avLst/>
+          </a:prstGeom>
+          <a:noFill/>
+          <a:ln/>
+        </p:spPr>
+        <p:txBody>
+          <a:bodyPr wrap="square" rtlCol="0" anchor="ctr">
+            <a:normAutofit/>
+          </a:bodyPr>
+          <a:lstStyle/>
+          <a:p>
+            <a:pPr indent="0" marL="0">
+              <a:lnSpc>
+                <a:spcPct val="102000"/>
+              </a:lnSpc>
+              <a:buNone/>
+            </a:pPr>
+            <a:r>
+              <a:rPr lang="en-US" sz="1300" dirty="0">
+                <a:solidFill>
+                  <a:srgbClr val="2A2723"/>
+                </a:solidFill>
+                <a:latin typeface="Malgun Gothic" pitchFamily="34" charset="0"/>
+                <a:ea typeface="Malgun Gothic" pitchFamily="34" charset="-122"/>
+                <a:cs typeface="Malgun Gothic" pitchFamily="34" charset="-120"/>
+              </a:rPr>
+              <a:t>정보는 </a:t>
+            </a:r>
+            <a:pPr indent="0" marL="0">
+              <a:lnSpc>
+                <a:spcPct val="102000"/>
+              </a:lnSpc>
+              <a:buNone/>
+            </a:pPr>
+            <a:r>
+              <a:rPr lang="en-US" sz="1300" b="1" dirty="0">
+                <a:solidFill>
+                  <a:srgbClr val="2A2723"/>
+                </a:solidFill>
+                <a:latin typeface="Malgun Gothic" pitchFamily="34" charset="0"/>
+                <a:ea typeface="Malgun Gothic" pitchFamily="34" charset="-122"/>
+                <a:cs typeface="Malgun Gothic" pitchFamily="34" charset="-120"/>
+              </a:rPr>
+              <a:t>"얼마나 넣느냐"가 아니라 "어떻게 배치·집중시키느냐"</a:t>
+            </a:r>
+            <a:pPr indent="0" marL="0">
+              <a:lnSpc>
+                <a:spcPct val="102000"/>
+              </a:lnSpc>
+              <a:buNone/>
+            </a:pPr>
+            <a:r>
+              <a:rPr lang="en-US" sz="1300" dirty="0">
+                <a:solidFill>
+                  <a:srgbClr val="2A2723"/>
+                </a:solidFill>
+                <a:latin typeface="Malgun Gothic" pitchFamily="34" charset="0"/>
+                <a:ea typeface="Malgun Gothic" pitchFamily="34" charset="-122"/>
+                <a:cs typeface="Malgun Gothic" pitchFamily="34" charset="-120"/>
+              </a:rPr>
+              <a:t>의 문제 (컨텍스트 창 + 주의 배분)</a:t>
+            </a:r>
+            <a:endParaRPr lang="en-US" sz="1300" dirty="0"/>
+          </a:p>
+        </p:txBody>
+      </p:sp>
+      <p:sp>
+        <p:nvSpPr>
+          <p:cNvPr id="12" name="Shape 10"/>
+          <p:cNvSpPr/>
+          <p:nvPr/>
+        </p:nvSpPr>
+        <p:spPr>
+          <a:xfrm>
+            <a:off x="548640" y="2587752"/>
+            <a:ext cx="11091672" cy="516636"/>
+          </a:xfrm>
+          <a:prstGeom prst="roundRect">
+            <a:avLst>
+              <a:gd name="adj" fmla="val 15929"/>
+            </a:avLst>
+          </a:prstGeom>
+          <a:solidFill>
+            <a:srgbClr val="FFFFFF"/>
+          </a:solidFill>
+          <a:ln w="12700">
+            <a:solidFill>
+              <a:srgbClr val="E3DACB"/>
+            </a:solidFill>
+            <a:prstDash val="solid"/>
+          </a:ln>
+        </p:spPr>
+      </p:sp>
+      <p:sp>
+        <p:nvSpPr>
+          <p:cNvPr id="13" name="Shape 11"/>
+          <p:cNvSpPr/>
+          <p:nvPr/>
+        </p:nvSpPr>
+        <p:spPr>
+          <a:xfrm>
+            <a:off x="676656" y="2690622"/>
+            <a:ext cx="310896" cy="310896"/>
+          </a:xfrm>
+          <a:prstGeom prst="roundRect">
+            <a:avLst>
+              <a:gd name="adj" fmla="val 17647"/>
+            </a:avLst>
+          </a:prstGeom>
+          <a:solidFill>
+            <a:srgbClr val="3F6B5F"/>
+          </a:solidFill>
+          <a:ln/>
+        </p:spPr>
+      </p:sp>
+      <p:sp>
+        <p:nvSpPr>
+          <p:cNvPr id="14" name="Text 12"/>
+          <p:cNvSpPr/>
+          <p:nvPr/>
+        </p:nvSpPr>
+        <p:spPr>
+          <a:xfrm>
+            <a:off x="676656" y="2690622"/>
+            <a:ext cx="310896" cy="310896"/>
+          </a:xfrm>
+          <a:prstGeom prst="rect">
+            <a:avLst/>
+          </a:prstGeom>
+          <a:noFill/>
+          <a:ln/>
+        </p:spPr>
+        <p:txBody>
+          <a:bodyPr wrap="square" rtlCol="0" anchor="ctr"/>
+          <a:lstStyle/>
+          <a:p>
+            <a:pPr algn="ctr" indent="0" marL="0">
+              <a:buNone/>
+            </a:pPr>
+            <a:r>
+              <a:rPr lang="en-US" sz="1200" b="1" dirty="0">
+                <a:solidFill>
+                  <a:srgbClr val="FFFFFF"/>
+                </a:solidFill>
+                <a:latin typeface="Malgun Gothic" pitchFamily="34" charset="0"/>
+                <a:ea typeface="Malgun Gothic" pitchFamily="34" charset="-122"/>
+                <a:cs typeface="Malgun Gothic" pitchFamily="34" charset="-120"/>
+              </a:rPr>
+              <a:t>3</a:t>
+            </a:r>
+            <a:endParaRPr lang="en-US" sz="1200" dirty="0"/>
+          </a:p>
+        </p:txBody>
+      </p:sp>
+      <p:sp>
+        <p:nvSpPr>
+          <p:cNvPr id="15" name="Text 13"/>
+          <p:cNvSpPr/>
+          <p:nvPr/>
+        </p:nvSpPr>
+        <p:spPr>
+          <a:xfrm>
+            <a:off x="1115568" y="2587752"/>
+            <a:ext cx="10378440" cy="516636"/>
+          </a:xfrm>
+          <a:prstGeom prst="rect">
+            <a:avLst/>
+          </a:prstGeom>
+          <a:noFill/>
+          <a:ln/>
+        </p:spPr>
+        <p:txBody>
+          <a:bodyPr wrap="square" rtlCol="0" anchor="ctr">
+            <a:normAutofit/>
+          </a:bodyPr>
+          <a:lstStyle/>
+          <a:p>
+            <a:pPr indent="0" marL="0">
+              <a:lnSpc>
+                <a:spcPct val="102000"/>
+              </a:lnSpc>
+              <a:buNone/>
+            </a:pPr>
+            <a:r>
+              <a:rPr lang="en-US" sz="1300" dirty="0">
+                <a:solidFill>
+                  <a:srgbClr val="2A2723"/>
+                </a:solidFill>
+                <a:latin typeface="Malgun Gothic" pitchFamily="34" charset="0"/>
+                <a:ea typeface="Malgun Gothic" pitchFamily="34" charset="-122"/>
+                <a:cs typeface="Malgun Gothic" pitchFamily="34" charset="-120"/>
+              </a:rPr>
+              <a:t>트랜스포머는 발명품이 아니라 </a:t>
+            </a:r>
+            <a:pPr indent="0" marL="0">
+              <a:lnSpc>
+                <a:spcPct val="102000"/>
+              </a:lnSpc>
+              <a:buNone/>
+            </a:pPr>
+            <a:r>
+              <a:rPr lang="en-US" sz="1300" b="1" dirty="0">
+                <a:solidFill>
+                  <a:srgbClr val="2A2723"/>
+                </a:solidFill>
+                <a:latin typeface="Malgun Gothic" pitchFamily="34" charset="0"/>
+                <a:ea typeface="Malgun Gothic" pitchFamily="34" charset="-122"/>
+                <a:cs typeface="Malgun Gothic" pitchFamily="34" charset="-120"/>
+              </a:rPr>
+              <a:t>이미지·언어 두 분야가 같은 열쇠로 합류</a:t>
+            </a:r>
+            <a:pPr indent="0" marL="0">
+              <a:lnSpc>
+                <a:spcPct val="102000"/>
+              </a:lnSpc>
+              <a:buNone/>
+            </a:pPr>
+            <a:r>
+              <a:rPr lang="en-US" sz="1300" dirty="0">
+                <a:solidFill>
+                  <a:srgbClr val="2A2723"/>
+                </a:solidFill>
+                <a:latin typeface="Malgun Gothic" pitchFamily="34" charset="0"/>
+                <a:ea typeface="Malgun Gothic" pitchFamily="34" charset="-122"/>
+                <a:cs typeface="Malgun Gothic" pitchFamily="34" charset="-120"/>
+              </a:rPr>
+              <a:t>한 결과</a:t>
+            </a:r>
+            <a:endParaRPr lang="en-US" sz="1300" dirty="0"/>
+          </a:p>
+        </p:txBody>
+      </p:sp>
+      <p:sp>
+        <p:nvSpPr>
+          <p:cNvPr id="16" name="Shape 14"/>
+          <p:cNvSpPr/>
+          <p:nvPr/>
+        </p:nvSpPr>
+        <p:spPr>
+          <a:xfrm>
+            <a:off x="548640" y="3195828"/>
+            <a:ext cx="11091672" cy="516636"/>
+          </a:xfrm>
+          <a:prstGeom prst="roundRect">
+            <a:avLst>
+              <a:gd name="adj" fmla="val 15929"/>
+            </a:avLst>
+          </a:prstGeom>
+          <a:solidFill>
+            <a:srgbClr val="FFFFFF"/>
+          </a:solidFill>
+          <a:ln w="12700">
+            <a:solidFill>
+              <a:srgbClr val="E3DACB"/>
+            </a:solidFill>
+            <a:prstDash val="solid"/>
+          </a:ln>
+        </p:spPr>
+      </p:sp>
+      <p:sp>
+        <p:nvSpPr>
+          <p:cNvPr id="17" name="Shape 15"/>
+          <p:cNvSpPr/>
+          <p:nvPr/>
+        </p:nvSpPr>
+        <p:spPr>
+          <a:xfrm>
+            <a:off x="676656" y="3298698"/>
+            <a:ext cx="310896" cy="310896"/>
+          </a:xfrm>
+          <a:prstGeom prst="roundRect">
+            <a:avLst>
+              <a:gd name="adj" fmla="val 17647"/>
+            </a:avLst>
+          </a:prstGeom>
+          <a:solidFill>
+            <a:srgbClr val="3F6B5F"/>
+          </a:solidFill>
+          <a:ln/>
+        </p:spPr>
+      </p:sp>
+      <p:sp>
+        <p:nvSpPr>
+          <p:cNvPr id="18" name="Text 16"/>
+          <p:cNvSpPr/>
+          <p:nvPr/>
+        </p:nvSpPr>
+        <p:spPr>
+          <a:xfrm>
+            <a:off x="676656" y="3298698"/>
+            <a:ext cx="310896" cy="310896"/>
+          </a:xfrm>
+          <a:prstGeom prst="rect">
+            <a:avLst/>
+          </a:prstGeom>
+          <a:noFill/>
+          <a:ln/>
+        </p:spPr>
+        <p:txBody>
+          <a:bodyPr wrap="square" rtlCol="0" anchor="ctr"/>
+          <a:lstStyle/>
+          <a:p>
+            <a:pPr algn="ctr" indent="0" marL="0">
+              <a:buNone/>
+            </a:pPr>
+            <a:r>
+              <a:rPr lang="en-US" sz="1200" b="1" dirty="0">
+                <a:solidFill>
+                  <a:srgbClr val="FFFFFF"/>
+                </a:solidFill>
+                <a:latin typeface="Malgun Gothic" pitchFamily="34" charset="0"/>
+                <a:ea typeface="Malgun Gothic" pitchFamily="34" charset="-122"/>
+                <a:cs typeface="Malgun Gothic" pitchFamily="34" charset="-120"/>
+              </a:rPr>
+              <a:t>4</a:t>
+            </a:r>
+            <a:endParaRPr lang="en-US" sz="1200" dirty="0"/>
+          </a:p>
+        </p:txBody>
+      </p:sp>
+      <p:sp>
+        <p:nvSpPr>
+          <p:cNvPr id="19" name="Text 17"/>
+          <p:cNvSpPr/>
+          <p:nvPr/>
+        </p:nvSpPr>
+        <p:spPr>
+          <a:xfrm>
+            <a:off x="1115568" y="3195828"/>
+            <a:ext cx="10378440" cy="516636"/>
+          </a:xfrm>
+          <a:prstGeom prst="rect">
+            <a:avLst/>
+          </a:prstGeom>
+          <a:noFill/>
+          <a:ln/>
+        </p:spPr>
+        <p:txBody>
+          <a:bodyPr wrap="square" rtlCol="0" anchor="ctr">
+            <a:normAutofit/>
+          </a:bodyPr>
+          <a:lstStyle/>
+          <a:p>
+            <a:pPr indent="0" marL="0">
+              <a:lnSpc>
+                <a:spcPct val="102000"/>
+              </a:lnSpc>
+              <a:buNone/>
+            </a:pPr>
+            <a:r>
+              <a:rPr lang="en-US" sz="1300" dirty="0">
+                <a:solidFill>
+                  <a:srgbClr val="2A2723"/>
+                </a:solidFill>
+                <a:latin typeface="Malgun Gothic" pitchFamily="34" charset="0"/>
+                <a:ea typeface="Malgun Gothic" pitchFamily="34" charset="-122"/>
+                <a:cs typeface="Malgun Gothic" pitchFamily="34" charset="-120"/>
+              </a:rPr>
+              <a:t>이미지의 </a:t>
+            </a:r>
+            <a:pPr indent="0" marL="0">
+              <a:lnSpc>
+                <a:spcPct val="102000"/>
+              </a:lnSpc>
+              <a:buNone/>
+            </a:pPr>
+            <a:r>
+              <a:rPr lang="en-US" sz="1300" b="1" dirty="0">
+                <a:solidFill>
+                  <a:srgbClr val="2A2723"/>
+                </a:solidFill>
+                <a:latin typeface="Malgun Gothic" pitchFamily="34" charset="0"/>
+                <a:ea typeface="Malgun Gothic" pitchFamily="34" charset="-122"/>
+                <a:cs typeface="Malgun Gothic" pitchFamily="34" charset="-120"/>
+              </a:rPr>
+              <a:t>깊이의 벽</a:t>
+            </a:r>
+            <a:pPr indent="0" marL="0">
+              <a:lnSpc>
+                <a:spcPct val="102000"/>
+              </a:lnSpc>
+              <a:buNone/>
+            </a:pPr>
+            <a:r>
+              <a:rPr lang="en-US" sz="1300" dirty="0">
+                <a:solidFill>
+                  <a:srgbClr val="2A2723"/>
+                </a:solidFill>
+                <a:latin typeface="Malgun Gothic" pitchFamily="34" charset="0"/>
+                <a:ea typeface="Malgun Gothic" pitchFamily="34" charset="-122"/>
+                <a:cs typeface="Malgun Gothic" pitchFamily="34" charset="-120"/>
+              </a:rPr>
+              <a:t>과 언어의 </a:t>
+            </a:r>
+            <a:pPr indent="0" marL="0">
+              <a:lnSpc>
+                <a:spcPct val="102000"/>
+              </a:lnSpc>
+              <a:buNone/>
+            </a:pPr>
+            <a:r>
+              <a:rPr lang="en-US" sz="1300" b="1" dirty="0">
+                <a:solidFill>
+                  <a:srgbClr val="2A2723"/>
+                </a:solidFill>
+                <a:latin typeface="Malgun Gothic" pitchFamily="34" charset="0"/>
+                <a:ea typeface="Malgun Gothic" pitchFamily="34" charset="-122"/>
+                <a:cs typeface="Malgun Gothic" pitchFamily="34" charset="-120"/>
+              </a:rPr>
+              <a:t>순차의 벽</a:t>
+            </a:r>
+            <a:pPr indent="0" marL="0">
+              <a:lnSpc>
+                <a:spcPct val="102000"/>
+              </a:lnSpc>
+              <a:buNone/>
+            </a:pPr>
+            <a:r>
+              <a:rPr lang="en-US" sz="1300" dirty="0">
+                <a:solidFill>
+                  <a:srgbClr val="2A2723"/>
+                </a:solidFill>
+                <a:latin typeface="Malgun Gothic" pitchFamily="34" charset="0"/>
+                <a:ea typeface="Malgun Gothic" pitchFamily="34" charset="-122"/>
+                <a:cs typeface="Malgun Gothic" pitchFamily="34" charset="-120"/>
+              </a:rPr>
+              <a:t>은 뿌리가 닮음 — 이미지부터 따라간다</a:t>
+            </a:r>
+            <a:endParaRPr lang="en-US" sz="1300" dirty="0"/>
+          </a:p>
+        </p:txBody>
+      </p:sp>
+    </p:spTree>
+  </p:cSld>
+  <p:clrMapOvr>
+    <a:masterClrMapping/>
+  </p:clrMapOvr>
+</p:sld>
+</file>
+
+<file path=ppt/slides/slide9.xml><?xml version="1.0" encoding="utf-8"?>
+<p:sld xmlns:a="http://schemas.openxmlformats.org/drawingml/2006/main" xmlns:r="http://schemas.openxmlformats.org/officeDocument/2006/relationships" xmlns:p="http://schemas.openxmlformats.org/presentationml/2006/main">
+  <p:cSld name="Slide 9">
+    <p:bg>
+      <p:bgPr>
+        <a:solidFill>
+          <a:srgbClr val="FAF8F4"/>
+        </a:solidFill>
+      </p:bgPr>
+    </p:bg>
+    <p:spTree>
+      <p:nvGrpSpPr>
+        <p:cNvPr id="1" name=""/>
+        <p:cNvGrpSpPr/>
+        <p:nvPr/>
+      </p:nvGrpSpPr>
+      <p:grpSpPr>
+        <a:xfrm>
+          <a:off x="0" y="0"/>
+          <a:ext cx="0" cy="0"/>
+          <a:chOff x="0" y="0"/>
+          <a:chExt cx="0" cy="0"/>
+        </a:xfrm>
+      </p:grpSpPr>
+      <p:sp>
+        <p:nvSpPr>
+          <p:cNvPr id="2" name="Text 0"/>
+          <p:cNvSpPr/>
+          <p:nvPr/>
+        </p:nvSpPr>
+        <p:spPr>
+          <a:xfrm>
+            <a:off x="548640" y="384048"/>
+            <a:ext cx="11091672" cy="731520"/>
+          </a:xfrm>
+          <a:prstGeom prst="rect">
+            <a:avLst/>
+          </a:prstGeom>
+          <a:noFill/>
+          <a:ln/>
+        </p:spPr>
+        <p:txBody>
+          <a:bodyPr wrap="square" rtlCol="0" anchor="ctr">
+            <a:normAutofit/>
+          </a:bodyPr>
+          <a:lstStyle/>
+          <a:p>
+            <a:pPr indent="0" marL="0">
+              <a:buNone/>
+            </a:pPr>
+            <a:r>
+              <a:rPr lang="en-US" sz="2400" b="1" dirty="0">
+                <a:solidFill>
+                  <a:srgbClr val="2A2723"/>
+                </a:solidFill>
+                <a:latin typeface="Malgun Gothic" pitchFamily="34" charset="0"/>
+                <a:ea typeface="Malgun Gothic" pitchFamily="34" charset="-122"/>
+                <a:cs typeface="Malgun Gothic" pitchFamily="34" charset="-120"/>
+              </a:rPr>
+              <a:t>🎯 이해도 확인 질문</a:t>
+            </a:r>
+            <a:endParaRPr lang="en-US" sz="2400" dirty="0"/>
+          </a:p>
+        </p:txBody>
+      </p:sp>
+      <p:sp>
+        <p:nvSpPr>
+          <p:cNvPr id="3" name="Shape 1"/>
+          <p:cNvSpPr/>
+          <p:nvPr/>
+        </p:nvSpPr>
+        <p:spPr>
+          <a:xfrm>
+            <a:off x="566928" y="1133856"/>
+            <a:ext cx="777240" cy="41148"/>
+          </a:xfrm>
+          <a:prstGeom prst="rect">
+            <a:avLst/>
+          </a:prstGeom>
+          <a:solidFill>
+            <a:srgbClr val="3F6B5F"/>
+          </a:solidFill>
+          <a:ln/>
+        </p:spPr>
+      </p:sp>
+      <p:sp>
+        <p:nvSpPr>
+          <p:cNvPr id="4" name="Shape 2"/>
+          <p:cNvSpPr/>
+          <p:nvPr/>
+        </p:nvSpPr>
+        <p:spPr>
+          <a:xfrm>
+            <a:off x="612648" y="1371600"/>
+            <a:ext cx="11027664" cy="441579"/>
+          </a:xfrm>
+          <a:prstGeom prst="roundRect">
+            <a:avLst>
+              <a:gd name="adj" fmla="val 18637"/>
+            </a:avLst>
+          </a:prstGeom>
+          <a:solidFill>
+            <a:srgbClr val="FFFFFF"/>
+          </a:solidFill>
+          <a:ln w="12700">
+            <a:solidFill>
+              <a:srgbClr val="E3DACB"/>
+            </a:solidFill>
+            <a:prstDash val="solid"/>
+          </a:ln>
+        </p:spPr>
+      </p:sp>
+      <p:sp>
+        <p:nvSpPr>
+          <p:cNvPr id="5" name="Shape 3"/>
+          <p:cNvSpPr/>
+          <p:nvPr/>
+        </p:nvSpPr>
+        <p:spPr>
+          <a:xfrm>
+            <a:off x="548640" y="1371600"/>
+            <a:ext cx="64008" cy="441579"/>
+          </a:xfrm>
+          <a:prstGeom prst="rect">
+            <a:avLst/>
+          </a:prstGeom>
+          <a:solidFill>
+            <a:srgbClr val="3F6B5F"/>
+          </a:solidFill>
+          <a:ln/>
+        </p:spPr>
+      </p:sp>
+      <p:sp>
+        <p:nvSpPr>
+          <p:cNvPr id="6" name="Text 4"/>
+          <p:cNvSpPr/>
+          <p:nvPr/>
+        </p:nvSpPr>
+        <p:spPr>
+          <a:xfrm>
+            <a:off x="786384" y="1371600"/>
+            <a:ext cx="10707624" cy="441579"/>
+          </a:xfrm>
+          <a:prstGeom prst="rect">
+            <a:avLst/>
+          </a:prstGeom>
+          <a:noFill/>
+          <a:ln/>
+        </p:spPr>
+        <p:txBody>
+          <a:bodyPr wrap="square" rtlCol="0" anchor="ctr">
+            <a:normAutofit/>
+          </a:bodyPr>
+          <a:lstStyle/>
+          <a:p>
+            <a:pPr indent="0" marL="0">
+              <a:lnSpc>
+                <a:spcPct val="102000"/>
+              </a:lnSpc>
+              <a:buNone/>
+            </a:pPr>
+            <a:r>
+              <a:rPr lang="en-US" sz="1250" b="1" dirty="0">
+                <a:solidFill>
+                  <a:srgbClr val="2A2723"/>
+                </a:solidFill>
+                <a:latin typeface="Malgun Gothic" pitchFamily="34" charset="0"/>
+                <a:ea typeface="Malgun Gothic" pitchFamily="34" charset="-122"/>
+                <a:cs typeface="Malgun Gothic" pitchFamily="34" charset="-120"/>
+              </a:rPr>
+              <a:t>Q1.</a:t>
+            </a:r>
+            <a:pPr indent="0" marL="0">
+              <a:lnSpc>
+                <a:spcPct val="102000"/>
+              </a:lnSpc>
+              <a:buNone/>
+            </a:pPr>
+            <a:r>
+              <a:rPr lang="en-US" sz="1250" dirty="0">
+                <a:solidFill>
+                  <a:srgbClr val="2A2723"/>
+                </a:solidFill>
+                <a:latin typeface="Malgun Gothic" pitchFamily="34" charset="0"/>
+                <a:ea typeface="Malgun Gothic" pitchFamily="34" charset="-122"/>
+                <a:cs typeface="Malgun Gothic" pitchFamily="34" charset="-120"/>
+              </a:rPr>
+              <a:t> 80쪽 문서를 통째로 넣어도 요약이 흐릿한 건 "AI가 멍청해서"인가? </a:t>
+            </a:r>
+            <a:pPr indent="0" marL="0">
+              <a:lnSpc>
+                <a:spcPct val="102000"/>
+              </a:lnSpc>
+              <a:buNone/>
+            </a:pPr>
+            <a:r>
+              <a:rPr lang="en-US" sz="1250" b="1" dirty="0">
+                <a:solidFill>
+                  <a:srgbClr val="2A2723"/>
+                </a:solidFill>
+                <a:latin typeface="Malgun Gothic" pitchFamily="34" charset="0"/>
+                <a:ea typeface="Malgun Gothic" pitchFamily="34" charset="-122"/>
+                <a:cs typeface="Malgun Gothic" pitchFamily="34" charset="-120"/>
+              </a:rPr>
+              <a:t>진짜 원인</a:t>
+            </a:r>
+            <a:pPr indent="0" marL="0">
+              <a:lnSpc>
+                <a:spcPct val="102000"/>
+              </a:lnSpc>
+              <a:buNone/>
+            </a:pPr>
+            <a:r>
+              <a:rPr lang="en-US" sz="1250" dirty="0">
+                <a:solidFill>
+                  <a:srgbClr val="2A2723"/>
+                </a:solidFill>
+                <a:latin typeface="Malgun Gothic" pitchFamily="34" charset="0"/>
+                <a:ea typeface="Malgun Gothic" pitchFamily="34" charset="-122"/>
+                <a:cs typeface="Malgun Gothic" pitchFamily="34" charset="-120"/>
+              </a:rPr>
+              <a:t>은?</a:t>
+            </a:r>
+            <a:endParaRPr lang="en-US" sz="1250" dirty="0"/>
+          </a:p>
+        </p:txBody>
+      </p:sp>
+      <p:sp>
+        <p:nvSpPr>
+          <p:cNvPr id="7" name="Shape 5"/>
+          <p:cNvSpPr/>
+          <p:nvPr/>
+        </p:nvSpPr>
+        <p:spPr>
+          <a:xfrm>
+            <a:off x="612648" y="1895475"/>
+            <a:ext cx="11027664" cy="441579"/>
+          </a:xfrm>
+          <a:prstGeom prst="roundRect">
+            <a:avLst>
+              <a:gd name="adj" fmla="val 18637"/>
+            </a:avLst>
+          </a:prstGeom>
+          <a:solidFill>
+            <a:srgbClr val="FFFFFF"/>
+          </a:solidFill>
+          <a:ln w="12700">
+            <a:solidFill>
+              <a:srgbClr val="E3DACB"/>
+            </a:solidFill>
+            <a:prstDash val="solid"/>
+          </a:ln>
+        </p:spPr>
+      </p:sp>
+      <p:sp>
+        <p:nvSpPr>
+          <p:cNvPr id="8" name="Shape 6"/>
+          <p:cNvSpPr/>
+          <p:nvPr/>
+        </p:nvSpPr>
+        <p:spPr>
+          <a:xfrm>
+            <a:off x="548640" y="1895475"/>
+            <a:ext cx="64008" cy="441579"/>
+          </a:xfrm>
+          <a:prstGeom prst="rect">
+            <a:avLst/>
+          </a:prstGeom>
+          <a:solidFill>
+            <a:srgbClr val="3F6B5F"/>
+          </a:solidFill>
+          <a:ln/>
+        </p:spPr>
+      </p:sp>
+      <p:sp>
+        <p:nvSpPr>
+          <p:cNvPr id="9" name="Text 7"/>
+          <p:cNvSpPr/>
+          <p:nvPr/>
+        </p:nvSpPr>
+        <p:spPr>
+          <a:xfrm>
+            <a:off x="786384" y="1895475"/>
+            <a:ext cx="10707624" cy="441579"/>
+          </a:xfrm>
+          <a:prstGeom prst="rect">
+            <a:avLst/>
+          </a:prstGeom>
+          <a:noFill/>
+          <a:ln/>
+        </p:spPr>
+        <p:txBody>
+          <a:bodyPr wrap="square" rtlCol="0" anchor="ctr">
+            <a:normAutofit/>
+          </a:bodyPr>
+          <a:lstStyle/>
+          <a:p>
+            <a:pPr indent="0" marL="0">
+              <a:lnSpc>
+                <a:spcPct val="102000"/>
+              </a:lnSpc>
+              <a:buNone/>
+            </a:pPr>
+            <a:r>
+              <a:rPr lang="en-US" sz="1250" b="1" dirty="0">
+                <a:solidFill>
+                  <a:srgbClr val="2A2723"/>
+                </a:solidFill>
+                <a:latin typeface="Malgun Gothic" pitchFamily="34" charset="0"/>
+                <a:ea typeface="Malgun Gothic" pitchFamily="34" charset="-122"/>
+                <a:cs typeface="Malgun Gothic" pitchFamily="34" charset="-120"/>
+              </a:rPr>
+              <a:t>Q2.</a:t>
+            </a:r>
+            <a:pPr indent="0" marL="0">
+              <a:lnSpc>
+                <a:spcPct val="102000"/>
+              </a:lnSpc>
+              <a:buNone/>
+            </a:pPr>
+            <a:r>
+              <a:rPr lang="en-US" sz="1250" dirty="0">
+                <a:solidFill>
+                  <a:srgbClr val="2A2723"/>
+                </a:solidFill>
+                <a:latin typeface="Malgun Gothic" pitchFamily="34" charset="0"/>
+                <a:ea typeface="Malgun Gothic" pitchFamily="34" charset="-122"/>
+                <a:cs typeface="Malgun Gothic" pitchFamily="34" charset="-120"/>
+              </a:rPr>
+              <a:t> 정보는 "얼마나 넣느냐"의 문제인가, 아니면 </a:t>
+            </a:r>
+            <a:pPr indent="0" marL="0">
+              <a:lnSpc>
+                <a:spcPct val="102000"/>
+              </a:lnSpc>
+              <a:buNone/>
+            </a:pPr>
+            <a:r>
+              <a:rPr lang="en-US" sz="1250" b="1" dirty="0">
+                <a:solidFill>
+                  <a:srgbClr val="2A2723"/>
+                </a:solidFill>
+                <a:latin typeface="Malgun Gothic" pitchFamily="34" charset="0"/>
+                <a:ea typeface="Malgun Gothic" pitchFamily="34" charset="-122"/>
+                <a:cs typeface="Malgun Gothic" pitchFamily="34" charset="-120"/>
+              </a:rPr>
+              <a:t>무엇의</a:t>
+            </a:r>
+            <a:pPr indent="0" marL="0">
+              <a:lnSpc>
+                <a:spcPct val="102000"/>
+              </a:lnSpc>
+              <a:buNone/>
+            </a:pPr>
+            <a:r>
+              <a:rPr lang="en-US" sz="1250" dirty="0">
+                <a:solidFill>
+                  <a:srgbClr val="2A2723"/>
+                </a:solidFill>
+                <a:latin typeface="Malgun Gothic" pitchFamily="34" charset="0"/>
+                <a:ea typeface="Malgun Gothic" pitchFamily="34" charset="-122"/>
+                <a:cs typeface="Malgun Gothic" pitchFamily="34" charset="-120"/>
+              </a:rPr>
+              <a:t> 문제인가?</a:t>
+            </a:r>
+            <a:endParaRPr lang="en-US" sz="1250" dirty="0"/>
+          </a:p>
+        </p:txBody>
+      </p:sp>
+      <p:sp>
+        <p:nvSpPr>
+          <p:cNvPr id="10" name="Shape 8"/>
+          <p:cNvSpPr/>
+          <p:nvPr/>
+        </p:nvSpPr>
+        <p:spPr>
+          <a:xfrm>
+            <a:off x="612648" y="2419350"/>
+            <a:ext cx="11027664" cy="441579"/>
+          </a:xfrm>
+          <a:prstGeom prst="roundRect">
+            <a:avLst>
+              <a:gd name="adj" fmla="val 18637"/>
+            </a:avLst>
+          </a:prstGeom>
+          <a:solidFill>
+            <a:srgbClr val="FFFFFF"/>
+          </a:solidFill>
+          <a:ln w="12700">
+            <a:solidFill>
+              <a:srgbClr val="E3DACB"/>
+            </a:solidFill>
+            <a:prstDash val="solid"/>
+          </a:ln>
+        </p:spPr>
+      </p:sp>
+      <p:sp>
+        <p:nvSpPr>
+          <p:cNvPr id="11" name="Shape 9"/>
+          <p:cNvSpPr/>
+          <p:nvPr/>
+        </p:nvSpPr>
+        <p:spPr>
+          <a:xfrm>
+            <a:off x="548640" y="2419350"/>
+            <a:ext cx="64008" cy="441579"/>
+          </a:xfrm>
+          <a:prstGeom prst="rect">
+            <a:avLst/>
+          </a:prstGeom>
+          <a:solidFill>
+            <a:srgbClr val="3F6B5F"/>
+          </a:solidFill>
+          <a:ln/>
+        </p:spPr>
+      </p:sp>
+      <p:sp>
+        <p:nvSpPr>
+          <p:cNvPr id="12" name="Text 10"/>
+          <p:cNvSpPr/>
+          <p:nvPr/>
+        </p:nvSpPr>
+        <p:spPr>
+          <a:xfrm>
+            <a:off x="786384" y="2419350"/>
+            <a:ext cx="10707624" cy="441579"/>
+          </a:xfrm>
+          <a:prstGeom prst="rect">
+            <a:avLst/>
+          </a:prstGeom>
+          <a:noFill/>
+          <a:ln/>
+        </p:spPr>
+        <p:txBody>
+          <a:bodyPr wrap="square" rtlCol="0" anchor="ctr">
+            <a:normAutofit/>
+          </a:bodyPr>
+          <a:lstStyle/>
+          <a:p>
+            <a:pPr indent="0" marL="0">
+              <a:lnSpc>
+                <a:spcPct val="102000"/>
+              </a:lnSpc>
+              <a:buNone/>
+            </a:pPr>
+            <a:r>
+              <a:rPr lang="en-US" sz="1250" b="1" dirty="0">
+                <a:solidFill>
+                  <a:srgbClr val="2A2723"/>
+                </a:solidFill>
+                <a:latin typeface="Malgun Gothic" pitchFamily="34" charset="0"/>
+                <a:ea typeface="Malgun Gothic" pitchFamily="34" charset="-122"/>
+                <a:cs typeface="Malgun Gothic" pitchFamily="34" charset="-120"/>
+              </a:rPr>
+              <a:t>Q3.</a:t>
+            </a:r>
+            <a:pPr indent="0" marL="0">
+              <a:lnSpc>
+                <a:spcPct val="102000"/>
+              </a:lnSpc>
+              <a:buNone/>
+            </a:pPr>
+            <a:r>
+              <a:rPr lang="en-US" sz="1250" dirty="0">
+                <a:solidFill>
+                  <a:srgbClr val="2A2723"/>
+                </a:solidFill>
+                <a:latin typeface="Malgun Gothic" pitchFamily="34" charset="0"/>
+                <a:ea typeface="Malgun Gothic" pitchFamily="34" charset="-122"/>
+                <a:cs typeface="Malgun Gothic" pitchFamily="34" charset="-120"/>
+              </a:rPr>
+              <a:t> 트랜스포머는 어떻게 등장했나? (두 분야 · 같은 열쇠 · 합류)</a:t>
+            </a:r>
+            <a:endParaRPr lang="en-US" sz="1250" dirty="0"/>
+          </a:p>
+        </p:txBody>
+      </p:sp>
+      <p:sp>
+        <p:nvSpPr>
+          <p:cNvPr id="13" name="Shape 11"/>
+          <p:cNvSpPr/>
+          <p:nvPr/>
+        </p:nvSpPr>
+        <p:spPr>
+          <a:xfrm>
+            <a:off x="612648" y="2943225"/>
+            <a:ext cx="11027664" cy="441579"/>
+          </a:xfrm>
+          <a:prstGeom prst="roundRect">
+            <a:avLst>
+              <a:gd name="adj" fmla="val 18637"/>
+            </a:avLst>
+          </a:prstGeom>
+          <a:solidFill>
+            <a:srgbClr val="FFFFFF"/>
+          </a:solidFill>
+          <a:ln w="12700">
+            <a:solidFill>
+              <a:srgbClr val="E3DACB"/>
+            </a:solidFill>
+            <a:prstDash val="solid"/>
+          </a:ln>
+        </p:spPr>
+      </p:sp>
+      <p:sp>
+        <p:nvSpPr>
+          <p:cNvPr id="14" name="Shape 12"/>
+          <p:cNvSpPr/>
+          <p:nvPr/>
+        </p:nvSpPr>
+        <p:spPr>
+          <a:xfrm>
+            <a:off x="548640" y="2943225"/>
+            <a:ext cx="64008" cy="441579"/>
+          </a:xfrm>
+          <a:prstGeom prst="rect">
+            <a:avLst/>
+          </a:prstGeom>
+          <a:solidFill>
+            <a:srgbClr val="3F6B5F"/>
+          </a:solidFill>
+          <a:ln/>
+        </p:spPr>
+      </p:sp>
+      <p:sp>
+        <p:nvSpPr>
+          <p:cNvPr id="15" name="Text 13"/>
+          <p:cNvSpPr/>
+          <p:nvPr/>
+        </p:nvSpPr>
+        <p:spPr>
+          <a:xfrm>
+            <a:off x="786384" y="2943225"/>
+            <a:ext cx="10707624" cy="441579"/>
+          </a:xfrm>
+          <a:prstGeom prst="rect">
+            <a:avLst/>
+          </a:prstGeom>
+          <a:noFill/>
+          <a:ln/>
+        </p:spPr>
+        <p:txBody>
+          <a:bodyPr wrap="square" rtlCol="0" anchor="ctr">
+            <a:normAutofit/>
+          </a:bodyPr>
+          <a:lstStyle/>
+          <a:p>
+            <a:pPr indent="0" marL="0">
+              <a:lnSpc>
+                <a:spcPct val="102000"/>
+              </a:lnSpc>
+              <a:buNone/>
+            </a:pPr>
+            <a:r>
+              <a:rPr lang="en-US" sz="1250" b="1" dirty="0">
+                <a:solidFill>
+                  <a:srgbClr val="2A2723"/>
+                </a:solidFill>
+                <a:latin typeface="Malgun Gothic" pitchFamily="34" charset="0"/>
+                <a:ea typeface="Malgun Gothic" pitchFamily="34" charset="-122"/>
+                <a:cs typeface="Malgun Gothic" pitchFamily="34" charset="-120"/>
+              </a:rPr>
+              <a:t>Q4.</a:t>
+            </a:r>
+            <a:pPr indent="0" marL="0">
+              <a:lnSpc>
+                <a:spcPct val="102000"/>
+              </a:lnSpc>
+              <a:buNone/>
+            </a:pPr>
+            <a:r>
+              <a:rPr lang="en-US" sz="1250" dirty="0">
+                <a:solidFill>
+                  <a:srgbClr val="2A2723"/>
+                </a:solidFill>
+                <a:latin typeface="Malgun Gothic" pitchFamily="34" charset="0"/>
+                <a:ea typeface="Malgun Gothic" pitchFamily="34" charset="-122"/>
+                <a:cs typeface="Malgun Gothic" pitchFamily="34" charset="-120"/>
+              </a:rPr>
+              <a:t> 이미지의 벽과 언어의 벽은 각각 무엇이며, 둘의 관계는?</a:t>
+            </a:r>
+            <a:endParaRPr lang="en-US" sz="1250" dirty="0"/>
           </a:p>
         </p:txBody>
       </p:sp>
